--- a/Homework/finance/2023200073/pythonFINAL .pptx
+++ b/Homework/finance/2023200073/pythonFINAL .pptx
@@ -9,9 +9,9 @@
   </p:notesMasterIdLst>
   <p:sldIdLst>
     <p:sldId id="256" r:id="rId3"/>
-    <p:sldId id="305" r:id="rId5"/>
-    <p:sldId id="266" r:id="rId6"/>
-    <p:sldId id="293" r:id="rId7"/>
+    <p:sldId id="307" r:id="rId5"/>
+    <p:sldId id="308" r:id="rId6"/>
+    <p:sldId id="309" r:id="rId7"/>
     <p:sldId id="287" r:id="rId8"/>
   </p:sldIdLst>
   <p:sldSz cx="12192000" cy="6858000"/>
@@ -117,7 +117,7 @@
   <p:extLst>
     <p:ext uri="{EFAFB233-063F-42B5-8137-9DF3F51BA10A}">
       <p15:sldGuideLst xmlns:p15="http://schemas.microsoft.com/office/powerpoint/2012/main">
-        <p15:guide id="1" orient="horz" pos="2217" userDrawn="1">
+        <p15:guide id="1" orient="horz" pos="2180" userDrawn="1">
           <p15:clr>
             <a:srgbClr val="A4A3A4"/>
           </p15:clr>
@@ -127,7 +127,7 @@
             <a:srgbClr val="A4A3A4"/>
           </p15:clr>
         </p15:guide>
-        <p15:guide id="3" orient="horz" pos="2044" userDrawn="1">
+        <p15:guide id="3" orient="horz" pos="2074" userDrawn="1">
           <p15:clr>
             <a:srgbClr val="A4A3A4"/>
           </p15:clr>
@@ -564,240 +564,6 @@
 </file>
 
 <file path=ppt/notesSlides/notesSlide2.xml><?xml version="1.0" encoding="utf-8"?>
-<p:notes xmlns:a="http://schemas.openxmlformats.org/drawingml/2006/main" xmlns:r="http://schemas.openxmlformats.org/officeDocument/2006/relationships" xmlns:p="http://schemas.openxmlformats.org/presentationml/2006/main">
-  <p:cSld>
-    <p:spTree>
-      <p:nvGrpSpPr>
-        <p:cNvPr id="1" name=""/>
-        <p:cNvGrpSpPr/>
-        <p:nvPr/>
-      </p:nvGrpSpPr>
-      <p:grpSpPr>
-        <a:xfrm>
-          <a:off x="0" y="0"/>
-          <a:ext cx="0" cy="0"/>
-          <a:chOff x="0" y="0"/>
-          <a:chExt cx="0" cy="0"/>
-        </a:xfrm>
-      </p:grpSpPr>
-      <p:sp>
-        <p:nvSpPr>
-          <p:cNvPr id="2" name="幻灯片图像占位符 1"/>
-          <p:cNvSpPr>
-            <a:spLocks noGrp="1" noRot="1" noChangeAspect="1"/>
-          </p:cNvSpPr>
-          <p:nvPr>
-            <p:ph type="sldImg"/>
-          </p:nvPr>
-        </p:nvSpPr>
-        <p:spPr/>
-      </p:sp>
-      <p:sp>
-        <p:nvSpPr>
-          <p:cNvPr id="3" name="备注占位符 2"/>
-          <p:cNvSpPr>
-            <a:spLocks noGrp="1"/>
-          </p:cNvSpPr>
-          <p:nvPr>
-            <p:ph type="body" idx="1"/>
-          </p:nvPr>
-        </p:nvSpPr>
-        <p:spPr/>
-        <p:txBody>
-          <a:bodyPr/>
-          <a:lstStyle/>
-          <a:p>
-            <a:endParaRPr lang="zh-CN" altLang="en-US"/>
-          </a:p>
-        </p:txBody>
-      </p:sp>
-      <p:sp>
-        <p:nvSpPr>
-          <p:cNvPr id="4" name="灯片编号占位符 3"/>
-          <p:cNvSpPr>
-            <a:spLocks noGrp="1"/>
-          </p:cNvSpPr>
-          <p:nvPr>
-            <p:ph type="sldNum" sz="quarter" idx="10"/>
-          </p:nvPr>
-        </p:nvSpPr>
-        <p:spPr/>
-        <p:txBody>
-          <a:bodyPr/>
-          <a:lstStyle/>
-          <a:p>
-            <a:fld id="{BF040306-04AD-4F7E-A7B0-55444E7BF11B}" type="slidenum">
-              <a:rPr lang="zh-CN" altLang="en-US" smtClean="0"/>
-            </a:fld>
-            <a:endParaRPr lang="zh-CN" altLang="en-US"/>
-          </a:p>
-        </p:txBody>
-      </p:sp>
-    </p:spTree>
-  </p:cSld>
-  <p:clrMapOvr>
-    <a:masterClrMapping/>
-  </p:clrMapOvr>
-</p:notes>
-</file>
-
-<file path=ppt/notesSlides/notesSlide3.xml><?xml version="1.0" encoding="utf-8"?>
-<p:notes xmlns:a="http://schemas.openxmlformats.org/drawingml/2006/main" xmlns:r="http://schemas.openxmlformats.org/officeDocument/2006/relationships" xmlns:p="http://schemas.openxmlformats.org/presentationml/2006/main">
-  <p:cSld>
-    <p:spTree>
-      <p:nvGrpSpPr>
-        <p:cNvPr id="1" name=""/>
-        <p:cNvGrpSpPr/>
-        <p:nvPr/>
-      </p:nvGrpSpPr>
-      <p:grpSpPr>
-        <a:xfrm>
-          <a:off x="0" y="0"/>
-          <a:ext cx="0" cy="0"/>
-          <a:chOff x="0" y="0"/>
-          <a:chExt cx="0" cy="0"/>
-        </a:xfrm>
-      </p:grpSpPr>
-      <p:sp>
-        <p:nvSpPr>
-          <p:cNvPr id="2" name="幻灯片图像占位符 1"/>
-          <p:cNvSpPr>
-            <a:spLocks noGrp="1" noRot="1" noChangeAspect="1"/>
-          </p:cNvSpPr>
-          <p:nvPr>
-            <p:ph type="sldImg"/>
-          </p:nvPr>
-        </p:nvSpPr>
-        <p:spPr/>
-      </p:sp>
-      <p:sp>
-        <p:nvSpPr>
-          <p:cNvPr id="3" name="备注占位符 2"/>
-          <p:cNvSpPr>
-            <a:spLocks noGrp="1"/>
-          </p:cNvSpPr>
-          <p:nvPr>
-            <p:ph type="body" idx="1"/>
-          </p:nvPr>
-        </p:nvSpPr>
-        <p:spPr/>
-        <p:txBody>
-          <a:bodyPr/>
-          <a:lstStyle/>
-          <a:p>
-            <a:endParaRPr lang="zh-CN" altLang="en-US"/>
-          </a:p>
-        </p:txBody>
-      </p:sp>
-      <p:sp>
-        <p:nvSpPr>
-          <p:cNvPr id="4" name="灯片编号占位符 3"/>
-          <p:cNvSpPr>
-            <a:spLocks noGrp="1"/>
-          </p:cNvSpPr>
-          <p:nvPr>
-            <p:ph type="sldNum" sz="quarter" idx="10"/>
-          </p:nvPr>
-        </p:nvSpPr>
-        <p:spPr/>
-        <p:txBody>
-          <a:bodyPr/>
-          <a:lstStyle/>
-          <a:p>
-            <a:fld id="{BF040306-04AD-4F7E-A7B0-55444E7BF11B}" type="slidenum">
-              <a:rPr lang="zh-CN" altLang="en-US" smtClean="0"/>
-            </a:fld>
-            <a:endParaRPr lang="zh-CN" altLang="en-US"/>
-          </a:p>
-        </p:txBody>
-      </p:sp>
-    </p:spTree>
-  </p:cSld>
-  <p:clrMapOvr>
-    <a:masterClrMapping/>
-  </p:clrMapOvr>
-</p:notes>
-</file>
-
-<file path=ppt/notesSlides/notesSlide4.xml><?xml version="1.0" encoding="utf-8"?>
-<p:notes xmlns:a="http://schemas.openxmlformats.org/drawingml/2006/main" xmlns:r="http://schemas.openxmlformats.org/officeDocument/2006/relationships" xmlns:p="http://schemas.openxmlformats.org/presentationml/2006/main">
-  <p:cSld>
-    <p:spTree>
-      <p:nvGrpSpPr>
-        <p:cNvPr id="1" name=""/>
-        <p:cNvGrpSpPr/>
-        <p:nvPr/>
-      </p:nvGrpSpPr>
-      <p:grpSpPr>
-        <a:xfrm>
-          <a:off x="0" y="0"/>
-          <a:ext cx="0" cy="0"/>
-          <a:chOff x="0" y="0"/>
-          <a:chExt cx="0" cy="0"/>
-        </a:xfrm>
-      </p:grpSpPr>
-      <p:sp>
-        <p:nvSpPr>
-          <p:cNvPr id="2" name="幻灯片图像占位符 1"/>
-          <p:cNvSpPr>
-            <a:spLocks noGrp="1" noRot="1" noChangeAspect="1"/>
-          </p:cNvSpPr>
-          <p:nvPr>
-            <p:ph type="sldImg"/>
-          </p:nvPr>
-        </p:nvSpPr>
-        <p:spPr/>
-      </p:sp>
-      <p:sp>
-        <p:nvSpPr>
-          <p:cNvPr id="3" name="备注占位符 2"/>
-          <p:cNvSpPr>
-            <a:spLocks noGrp="1"/>
-          </p:cNvSpPr>
-          <p:nvPr>
-            <p:ph type="body" idx="1"/>
-          </p:nvPr>
-        </p:nvSpPr>
-        <p:spPr/>
-        <p:txBody>
-          <a:bodyPr/>
-          <a:lstStyle/>
-          <a:p>
-            <a:endParaRPr lang="zh-CN" altLang="en-US"/>
-          </a:p>
-        </p:txBody>
-      </p:sp>
-      <p:sp>
-        <p:nvSpPr>
-          <p:cNvPr id="4" name="灯片编号占位符 3"/>
-          <p:cNvSpPr>
-            <a:spLocks noGrp="1"/>
-          </p:cNvSpPr>
-          <p:nvPr>
-            <p:ph type="sldNum" sz="quarter" idx="10"/>
-          </p:nvPr>
-        </p:nvSpPr>
-        <p:spPr/>
-        <p:txBody>
-          <a:bodyPr/>
-          <a:lstStyle/>
-          <a:p>
-            <a:fld id="{BF040306-04AD-4F7E-A7B0-55444E7BF11B}" type="slidenum">
-              <a:rPr lang="zh-CN" altLang="en-US" smtClean="0"/>
-            </a:fld>
-            <a:endParaRPr lang="zh-CN" altLang="en-US"/>
-          </a:p>
-        </p:txBody>
-      </p:sp>
-    </p:spTree>
-  </p:cSld>
-  <p:clrMapOvr>
-    <a:masterClrMapping/>
-  </p:clrMapOvr>
-</p:notes>
-</file>
-
-<file path=ppt/notesSlides/notesSlide5.xml><?xml version="1.0" encoding="utf-8"?>
 <p:notes xmlns:a="http://schemas.openxmlformats.org/drawingml/2006/main" xmlns:r="http://schemas.openxmlformats.org/officeDocument/2006/relationships" xmlns:p="http://schemas.openxmlformats.org/presentationml/2006/main">
   <p:cSld>
     <p:spTree>
@@ -4542,60 +4308,10 @@
         <p:cNvGrpSpPr/>
         <p:nvPr/>
       </p:nvGrpSpPr>
-      <p:grpSpPr>
-        <a:xfrm>
-          <a:off x="0" y="0"/>
-          <a:ext cx="0" cy="0"/>
-          <a:chOff x="0" y="0"/>
-          <a:chExt cx="0" cy="0"/>
-        </a:xfrm>
-      </p:grpSpPr>
+      <p:grpSpPr/>
       <p:sp>
         <p:nvSpPr>
-          <p:cNvPr id="16" name="文本框 15"/>
-          <p:cNvSpPr txBox="1"/>
-          <p:nvPr/>
-        </p:nvSpPr>
-        <p:spPr>
-          <a:xfrm>
-            <a:off x="4348680" y="311149"/>
-            <a:ext cx="3494640" cy="521970"/>
-          </a:xfrm>
-          <a:prstGeom prst="rect">
-            <a:avLst/>
-          </a:prstGeom>
-          <a:noFill/>
-        </p:spPr>
-        <p:txBody>
-          <a:bodyPr wrap="square" rtlCol="0">
-            <a:spAutoFit/>
-          </a:bodyPr>
-          <a:lstStyle/>
-          <a:p>
-            <a:pPr algn="ctr"/>
-            <a:r>
-              <a:rPr lang="zh-CN" altLang="en-US" sz="2800" b="1" dirty="0">
-                <a:solidFill>
-                  <a:schemeClr val="tx1"/>
-                </a:solidFill>
-                <a:latin typeface="迷你简细倩" panose="03000509000000000000" pitchFamily="65" charset="-122"/>
-                <a:ea typeface="迷你简细倩" panose="03000509000000000000" pitchFamily="65" charset="-122"/>
-              </a:rPr>
-              <a:t>数据处理</a:t>
-            </a:r>
-            <a:endParaRPr lang="zh-CN" altLang="en-US" sz="2800" b="1" dirty="0">
-              <a:solidFill>
-                <a:schemeClr val="tx1"/>
-              </a:solidFill>
-              <a:latin typeface="迷你简细倩" panose="03000509000000000000" pitchFamily="65" charset="-122"/>
-              <a:ea typeface="迷你简细倩" panose="03000509000000000000" pitchFamily="65" charset="-122"/>
-            </a:endParaRPr>
-          </a:p>
-        </p:txBody>
-      </p:sp>
-      <p:sp>
-        <p:nvSpPr>
-          <p:cNvPr id="2" name="矩形 1"/>
+          <p:cNvPr id="3" name="矩形 2"/>
           <p:cNvSpPr/>
           <p:nvPr/>
         </p:nvSpPr>
@@ -5093,9 +4809,47 @@
           </a:p>
         </p:txBody>
       </p:sp>
+      <p:sp>
+        <p:nvSpPr>
+          <p:cNvPr id="4" name="文本框 3"/>
+          <p:cNvSpPr txBox="1"/>
+          <p:nvPr/>
+        </p:nvSpPr>
+        <p:spPr>
+          <a:xfrm>
+            <a:off x="2818765" y="252730"/>
+            <a:ext cx="6096000" cy="521970"/>
+          </a:xfrm>
+          <a:prstGeom prst="rect">
+            <a:avLst/>
+          </a:prstGeom>
+          <a:noFill/>
+        </p:spPr>
+        <p:txBody>
+          <a:bodyPr wrap="square" rtlCol="0" anchor="t">
+            <a:spAutoFit/>
+          </a:bodyPr>
+          <a:p>
+            <a:pPr algn="ctr"/>
+            <a:r>
+              <a:rPr lang="zh-CN" altLang="en-US" sz="2800" b="1" dirty="0">
+                <a:latin typeface="迷你简细倩" panose="03000509000000000000" pitchFamily="65" charset="-122"/>
+                <a:ea typeface="迷你简细倩" panose="03000509000000000000" pitchFamily="65" charset="-122"/>
+                <a:sym typeface="+mn-ea"/>
+              </a:rPr>
+              <a:t>数据处理</a:t>
+            </a:r>
+            <a:endParaRPr lang="zh-CN" altLang="en-US" sz="2800" b="1" dirty="0">
+              <a:latin typeface="迷你简细倩" panose="03000509000000000000" pitchFamily="65" charset="-122"/>
+              <a:ea typeface="迷你简细倩" panose="03000509000000000000" pitchFamily="65" charset="-122"/>
+              <a:sym typeface="+mn-ea"/>
+            </a:endParaRPr>
+          </a:p>
+        </p:txBody>
+      </p:sp>
       <p:pic>
         <p:nvPicPr>
-          <p:cNvPr id="3" name="图片 2"/>
+          <p:cNvPr id="5" name="图片 4"/>
           <p:cNvPicPr>
             <a:picLocks noChangeAspect="1"/>
           </p:cNvPicPr>
@@ -5117,312 +4871,372 @@
           </a:prstGeom>
         </p:spPr>
       </p:pic>
+      <p:grpSp>
+        <p:nvGrpSpPr>
+          <p:cNvPr id="11" name="组合 10"/>
+          <p:cNvGrpSpPr/>
+          <p:nvPr/>
+        </p:nvGrpSpPr>
+        <p:grpSpPr>
+          <a:xfrm>
+            <a:off x="751205" y="4737100"/>
+            <a:ext cx="9853295" cy="2120900"/>
+            <a:chOff x="689" y="7328"/>
+            <a:chExt cx="15517" cy="3340"/>
+          </a:xfrm>
+        </p:grpSpPr>
+        <p:sp>
+          <p:nvSpPr>
+            <p:cNvPr id="7" name="文本框 6"/>
+            <p:cNvSpPr txBox="1"/>
+            <p:nvPr/>
+          </p:nvSpPr>
+          <p:spPr>
+            <a:xfrm>
+              <a:off x="689" y="7982"/>
+              <a:ext cx="7386" cy="2325"/>
+            </a:xfrm>
+            <a:prstGeom prst="rect">
+              <a:avLst/>
+            </a:prstGeom>
+            <a:noFill/>
+          </p:spPr>
+          <p:txBody>
+            <a:bodyPr wrap="square" rtlCol="0">
+              <a:spAutoFit/>
+            </a:bodyPr>
+            <a:p>
+              <a:r>
+                <a:rPr lang="zh-CN" altLang="en-US"/>
+                <a:t>假设和新元组城市、区域、板块都相同的邻居有</a:t>
+              </a:r>
+              <a:r>
+                <a:rPr lang="en-US" altLang="zh-CN"/>
+                <a:t>5</a:t>
+              </a:r>
+              <a:r>
+                <a:rPr lang="zh-CN" altLang="en-US"/>
+                <a:t>个，所以每个邻居应该权重</a:t>
+              </a:r>
+              <a:r>
+                <a:rPr lang="en-US" altLang="zh-CN"/>
+                <a:t>0.2</a:t>
+              </a:r>
+              <a:r>
+                <a:rPr lang="zh-CN" altLang="en-US"/>
+                <a:t>。前四个邻居假设都是小区</a:t>
+              </a:r>
+              <a:r>
+                <a:rPr lang="en-US" altLang="zh-CN"/>
+                <a:t>1</a:t>
+              </a:r>
+              <a:r>
+                <a:rPr lang="zh-CN" altLang="en-US"/>
+                <a:t>，所以新元组对应小区</a:t>
+              </a:r>
+              <a:r>
+                <a:rPr lang="en-US" altLang="zh-CN"/>
+                <a:t>1</a:t>
+              </a:r>
+              <a:r>
+                <a:rPr lang="zh-CN" altLang="en-US"/>
+                <a:t>这列的取值就是</a:t>
+              </a:r>
+              <a:r>
+                <a:rPr lang="en-US" altLang="zh-CN"/>
+                <a:t>4*0.2</a:t>
+              </a:r>
+              <a:r>
+                <a:rPr lang="zh-CN" altLang="en-US"/>
+                <a:t>，小区</a:t>
+              </a:r>
+              <a:r>
+                <a:rPr lang="en-US" altLang="zh-CN"/>
+                <a:t>2</a:t>
+              </a:r>
+              <a:r>
+                <a:rPr lang="zh-CN" altLang="en-US"/>
+                <a:t>的取值就是</a:t>
+              </a:r>
+              <a:r>
+                <a:rPr lang="en-US" altLang="zh-CN"/>
+                <a:t>0.2</a:t>
+              </a:r>
+              <a:r>
+                <a:rPr lang="zh-CN" altLang="en-US"/>
+                <a:t>，剩下的小区类的虚拟变量都取</a:t>
+              </a:r>
+              <a:r>
+                <a:rPr lang="en-US" altLang="zh-CN"/>
+                <a:t>0</a:t>
+              </a:r>
+              <a:endParaRPr lang="en-US" altLang="zh-CN"/>
+            </a:p>
+          </p:txBody>
+        </p:sp>
+        <p:sp>
+          <p:nvSpPr>
+            <p:cNvPr id="8" name="文本框 7"/>
+            <p:cNvSpPr txBox="1"/>
+            <p:nvPr/>
+          </p:nvSpPr>
+          <p:spPr>
+            <a:xfrm>
+              <a:off x="9060" y="7908"/>
+              <a:ext cx="7146" cy="2761"/>
+            </a:xfrm>
+            <a:prstGeom prst="rect">
+              <a:avLst/>
+            </a:prstGeom>
+            <a:noFill/>
+          </p:spPr>
+          <p:txBody>
+            <a:bodyPr wrap="square" rtlCol="0">
+              <a:spAutoFit/>
+            </a:bodyPr>
+            <a:p>
+              <a:r>
+                <a:rPr lang="zh-CN" altLang="en-US"/>
+                <a:t>遇到新小区时，去测试集寻找同一个城市、区域、板块的旧小区。假如新小区</a:t>
+              </a:r>
+              <a:r>
+                <a:rPr lang="en-US" altLang="zh-CN"/>
+                <a:t>4</a:t>
+              </a:r>
+              <a:r>
+                <a:rPr lang="zh-CN" altLang="en-US"/>
+                <a:t>号，和旧小区</a:t>
+              </a:r>
+              <a:r>
+                <a:rPr lang="en-US" altLang="zh-CN"/>
+                <a:t>1</a:t>
+              </a:r>
+              <a:r>
+                <a:rPr lang="zh-CN" altLang="en-US"/>
+                <a:t>、</a:t>
+              </a:r>
+              <a:r>
+                <a:rPr lang="en-US" altLang="zh-CN"/>
+                <a:t>2</a:t>
+              </a:r>
+              <a:r>
+                <a:rPr lang="zh-CN" altLang="en-US"/>
+                <a:t>、</a:t>
+              </a:r>
+              <a:r>
+                <a:rPr lang="en-US" altLang="zh-CN"/>
+                <a:t>3</a:t>
+              </a:r>
+              <a:r>
+                <a:rPr lang="zh-CN" altLang="en-US"/>
+                <a:t>在同一个板块。那么所有测试集小区是</a:t>
+              </a:r>
+              <a:r>
+                <a:rPr lang="en-US" altLang="zh-CN"/>
+                <a:t>4</a:t>
+              </a:r>
+              <a:r>
+                <a:rPr lang="zh-CN" altLang="en-US"/>
+                <a:t>号的样本，小区类虚拟变量只有</a:t>
+              </a:r>
+              <a:r>
+                <a:rPr lang="en-US" altLang="zh-CN"/>
+                <a:t>1</a:t>
+              </a:r>
+              <a:r>
+                <a:rPr lang="zh-CN" altLang="en-US"/>
+                <a:t>、</a:t>
+              </a:r>
+              <a:r>
+                <a:rPr lang="en-US" altLang="zh-CN"/>
+                <a:t>2</a:t>
+              </a:r>
+              <a:r>
+                <a:rPr lang="zh-CN" altLang="en-US"/>
+                <a:t>、</a:t>
+              </a:r>
+              <a:r>
+                <a:rPr lang="en-US" altLang="zh-CN"/>
+                <a:t>3</a:t>
+              </a:r>
+              <a:r>
+                <a:rPr lang="zh-CN" altLang="en-US"/>
+                <a:t>列取值三分之一，剩下小区变量都取</a:t>
+              </a:r>
+              <a:r>
+                <a:rPr lang="en-US" altLang="zh-CN"/>
+                <a:t>0</a:t>
+              </a:r>
+              <a:r>
+                <a:rPr lang="zh-CN" altLang="en-US"/>
+                <a:t>。</a:t>
+              </a:r>
+              <a:endParaRPr lang="zh-CN" altLang="en-US"/>
+            </a:p>
+          </p:txBody>
+        </p:sp>
+        <p:sp>
+          <p:nvSpPr>
+            <p:cNvPr id="9" name="文本框 8"/>
+            <p:cNvSpPr txBox="1"/>
+            <p:nvPr/>
+          </p:nvSpPr>
+          <p:spPr>
+            <a:xfrm>
+              <a:off x="1631" y="7328"/>
+              <a:ext cx="5217" cy="580"/>
+            </a:xfrm>
+            <a:prstGeom prst="rect">
+              <a:avLst/>
+            </a:prstGeom>
+            <a:noFill/>
+          </p:spPr>
+          <p:txBody>
+            <a:bodyPr wrap="square" rtlCol="0">
+              <a:spAutoFit/>
+            </a:bodyPr>
+            <a:p>
+              <a:pPr lvl="0" indent="0">
+                <a:buFont typeface="Arial" panose="020B0604020202020204" pitchFamily="34" charset="0"/>
+                <a:buNone/>
+              </a:pPr>
+              <a:r>
+                <a:rPr lang="zh-CN" altLang="en-US" dirty="0">
+                  <a:latin typeface="思源宋体 CN" panose="02020400000000000000" pitchFamily="18" charset="-122"/>
+                  <a:ea typeface="思源宋体 CN" panose="02020400000000000000" pitchFamily="18" charset="-122"/>
+                  <a:sym typeface="+mn-ea"/>
+                </a:rPr>
+                <a:t>原先是</a:t>
+              </a:r>
+              <a:r>
+                <a:rPr lang="zh-CN" altLang="en-US" b="1" dirty="0">
+                  <a:latin typeface="思源宋体 CN" panose="02020400000000000000" pitchFamily="18" charset="-122"/>
+                  <a:ea typeface="思源宋体 CN" panose="02020400000000000000" pitchFamily="18" charset="-122"/>
+                  <a:sym typeface="+mn-ea"/>
+                </a:rPr>
+                <a:t>针对测试点</a:t>
+              </a:r>
+              <a:r>
+                <a:rPr lang="zh-CN" altLang="en-US" dirty="0">
+                  <a:latin typeface="思源宋体 CN" panose="02020400000000000000" pitchFamily="18" charset="-122"/>
+                  <a:ea typeface="思源宋体 CN" panose="02020400000000000000" pitchFamily="18" charset="-122"/>
+                  <a:sym typeface="+mn-ea"/>
+                </a:rPr>
+                <a:t>找邻居：</a:t>
+              </a:r>
+              <a:endParaRPr lang="zh-CN" altLang="en-US"/>
+            </a:p>
+          </p:txBody>
+        </p:sp>
+        <p:sp>
+          <p:nvSpPr>
+            <p:cNvPr id="10" name="文本框 9"/>
+            <p:cNvSpPr txBox="1"/>
+            <p:nvPr/>
+          </p:nvSpPr>
+          <p:spPr>
+            <a:xfrm>
+              <a:off x="9673" y="7328"/>
+              <a:ext cx="5217" cy="580"/>
+            </a:xfrm>
+            <a:prstGeom prst="rect">
+              <a:avLst/>
+            </a:prstGeom>
+            <a:noFill/>
+          </p:spPr>
+          <p:txBody>
+            <a:bodyPr wrap="square" rtlCol="0">
+              <a:spAutoFit/>
+            </a:bodyPr>
+            <a:p>
+              <a:pPr lvl="0" indent="0">
+                <a:buFont typeface="Arial" panose="020B0604020202020204" pitchFamily="34" charset="0"/>
+                <a:buNone/>
+              </a:pPr>
+              <a:r>
+                <a:rPr lang="zh-CN" altLang="en-US" dirty="0">
+                  <a:latin typeface="思源宋体 CN" panose="02020400000000000000" pitchFamily="18" charset="-122"/>
+                  <a:ea typeface="思源宋体 CN" panose="02020400000000000000" pitchFamily="18" charset="-122"/>
+                  <a:sym typeface="+mn-ea"/>
+                </a:rPr>
+                <a:t>现在</a:t>
+              </a:r>
+              <a:r>
+                <a:rPr lang="zh-CN" altLang="en-US" b="1" dirty="0">
+                  <a:latin typeface="思源宋体 CN" panose="02020400000000000000" pitchFamily="18" charset="-122"/>
+                  <a:ea typeface="思源宋体 CN" panose="02020400000000000000" pitchFamily="18" charset="-122"/>
+                  <a:sym typeface="+mn-ea"/>
+                </a:rPr>
+                <a:t>针对小区</a:t>
+              </a:r>
+              <a:r>
+                <a:rPr lang="zh-CN" altLang="en-US" dirty="0">
+                  <a:latin typeface="思源宋体 CN" panose="02020400000000000000" pitchFamily="18" charset="-122"/>
+                  <a:ea typeface="思源宋体 CN" panose="02020400000000000000" pitchFamily="18" charset="-122"/>
+                  <a:sym typeface="+mn-ea"/>
+                </a:rPr>
+                <a:t>找邻居：</a:t>
+              </a:r>
+              <a:endParaRPr lang="zh-CN" altLang="en-US"/>
+            </a:p>
+          </p:txBody>
+        </p:sp>
+        <p:sp>
+          <p:nvSpPr>
+            <p:cNvPr id="12" name="右箭头 11"/>
+            <p:cNvSpPr/>
+            <p:nvPr/>
+          </p:nvSpPr>
+          <p:spPr>
+            <a:xfrm>
+              <a:off x="8063" y="8741"/>
+              <a:ext cx="891" cy="433"/>
+            </a:xfrm>
+            <a:prstGeom prst="rightArrow">
+              <a:avLst/>
+            </a:prstGeom>
+            <a:solidFill>
+              <a:schemeClr val="accent1">
+                <a:lumMod val="60000"/>
+                <a:lumOff val="40000"/>
+              </a:schemeClr>
+            </a:solidFill>
+          </p:spPr>
+          <p:style>
+            <a:lnRef idx="2">
+              <a:schemeClr val="accent1">
+                <a:lumMod val="75000"/>
+              </a:schemeClr>
+            </a:lnRef>
+            <a:fillRef idx="1">
+              <a:schemeClr val="accent1"/>
+            </a:fillRef>
+            <a:effectRef idx="0">
+              <a:srgbClr val="FFFFFF"/>
+            </a:effectRef>
+            <a:fontRef idx="minor">
+              <a:schemeClr val="lt1"/>
+            </a:fontRef>
+          </p:style>
+          <p:txBody>
+            <a:bodyPr rtlCol="0" anchor="ctr"/>
+            <a:p>
+              <a:pPr algn="ctr"/>
+              <a:endParaRPr lang="zh-CN" altLang="en-US"/>
+            </a:p>
+          </p:txBody>
+        </p:sp>
+      </p:grpSp>
       <p:sp>
         <p:nvSpPr>
-          <p:cNvPr id="4" name="文本框 3"/>
-          <p:cNvSpPr txBox="1"/>
-          <p:nvPr/>
-        </p:nvSpPr>
-        <p:spPr>
-          <a:xfrm>
-            <a:off x="437515" y="5068570"/>
-            <a:ext cx="4690110" cy="1476375"/>
-          </a:xfrm>
-          <a:prstGeom prst="rect">
-            <a:avLst/>
-          </a:prstGeom>
-          <a:noFill/>
-        </p:spPr>
-        <p:txBody>
-          <a:bodyPr wrap="square" rtlCol="0">
-            <a:spAutoFit/>
-          </a:bodyPr>
-          <a:p>
-            <a:r>
-              <a:rPr lang="zh-CN" altLang="en-US"/>
-              <a:t>假设和新元组城市、区域、板块都相同的邻居有</a:t>
-            </a:r>
-            <a:r>
-              <a:rPr lang="en-US" altLang="zh-CN"/>
-              <a:t>5</a:t>
-            </a:r>
-            <a:r>
-              <a:rPr lang="zh-CN" altLang="en-US"/>
-              <a:t>个，所以每个邻居应该权重</a:t>
-            </a:r>
-            <a:r>
-              <a:rPr lang="en-US" altLang="zh-CN"/>
-              <a:t>0.2</a:t>
-            </a:r>
-            <a:r>
-              <a:rPr lang="zh-CN" altLang="en-US"/>
-              <a:t>。前四个邻居假设都是小区</a:t>
-            </a:r>
-            <a:r>
-              <a:rPr lang="en-US" altLang="zh-CN"/>
-              <a:t>1</a:t>
-            </a:r>
-            <a:r>
-              <a:rPr lang="zh-CN" altLang="en-US"/>
-              <a:t>，所以新元组对应小区</a:t>
-            </a:r>
-            <a:r>
-              <a:rPr lang="en-US" altLang="zh-CN"/>
-              <a:t>1</a:t>
-            </a:r>
-            <a:r>
-              <a:rPr lang="zh-CN" altLang="en-US"/>
-              <a:t>这列的取值就是</a:t>
-            </a:r>
-            <a:r>
-              <a:rPr lang="en-US" altLang="zh-CN"/>
-              <a:t>4*0.2</a:t>
-            </a:r>
-            <a:r>
-              <a:rPr lang="zh-CN" altLang="en-US"/>
-              <a:t>，小区</a:t>
-            </a:r>
-            <a:r>
-              <a:rPr lang="en-US" altLang="zh-CN"/>
-              <a:t>2</a:t>
-            </a:r>
-            <a:r>
-              <a:rPr lang="zh-CN" altLang="en-US"/>
-              <a:t>的取值就是</a:t>
-            </a:r>
-            <a:r>
-              <a:rPr lang="en-US" altLang="zh-CN"/>
-              <a:t>0.2</a:t>
-            </a:r>
-            <a:r>
-              <a:rPr lang="zh-CN" altLang="en-US"/>
-              <a:t>，剩下的小区类的虚拟变量都取</a:t>
-            </a:r>
-            <a:r>
-              <a:rPr lang="en-US" altLang="zh-CN"/>
-              <a:t>0</a:t>
-            </a:r>
-            <a:endParaRPr lang="en-US" altLang="zh-CN"/>
-          </a:p>
-        </p:txBody>
-      </p:sp>
-      <p:sp>
-        <p:nvSpPr>
-          <p:cNvPr id="5" name="文本框 4"/>
-          <p:cNvSpPr txBox="1"/>
-          <p:nvPr/>
-        </p:nvSpPr>
-        <p:spPr>
-          <a:xfrm>
-            <a:off x="5753100" y="5021580"/>
-            <a:ext cx="4537710" cy="1753235"/>
-          </a:xfrm>
-          <a:prstGeom prst="rect">
-            <a:avLst/>
-          </a:prstGeom>
-          <a:noFill/>
-        </p:spPr>
-        <p:txBody>
-          <a:bodyPr wrap="square" rtlCol="0">
-            <a:spAutoFit/>
-          </a:bodyPr>
-          <a:p>
-            <a:r>
-              <a:rPr lang="zh-CN" altLang="en-US"/>
-              <a:t>遇到新小区时，去测试集寻找同一个城市、区域、板块的旧小区。假如新小区</a:t>
-            </a:r>
-            <a:r>
-              <a:rPr lang="en-US" altLang="zh-CN"/>
-              <a:t>4</a:t>
-            </a:r>
-            <a:r>
-              <a:rPr lang="zh-CN" altLang="en-US"/>
-              <a:t>号，和旧小区</a:t>
-            </a:r>
-            <a:r>
-              <a:rPr lang="en-US" altLang="zh-CN"/>
-              <a:t>1</a:t>
-            </a:r>
-            <a:r>
-              <a:rPr lang="zh-CN" altLang="en-US"/>
-              <a:t>、</a:t>
-            </a:r>
-            <a:r>
-              <a:rPr lang="en-US" altLang="zh-CN"/>
-              <a:t>2</a:t>
-            </a:r>
-            <a:r>
-              <a:rPr lang="zh-CN" altLang="en-US"/>
-              <a:t>、</a:t>
-            </a:r>
-            <a:r>
-              <a:rPr lang="en-US" altLang="zh-CN"/>
-              <a:t>3</a:t>
-            </a:r>
-            <a:r>
-              <a:rPr lang="zh-CN" altLang="en-US"/>
-              <a:t>在同一个板块。那么所有测试集小区是</a:t>
-            </a:r>
-            <a:r>
-              <a:rPr lang="en-US" altLang="zh-CN"/>
-              <a:t>4</a:t>
-            </a:r>
-            <a:r>
-              <a:rPr lang="zh-CN" altLang="en-US"/>
-              <a:t>号的样本，小区类虚拟变量只有</a:t>
-            </a:r>
-            <a:r>
-              <a:rPr lang="en-US" altLang="zh-CN"/>
-              <a:t>1</a:t>
-            </a:r>
-            <a:r>
-              <a:rPr lang="zh-CN" altLang="en-US"/>
-              <a:t>、</a:t>
-            </a:r>
-            <a:r>
-              <a:rPr lang="en-US" altLang="zh-CN"/>
-              <a:t>2</a:t>
-            </a:r>
-            <a:r>
-              <a:rPr lang="zh-CN" altLang="en-US"/>
-              <a:t>、</a:t>
-            </a:r>
-            <a:r>
-              <a:rPr lang="en-US" altLang="zh-CN"/>
-              <a:t>3</a:t>
-            </a:r>
-            <a:r>
-              <a:rPr lang="zh-CN" altLang="en-US"/>
-              <a:t>列取值三分之一，剩下小区变量都取</a:t>
-            </a:r>
-            <a:r>
-              <a:rPr lang="en-US" altLang="zh-CN"/>
-              <a:t>0</a:t>
-            </a:r>
-            <a:r>
-              <a:rPr lang="zh-CN" altLang="en-US"/>
-              <a:t>。</a:t>
-            </a:r>
-            <a:endParaRPr lang="zh-CN" altLang="en-US"/>
-          </a:p>
-        </p:txBody>
-      </p:sp>
-      <p:sp>
-        <p:nvSpPr>
-          <p:cNvPr id="7" name="文本框 6"/>
-          <p:cNvSpPr txBox="1"/>
-          <p:nvPr/>
-        </p:nvSpPr>
-        <p:spPr>
-          <a:xfrm>
-            <a:off x="1035685" y="4653280"/>
-            <a:ext cx="3312795" cy="368300"/>
-          </a:xfrm>
-          <a:prstGeom prst="rect">
-            <a:avLst/>
-          </a:prstGeom>
-          <a:noFill/>
-        </p:spPr>
-        <p:txBody>
-          <a:bodyPr wrap="square" rtlCol="0">
-            <a:spAutoFit/>
-          </a:bodyPr>
-          <a:p>
-            <a:pPr lvl="0" indent="0">
-              <a:buFont typeface="Arial" panose="020B0604020202020204" pitchFamily="34" charset="0"/>
-              <a:buNone/>
-            </a:pPr>
-            <a:r>
-              <a:rPr lang="zh-CN" altLang="en-US" dirty="0">
-                <a:latin typeface="思源宋体 CN" panose="02020400000000000000" pitchFamily="18" charset="-122"/>
-                <a:ea typeface="思源宋体 CN" panose="02020400000000000000" pitchFamily="18" charset="-122"/>
-                <a:sym typeface="+mn-ea"/>
-              </a:rPr>
-              <a:t>原先是</a:t>
-            </a:r>
-            <a:r>
-              <a:rPr lang="zh-CN" altLang="en-US" b="1" dirty="0">
-                <a:latin typeface="思源宋体 CN" panose="02020400000000000000" pitchFamily="18" charset="-122"/>
-                <a:ea typeface="思源宋体 CN" panose="02020400000000000000" pitchFamily="18" charset="-122"/>
-                <a:sym typeface="+mn-ea"/>
-              </a:rPr>
-              <a:t>针对测试点</a:t>
-            </a:r>
-            <a:r>
-              <a:rPr lang="zh-CN" altLang="en-US" dirty="0">
-                <a:latin typeface="思源宋体 CN" panose="02020400000000000000" pitchFamily="18" charset="-122"/>
-                <a:ea typeface="思源宋体 CN" panose="02020400000000000000" pitchFamily="18" charset="-122"/>
-                <a:sym typeface="+mn-ea"/>
-              </a:rPr>
-              <a:t>找邻居：</a:t>
-            </a:r>
-            <a:endParaRPr lang="zh-CN" altLang="en-US"/>
-          </a:p>
-        </p:txBody>
-      </p:sp>
-      <p:sp>
-        <p:nvSpPr>
-          <p:cNvPr id="8" name="文本框 7"/>
-          <p:cNvSpPr txBox="1"/>
-          <p:nvPr/>
-        </p:nvSpPr>
-        <p:spPr>
-          <a:xfrm>
-            <a:off x="6142355" y="4653280"/>
-            <a:ext cx="3312795" cy="368300"/>
-          </a:xfrm>
-          <a:prstGeom prst="rect">
-            <a:avLst/>
-          </a:prstGeom>
-          <a:noFill/>
-        </p:spPr>
-        <p:txBody>
-          <a:bodyPr wrap="square" rtlCol="0">
-            <a:spAutoFit/>
-          </a:bodyPr>
-          <a:p>
-            <a:pPr lvl="0" indent="0">
-              <a:buFont typeface="Arial" panose="020B0604020202020204" pitchFamily="34" charset="0"/>
-              <a:buNone/>
-            </a:pPr>
-            <a:r>
-              <a:rPr lang="zh-CN" altLang="en-US" dirty="0">
-                <a:latin typeface="思源宋体 CN" panose="02020400000000000000" pitchFamily="18" charset="-122"/>
-                <a:ea typeface="思源宋体 CN" panose="02020400000000000000" pitchFamily="18" charset="-122"/>
-                <a:sym typeface="+mn-ea"/>
-              </a:rPr>
-              <a:t>现在</a:t>
-            </a:r>
-            <a:r>
-              <a:rPr lang="zh-CN" altLang="en-US" b="1" dirty="0">
-                <a:latin typeface="思源宋体 CN" panose="02020400000000000000" pitchFamily="18" charset="-122"/>
-                <a:ea typeface="思源宋体 CN" panose="02020400000000000000" pitchFamily="18" charset="-122"/>
-                <a:sym typeface="+mn-ea"/>
-              </a:rPr>
-              <a:t>针对小区</a:t>
-            </a:r>
-            <a:r>
-              <a:rPr lang="zh-CN" altLang="en-US" dirty="0">
-                <a:latin typeface="思源宋体 CN" panose="02020400000000000000" pitchFamily="18" charset="-122"/>
-                <a:ea typeface="思源宋体 CN" panose="02020400000000000000" pitchFamily="18" charset="-122"/>
-                <a:sym typeface="+mn-ea"/>
-              </a:rPr>
-              <a:t>找邻居：</a:t>
-            </a:r>
-            <a:endParaRPr lang="zh-CN" altLang="en-US"/>
-          </a:p>
-        </p:txBody>
-      </p:sp>
-      <p:sp>
-        <p:nvSpPr>
-          <p:cNvPr id="9" name="右箭头 8"/>
+          <p:cNvPr id="13" name="右箭头 12"/>
           <p:cNvSpPr/>
           <p:nvPr/>
         </p:nvSpPr>
         <p:spPr>
           <a:xfrm>
-            <a:off x="5120005" y="5550535"/>
-            <a:ext cx="565785" cy="274955"/>
+            <a:off x="10441940" y="5634355"/>
+            <a:ext cx="527685" cy="274955"/>
           </a:xfrm>
           <a:prstGeom prst="rightArrow">
             <a:avLst/>
@@ -5460,14 +5274,14 @@
       </p:sp>
       <p:sp>
         <p:nvSpPr>
-          <p:cNvPr id="10" name="文本框 9"/>
+          <p:cNvPr id="14" name="文本框 13"/>
           <p:cNvSpPr txBox="1"/>
           <p:nvPr/>
         </p:nvSpPr>
         <p:spPr>
           <a:xfrm>
-            <a:off x="10645775" y="5146040"/>
-            <a:ext cx="1661160" cy="1090295"/>
+            <a:off x="10893425" y="5105400"/>
+            <a:ext cx="1443355" cy="1198880"/>
           </a:xfrm>
           <a:prstGeom prst="rect">
             <a:avLst/>
@@ -5475,68 +5289,44 @@
           <a:noFill/>
         </p:spPr>
         <p:txBody>
-          <a:bodyPr wrap="square" rtlCol="0">
-            <a:noAutofit/>
+          <a:bodyPr wrap="square" rtlCol="0" anchor="t">
+            <a:spAutoFit/>
           </a:bodyPr>
           <a:p>
-            <a:r>
-              <a:rPr lang="zh-CN" altLang="en-US"/>
-              <a:t>不按照出现的旧小区</a:t>
-            </a:r>
-            <a:r>
-              <a:rPr lang="zh-CN" altLang="en-US" b="1"/>
+            <a:pPr algn="ctr"/>
+            <a:r>
+              <a:rPr lang="zh-CN" altLang="en-US">
+                <a:sym typeface="+mn-ea"/>
+              </a:rPr>
+              <a:t>不按照</a:t>
+            </a:r>
+            <a:endParaRPr lang="zh-CN" altLang="en-US">
+              <a:sym typeface="+mn-ea"/>
+            </a:endParaRPr>
+          </a:p>
+          <a:p>
+            <a:pPr algn="ctr"/>
+            <a:r>
+              <a:rPr lang="zh-CN" altLang="en-US">
+                <a:sym typeface="+mn-ea"/>
+              </a:rPr>
+              <a:t>出现的旧小区</a:t>
+            </a:r>
+            <a:r>
+              <a:rPr lang="zh-CN" altLang="en-US" b="1">
+                <a:sym typeface="+mn-ea"/>
+              </a:rPr>
               <a:t>样本数</a:t>
             </a:r>
             <a:r>
-              <a:rPr lang="zh-CN" altLang="en-US"/>
+              <a:rPr lang="zh-CN" altLang="en-US">
+                <a:sym typeface="+mn-ea"/>
+              </a:rPr>
               <a:t>来赋权重</a:t>
             </a:r>
-            <a:endParaRPr lang="zh-CN" altLang="en-US"/>
-          </a:p>
-        </p:txBody>
-      </p:sp>
-      <p:sp>
-        <p:nvSpPr>
-          <p:cNvPr id="12" name="右箭头 11"/>
-          <p:cNvSpPr/>
-          <p:nvPr/>
-        </p:nvSpPr>
-        <p:spPr>
-          <a:xfrm>
-            <a:off x="10158730" y="5550535"/>
-            <a:ext cx="565785" cy="274955"/>
-          </a:xfrm>
-          <a:prstGeom prst="rightArrow">
-            <a:avLst/>
-          </a:prstGeom>
-          <a:solidFill>
-            <a:schemeClr val="accent1">
-              <a:lumMod val="60000"/>
-              <a:lumOff val="40000"/>
-            </a:schemeClr>
-          </a:solidFill>
-        </p:spPr>
-        <p:style>
-          <a:lnRef idx="2">
-            <a:schemeClr val="accent1">
-              <a:lumMod val="75000"/>
-            </a:schemeClr>
-          </a:lnRef>
-          <a:fillRef idx="1">
-            <a:schemeClr val="accent1"/>
-          </a:fillRef>
-          <a:effectRef idx="0">
-            <a:srgbClr val="FFFFFF"/>
-          </a:effectRef>
-          <a:fontRef idx="minor">
-            <a:schemeClr val="lt1"/>
-          </a:fontRef>
-        </p:style>
-        <p:txBody>
-          <a:bodyPr rtlCol="0" anchor="ctr"/>
-          <a:p>
-            <a:pPr algn="ctr"/>
-            <a:endParaRPr lang="zh-CN" altLang="en-US"/>
+            <a:endParaRPr lang="zh-CN" altLang="en-US">
+              <a:sym typeface="+mn-ea"/>
+            </a:endParaRPr>
           </a:p>
         </p:txBody>
       </p:sp>
@@ -5547,23 +5337,16 @@
   </p:clrMapOvr>
   <mc:AlternateContent xmlns:mc="http://schemas.openxmlformats.org/markup-compatibility/2006">
     <mc:Choice xmlns:p14="http://schemas.microsoft.com/office/powerpoint/2010/main" Requires="p14">
-      <p:transition spd="slow" p14:dur="1500" advTm="4000">
-        <p:random/>
+      <p:transition spd="med" p14:dur="699" advTm="5500">
+        <p:fade/>
       </p:transition>
     </mc:Choice>
     <mc:Fallback>
-      <p:transition spd="slow" advTm="4000">
-        <p:random/>
+      <p:transition spd="med" advTm="5500">
+        <p:fade/>
       </p:transition>
     </mc:Fallback>
   </mc:AlternateContent>
-  <p:timing>
-    <p:tnLst>
-      <p:par>
-        <p:cTn id="1" dur="indefinite" restart="never" nodeType="tmRoot"/>
-      </p:par>
-    </p:tnLst>
-  </p:timing>
 </p:sld>
 </file>
 
@@ -5576,14 +5359,7 @@
         <p:cNvGrpSpPr/>
         <p:nvPr/>
       </p:nvGrpSpPr>
-      <p:grpSpPr>
-        <a:xfrm>
-          <a:off x="0" y="0"/>
-          <a:ext cx="0" cy="0"/>
-          <a:chOff x="0" y="0"/>
-          <a:chExt cx="0" cy="0"/>
-        </a:xfrm>
-      </p:grpSpPr>
+      <p:grpSpPr/>
       <p:sp>
         <p:nvSpPr>
           <p:cNvPr id="16" name="文本框 15"/>
@@ -5772,20 +5548,1103 @@
           </a:p>
         </p:txBody>
       </p:sp>
-      <p:cxnSp>
-        <p:nvCxnSpPr>
-          <p:cNvPr id="60" name="直接连接符 59"/>
-          <p:cNvCxnSpPr/>
+      <p:sp>
+        <p:nvSpPr>
+          <p:cNvPr id="18" name="文本框 17"/>
+          <p:cNvSpPr txBox="1"/>
           <p:nvPr>
             <p:custDataLst>
               <p:tags r:id="rId2"/>
             </p:custDataLst>
           </p:nvPr>
+        </p:nvSpPr>
+        <p:spPr>
+          <a:xfrm>
+            <a:off x="241300" y="4598035"/>
+            <a:ext cx="1860550" cy="1551305"/>
+          </a:xfrm>
+          <a:prstGeom prst="rect">
+            <a:avLst/>
+          </a:prstGeom>
+          <a:noFill/>
+        </p:spPr>
+        <p:txBody>
+          <a:bodyPr wrap="none" lIns="0" tIns="36195" rIns="0" bIns="0" rtlCol="0" anchor="ctr" anchorCtr="0">
+            <a:noAutofit/>
+          </a:bodyPr>
+          <a:p>
+            <a:pPr lvl="0" algn="l">
+              <a:buClrTx/>
+              <a:buSzTx/>
+              <a:buFontTx/>
+            </a:pPr>
+            <a:r>
+              <a:rPr lang="zh-CN" altLang="en-US" sz="2400" b="1" dirty="0">
+                <a:solidFill>
+                  <a:schemeClr val="accent1"/>
+                </a:solidFill>
+                <a:latin typeface="+mn-ea"/>
+                <a:cs typeface="+mn-ea"/>
+                <a:sym typeface="+mn-ea"/>
+              </a:rPr>
+              <a:t>全部特征建模</a:t>
+            </a:r>
+            <a:endParaRPr lang="zh-CN" altLang="en-US" sz="2400" b="1" dirty="0">
+              <a:solidFill>
+                <a:schemeClr val="accent1"/>
+              </a:solidFill>
+              <a:latin typeface="+mn-ea"/>
+              <a:cs typeface="+mn-ea"/>
+              <a:sym typeface="+mn-ea"/>
+            </a:endParaRPr>
+          </a:p>
+        </p:txBody>
+      </p:sp>
+      <p:sp>
+        <p:nvSpPr>
+          <p:cNvPr id="20" name="文本框 19"/>
+          <p:cNvSpPr txBox="1"/>
+          <p:nvPr/>
+        </p:nvSpPr>
+        <p:spPr>
+          <a:xfrm>
+            <a:off x="2211705" y="1264285"/>
+            <a:ext cx="9234170" cy="2030095"/>
+          </a:xfrm>
+          <a:prstGeom prst="rect">
+            <a:avLst/>
+          </a:prstGeom>
+          <a:noFill/>
+        </p:spPr>
+        <p:txBody>
+          <a:bodyPr wrap="square" rtlCol="0">
+            <a:spAutoFit/>
+          </a:bodyPr>
+          <a:p>
+            <a:r>
+              <a:rPr lang="zh-CN" altLang="en-US">
+                <a:sym typeface="+mn-ea"/>
+              </a:rPr>
+              <a:t>输入特征：面积</a:t>
+            </a:r>
+            <a:r>
+              <a:rPr lang="en-US" altLang="zh-CN">
+                <a:sym typeface="+mn-ea"/>
+              </a:rPr>
+              <a:t>, </a:t>
+            </a:r>
+            <a:r>
+              <a:rPr lang="zh-CN" altLang="en-US">
+                <a:sym typeface="+mn-ea"/>
+              </a:rPr>
+              <a:t>经度</a:t>
+            </a:r>
+            <a:r>
+              <a:rPr lang="en-US" altLang="zh-CN">
+                <a:sym typeface="+mn-ea"/>
+              </a:rPr>
+              <a:t>(lon), </a:t>
+            </a:r>
+            <a:r>
+              <a:rPr lang="zh-CN" altLang="en-US">
+                <a:sym typeface="+mn-ea"/>
+              </a:rPr>
+              <a:t>纬度</a:t>
+            </a:r>
+            <a:r>
+              <a:rPr lang="en-US" altLang="zh-CN">
+                <a:sym typeface="+mn-ea"/>
+              </a:rPr>
+              <a:t>(lat), </a:t>
+            </a:r>
+            <a:r>
+              <a:rPr lang="zh-CN" altLang="en-US">
+                <a:sym typeface="+mn-ea"/>
+              </a:rPr>
+              <a:t>室</a:t>
+            </a:r>
+            <a:r>
+              <a:rPr lang="en-US" altLang="zh-CN">
+                <a:sym typeface="+mn-ea"/>
+              </a:rPr>
+              <a:t>, </a:t>
+            </a:r>
+            <a:r>
+              <a:rPr lang="zh-CN" altLang="en-US">
+                <a:sym typeface="+mn-ea"/>
+              </a:rPr>
+              <a:t>厅</a:t>
+            </a:r>
+            <a:r>
+              <a:rPr lang="en-US" altLang="zh-CN">
+                <a:sym typeface="+mn-ea"/>
+              </a:rPr>
+              <a:t>, </a:t>
+            </a:r>
+            <a:r>
+              <a:rPr lang="zh-CN" altLang="en-US">
+                <a:sym typeface="+mn-ea"/>
+              </a:rPr>
+              <a:t>卫</a:t>
+            </a:r>
+            <a:r>
+              <a:rPr lang="en-US" altLang="zh-CN">
+                <a:sym typeface="+mn-ea"/>
+              </a:rPr>
+              <a:t>, </a:t>
+            </a:r>
+            <a:r>
+              <a:rPr lang="zh-CN" altLang="en-US">
+                <a:sym typeface="+mn-ea"/>
+              </a:rPr>
+              <a:t>电梯</a:t>
+            </a:r>
+            <a:r>
+              <a:rPr lang="en-US" altLang="zh-CN">
+                <a:sym typeface="+mn-ea"/>
+              </a:rPr>
+              <a:t>, </a:t>
+            </a:r>
+            <a:r>
+              <a:rPr lang="zh-CN" altLang="en-US">
+                <a:sym typeface="+mn-ea"/>
+              </a:rPr>
+              <a:t>车位</a:t>
+            </a:r>
+            <a:r>
+              <a:rPr lang="en-US" altLang="zh-CN">
+                <a:sym typeface="+mn-ea"/>
+              </a:rPr>
+              <a:t>...</a:t>
+            </a:r>
+            <a:endParaRPr lang="en-US" altLang="zh-CN"/>
+          </a:p>
+          <a:p>
+            <a:r>
+              <a:rPr lang="zh-CN" altLang="en-US">
+                <a:sym typeface="+mn-ea"/>
+              </a:rPr>
+              <a:t>预测目标：</a:t>
+            </a:r>
+            <a:r>
+              <a:rPr lang="en-US" altLang="zh-CN">
+                <a:sym typeface="+mn-ea"/>
+              </a:rPr>
+              <a:t>log(Price)</a:t>
+            </a:r>
+            <a:endParaRPr lang="en-US" altLang="zh-CN"/>
+          </a:p>
+          <a:p>
+            <a:r>
+              <a:rPr lang="zh-CN" altLang="en-US">
+                <a:sym typeface="+mn-ea"/>
+              </a:rPr>
+              <a:t>阶段输出：</a:t>
+            </a:r>
+            <a:r>
+              <a:rPr lang="en-US" altLang="zh-CN">
+                <a:sym typeface="+mn-ea"/>
+              </a:rPr>
+              <a:t>location_residual (</a:t>
+            </a:r>
+            <a:r>
+              <a:rPr lang="zh-CN" altLang="en-US">
+                <a:sym typeface="+mn-ea"/>
+              </a:rPr>
+              <a:t>残差</a:t>
+            </a:r>
+            <a:r>
+              <a:rPr lang="en-US" altLang="zh-CN">
+                <a:sym typeface="+mn-ea"/>
+              </a:rPr>
+              <a:t>)</a:t>
+            </a:r>
+            <a:endParaRPr lang="zh-CN" altLang="en-US"/>
+          </a:p>
+          <a:p>
+            <a:pPr lvl="1"/>
+            <a:r>
+              <a:rPr lang="zh-CN" altLang="en-US" b="1">
+                <a:sym typeface="+mn-ea"/>
+              </a:rPr>
+              <a:t>残差</a:t>
+            </a:r>
+            <a:r>
+              <a:rPr lang="en-US" altLang="zh-CN" b="1">
+                <a:sym typeface="+mn-ea"/>
+              </a:rPr>
+              <a:t> = </a:t>
+            </a:r>
+            <a:r>
+              <a:rPr lang="zh-CN" altLang="en-US" b="1">
+                <a:sym typeface="+mn-ea"/>
+              </a:rPr>
+              <a:t>真实房价</a:t>
+            </a:r>
+            <a:r>
+              <a:rPr lang="en-US" altLang="zh-CN" b="1">
+                <a:sym typeface="+mn-ea"/>
+              </a:rPr>
+              <a:t> - Stage1</a:t>
+            </a:r>
+            <a:r>
+              <a:rPr lang="zh-CN" altLang="en-US" b="1">
+                <a:sym typeface="+mn-ea"/>
+              </a:rPr>
+              <a:t>模型预测的房价</a:t>
+            </a:r>
+            <a:endParaRPr lang="zh-CN" altLang="en-US"/>
+          </a:p>
+          <a:p>
+            <a:pPr lvl="1"/>
+            <a:r>
+              <a:rPr lang="zh-CN" altLang="en-US">
+                <a:sym typeface="+mn-ea"/>
+              </a:rPr>
+              <a:t>如果残差</a:t>
+            </a:r>
+            <a:r>
+              <a:rPr lang="en-US" altLang="zh-CN">
+                <a:sym typeface="+mn-ea"/>
+              </a:rPr>
+              <a:t>&gt;0</a:t>
+            </a:r>
+            <a:r>
+              <a:rPr lang="zh-CN" altLang="en-US">
+                <a:sym typeface="+mn-ea"/>
+              </a:rPr>
+              <a:t>，说明房子比单纯按面积</a:t>
+            </a:r>
+            <a:r>
+              <a:rPr lang="en-US" altLang="zh-CN">
+                <a:sym typeface="+mn-ea"/>
+              </a:rPr>
+              <a:t>/</a:t>
+            </a:r>
+            <a:r>
+              <a:rPr lang="zh-CN" altLang="en-US">
+                <a:sym typeface="+mn-ea"/>
+              </a:rPr>
+              <a:t>户型算出来的价格要贵，地段好；如果</a:t>
+            </a:r>
+            <a:r>
+              <a:rPr lang="en-US" altLang="zh-CN">
+                <a:sym typeface="+mn-ea"/>
+              </a:rPr>
+              <a:t>&lt;0</a:t>
+            </a:r>
+            <a:r>
+              <a:rPr lang="zh-CN" altLang="en-US">
+                <a:sym typeface="+mn-ea"/>
+              </a:rPr>
+              <a:t>，说明地段差</a:t>
+            </a:r>
+            <a:endParaRPr lang="zh-CN" altLang="en-US"/>
+          </a:p>
+          <a:p>
+            <a:endParaRPr lang="zh-CN" altLang="en-US"/>
+          </a:p>
+        </p:txBody>
+      </p:sp>
+      <p:sp>
+        <p:nvSpPr>
+          <p:cNvPr id="28" name="文本框 27"/>
+          <p:cNvSpPr txBox="1"/>
+          <p:nvPr/>
+        </p:nvSpPr>
+        <p:spPr>
+          <a:xfrm>
+            <a:off x="2211705" y="5158740"/>
+            <a:ext cx="9631680" cy="922020"/>
+          </a:xfrm>
+          <a:prstGeom prst="rect">
+            <a:avLst/>
+          </a:prstGeom>
+          <a:noFill/>
+        </p:spPr>
+        <p:txBody>
+          <a:bodyPr wrap="square" rtlCol="0">
+            <a:spAutoFit/>
+          </a:bodyPr>
+          <a:p>
+            <a:r>
+              <a:rPr lang="zh-CN" altLang="en-US"/>
+              <a:t>输入特征：房子的物理属性（面积、</a:t>
+            </a:r>
+            <a:r>
+              <a:rPr lang="en-US" altLang="zh-CN"/>
+              <a:t>lon...</a:t>
+            </a:r>
+            <a:r>
+              <a:rPr lang="zh-CN" altLang="en-US"/>
+              <a:t>）</a:t>
+            </a:r>
+            <a:r>
+              <a:rPr lang="en-US" altLang="zh-CN"/>
+              <a:t>+ </a:t>
+            </a:r>
+            <a:r>
+              <a:rPr lang="zh-CN" altLang="en-US"/>
+              <a:t>城市、区县、板块</a:t>
+            </a:r>
+            <a:r>
+              <a:rPr lang="en-US" altLang="zh-CN"/>
+              <a:t> + </a:t>
+            </a:r>
+            <a:r>
+              <a:rPr lang="zh-CN" altLang="en-US"/>
+              <a:t>地段溢价</a:t>
+            </a:r>
+            <a:r>
+              <a:rPr lang="en-US" altLang="zh-CN"/>
+              <a:t>(Location_Score)</a:t>
+            </a:r>
+            <a:endParaRPr lang="en-US" altLang="zh-CN"/>
+          </a:p>
+          <a:p>
+            <a:r>
+              <a:rPr lang="en-US" altLang="zh-CN"/>
+              <a:t> </a:t>
+            </a:r>
+            <a:endParaRPr lang="zh-CN" altLang="en-US"/>
+          </a:p>
+          <a:p>
+            <a:endParaRPr lang="zh-CN" altLang="en-US"/>
+          </a:p>
+        </p:txBody>
+      </p:sp>
+      <p:sp>
+        <p:nvSpPr>
+          <p:cNvPr id="17" name="文本框 16"/>
+          <p:cNvSpPr txBox="1"/>
+          <p:nvPr>
+            <p:custDataLst>
+              <p:tags r:id="rId3"/>
+            </p:custDataLst>
+          </p:nvPr>
+        </p:nvSpPr>
+        <p:spPr>
+          <a:xfrm>
+            <a:off x="191135" y="3046730"/>
+            <a:ext cx="1455420" cy="1551305"/>
+          </a:xfrm>
+          <a:prstGeom prst="rect">
+            <a:avLst/>
+          </a:prstGeom>
+          <a:noFill/>
+        </p:spPr>
+        <p:txBody>
+          <a:bodyPr wrap="none" lIns="0" tIns="36195" rIns="0" bIns="0" rtlCol="0" anchor="ctr" anchorCtr="0">
+            <a:noAutofit/>
+          </a:bodyPr>
+          <a:p>
+            <a:pPr lvl="0" algn="l">
+              <a:buClrTx/>
+              <a:buSzTx/>
+              <a:buFontTx/>
+            </a:pPr>
+            <a:r>
+              <a:rPr lang="en-US" altLang="zh-CN" sz="2400" b="1" dirty="0">
+                <a:solidFill>
+                  <a:schemeClr val="accent1"/>
+                </a:solidFill>
+                <a:latin typeface="+mn-ea"/>
+                <a:cs typeface="+mn-ea"/>
+                <a:sym typeface="+mn-ea"/>
+              </a:rPr>
+              <a:t>Location_Score</a:t>
+            </a:r>
+            <a:endParaRPr lang="en-US" altLang="zh-CN" sz="2400" b="1" dirty="0">
+              <a:solidFill>
+                <a:schemeClr val="accent1"/>
+              </a:solidFill>
+              <a:latin typeface="+mn-ea"/>
+              <a:cs typeface="+mn-ea"/>
+              <a:sym typeface="+mn-ea"/>
+            </a:endParaRPr>
+          </a:p>
+        </p:txBody>
+      </p:sp>
+      <p:sp>
+        <p:nvSpPr>
+          <p:cNvPr id="25" name="文本框 24"/>
+          <p:cNvSpPr txBox="1"/>
+          <p:nvPr/>
+        </p:nvSpPr>
+        <p:spPr>
+          <a:xfrm>
+            <a:off x="2387600" y="3294380"/>
+            <a:ext cx="8882380" cy="1198880"/>
+          </a:xfrm>
+          <a:prstGeom prst="rect">
+            <a:avLst/>
+          </a:prstGeom>
+          <a:noFill/>
+        </p:spPr>
+        <p:txBody>
+          <a:bodyPr wrap="square" rtlCol="0">
+            <a:spAutoFit/>
+          </a:bodyPr>
+          <a:p>
+            <a:r>
+              <a:rPr lang="zh-CN" altLang="en-US"/>
+              <a:t>依次计算板块、区县、</a:t>
+            </a:r>
+            <a:r>
+              <a:rPr lang="zh-CN" altLang="en-US"/>
+              <a:t>城市级别的平均残差</a:t>
+            </a:r>
+            <a:endParaRPr lang="zh-CN" altLang="en-US"/>
+          </a:p>
+          <a:p>
+            <a:r>
+              <a:rPr lang="zh-CN" altLang="en-US"/>
+              <a:t>测试集里</a:t>
+            </a:r>
+            <a:r>
+              <a:rPr lang="zh-CN" altLang="en-US"/>
+              <a:t>的房子所在</a:t>
+            </a:r>
+            <a:r>
+              <a:rPr lang="en-US" altLang="zh-CN"/>
+              <a:t>“</a:t>
+            </a:r>
+            <a:r>
+              <a:rPr lang="zh-CN" altLang="en-US"/>
+              <a:t>板块</a:t>
+            </a:r>
+            <a:r>
+              <a:rPr lang="en-US" altLang="zh-CN"/>
+              <a:t>”</a:t>
+            </a:r>
+            <a:r>
+              <a:rPr lang="zh-CN" altLang="en-US"/>
+              <a:t>在训练集里出现过，就用该板块的平均残差作为得分。</a:t>
+            </a:r>
+            <a:endParaRPr lang="zh-CN" altLang="en-US"/>
+          </a:p>
+          <a:p>
+            <a:r>
+              <a:rPr lang="zh-CN" altLang="en-US"/>
+              <a:t>如果是新板块，就退而求其次用</a:t>
+            </a:r>
+            <a:r>
+              <a:rPr lang="en-US" altLang="zh-CN"/>
+              <a:t>“</a:t>
+            </a:r>
+            <a:r>
+              <a:rPr lang="zh-CN" altLang="en-US"/>
+              <a:t>区县</a:t>
+            </a:r>
+            <a:r>
+              <a:rPr lang="en-US" altLang="zh-CN"/>
+              <a:t>”</a:t>
+            </a:r>
+            <a:r>
+              <a:rPr lang="zh-CN" altLang="en-US"/>
+              <a:t>的均值，以此类推。</a:t>
+            </a:r>
+            <a:endParaRPr lang="zh-CN" altLang="en-US"/>
+          </a:p>
+          <a:p>
+            <a:r>
+              <a:rPr lang="en-US" altLang="zh-CN"/>
+              <a:t>Location_Score</a:t>
+            </a:r>
+            <a:r>
+              <a:rPr lang="zh-CN" altLang="en-US"/>
+              <a:t>，代表该地段的平均溢价</a:t>
+            </a:r>
+            <a:endParaRPr lang="zh-CN" altLang="en-US"/>
+          </a:p>
+        </p:txBody>
+      </p:sp>
+      <p:grpSp>
+        <p:nvGrpSpPr>
+          <p:cNvPr id="3" name="组合 2"/>
+          <p:cNvGrpSpPr/>
+          <p:nvPr>
+            <p:custDataLst>
+              <p:tags r:id="rId4"/>
+            </p:custDataLst>
+          </p:nvPr>
+        </p:nvGrpSpPr>
+        <p:grpSpPr>
+          <a:xfrm>
+            <a:off x="241300" y="311150"/>
+            <a:ext cx="11602085" cy="5837555"/>
+            <a:chOff x="380" y="490"/>
+            <a:chExt cx="18271" cy="9193"/>
+          </a:xfrm>
+        </p:grpSpPr>
+        <p:sp>
+          <p:nvSpPr>
+            <p:cNvPr id="2" name="文本框 1"/>
+            <p:cNvSpPr txBox="1"/>
+            <p:nvPr/>
+          </p:nvSpPr>
+          <p:spPr>
+            <a:xfrm>
+              <a:off x="4729" y="490"/>
+              <a:ext cx="9186" cy="1501"/>
+            </a:xfrm>
+            <a:prstGeom prst="rect">
+              <a:avLst/>
+            </a:prstGeom>
+            <a:noFill/>
+          </p:spPr>
+          <p:txBody>
+            <a:bodyPr wrap="square" rtlCol="0">
+              <a:spAutoFit/>
+            </a:bodyPr>
+            <a:lstStyle/>
+            <a:p>
+              <a:pPr algn="ctr"/>
+              <a:r>
+                <a:rPr lang="zh-CN" altLang="en-US" sz="2800" b="1" dirty="0">
+                  <a:latin typeface="迷你简细倩" panose="03000509000000000000" pitchFamily="65" charset="-122"/>
+                  <a:ea typeface="迷你简细倩" panose="03000509000000000000" pitchFamily="65" charset="-122"/>
+                  <a:sym typeface="+mn-ea"/>
+                </a:rPr>
+                <a:t>两阶段模型</a:t>
+              </a:r>
+              <a:endParaRPr lang="zh-CN" altLang="en-US" sz="2800" b="1" dirty="0">
+                <a:latin typeface="迷你简细倩" panose="03000509000000000000" pitchFamily="65" charset="-122"/>
+                <a:ea typeface="迷你简细倩" panose="03000509000000000000" pitchFamily="65" charset="-122"/>
+                <a:sym typeface="+mn-ea"/>
+              </a:endParaRPr>
+            </a:p>
+            <a:p>
+              <a:pPr algn="ctr"/>
+              <a:r>
+                <a:rPr lang="zh-CN" altLang="en-US" sz="2800" dirty="0">
+                  <a:latin typeface="Times New Roman" panose="02020603050405020304" charset="0"/>
+                  <a:ea typeface="宋体" panose="02010600030101010101" pitchFamily="2" charset="-122"/>
+                  <a:cs typeface="Times New Roman" panose="02020603050405020304" charset="0"/>
+                  <a:sym typeface="+mn-ea"/>
+                </a:rPr>
+                <a:t>房价</a:t>
+              </a:r>
+              <a:r>
+                <a:rPr lang="en-US" altLang="zh-CN" sz="2800" dirty="0">
+                  <a:latin typeface="Times New Roman" panose="02020603050405020304" charset="0"/>
+                  <a:ea typeface="宋体" panose="02010600030101010101" pitchFamily="2" charset="-122"/>
+                  <a:cs typeface="Times New Roman" panose="02020603050405020304" charset="0"/>
+                  <a:sym typeface="+mn-ea"/>
+                </a:rPr>
+                <a:t> = </a:t>
+              </a:r>
+              <a:r>
+                <a:rPr lang="zh-CN" altLang="en-US" sz="2800" dirty="0">
+                  <a:latin typeface="Times New Roman" panose="02020603050405020304" charset="0"/>
+                  <a:ea typeface="宋体" panose="02010600030101010101" pitchFamily="2" charset="-122"/>
+                  <a:cs typeface="Times New Roman" panose="02020603050405020304" charset="0"/>
+                  <a:sym typeface="+mn-ea"/>
+                </a:rPr>
+                <a:t>房子本身价值</a:t>
+              </a:r>
+              <a:r>
+                <a:rPr lang="en-US" altLang="zh-CN" sz="2800" dirty="0">
+                  <a:latin typeface="Times New Roman" panose="02020603050405020304" charset="0"/>
+                  <a:ea typeface="宋体" panose="02010600030101010101" pitchFamily="2" charset="-122"/>
+                  <a:cs typeface="Times New Roman" panose="02020603050405020304" charset="0"/>
+                  <a:sym typeface="+mn-ea"/>
+                </a:rPr>
+                <a:t> + </a:t>
+              </a:r>
+              <a:r>
+                <a:rPr lang="zh-CN" altLang="en-US" sz="2800" dirty="0">
+                  <a:latin typeface="Times New Roman" panose="02020603050405020304" charset="0"/>
+                  <a:ea typeface="宋体" panose="02010600030101010101" pitchFamily="2" charset="-122"/>
+                  <a:cs typeface="Times New Roman" panose="02020603050405020304" charset="0"/>
+                  <a:sym typeface="+mn-ea"/>
+                </a:rPr>
+                <a:t>地段价值</a:t>
+              </a:r>
+              <a:endParaRPr lang="zh-CN" altLang="en-US" sz="2800" dirty="0">
+                <a:latin typeface="Times New Roman" panose="02020603050405020304" charset="0"/>
+                <a:ea typeface="宋体" panose="02010600030101010101" pitchFamily="2" charset="-122"/>
+                <a:cs typeface="Times New Roman" panose="02020603050405020304" charset="0"/>
+                <a:sym typeface="+mn-ea"/>
+              </a:endParaRPr>
+            </a:p>
+          </p:txBody>
+        </p:sp>
+        <p:sp>
+          <p:nvSpPr>
+            <p:cNvPr id="4" name="文本框 3"/>
+            <p:cNvSpPr txBox="1"/>
+            <p:nvPr>
+              <p:custDataLst>
+                <p:tags r:id="rId5"/>
+              </p:custDataLst>
+            </p:nvPr>
+          </p:nvSpPr>
+          <p:spPr>
+            <a:xfrm>
+              <a:off x="1120" y="2090"/>
+              <a:ext cx="1173" cy="2443"/>
+            </a:xfrm>
+            <a:prstGeom prst="rect">
+              <a:avLst/>
+            </a:prstGeom>
+            <a:noFill/>
+          </p:spPr>
+          <p:txBody>
+            <a:bodyPr wrap="none" lIns="0" tIns="36195" rIns="0" bIns="0" rtlCol="0" anchor="ctr" anchorCtr="0">
+              <a:noAutofit/>
+            </a:bodyPr>
+            <a:p>
+              <a:pPr algn="ctr">
+                <a:spcBef>
+                  <a:spcPct val="0"/>
+                </a:spcBef>
+                <a:spcAft>
+                  <a:spcPct val="0"/>
+                </a:spcAft>
+              </a:pPr>
+              <a:r>
+                <a:rPr lang="en-US" altLang="zh-CN" sz="2400" b="1" dirty="0">
+                  <a:solidFill>
+                    <a:schemeClr val="accent1"/>
+                  </a:solidFill>
+                  <a:latin typeface="+mn-ea"/>
+                  <a:cs typeface="+mn-ea"/>
+                  <a:sym typeface="+mn-ea"/>
+                </a:rPr>
+                <a:t>Stage 1</a:t>
+              </a:r>
+              <a:r>
+                <a:rPr lang="zh-CN" altLang="en-US" sz="2400" b="1" dirty="0">
+                  <a:solidFill>
+                    <a:schemeClr val="accent1"/>
+                  </a:solidFill>
+                  <a:latin typeface="+mn-ea"/>
+                  <a:cs typeface="+mn-ea"/>
+                  <a:sym typeface="+mn-ea"/>
+                </a:rPr>
+                <a:t>：</a:t>
+              </a:r>
+              <a:endParaRPr lang="zh-CN" altLang="en-US" sz="2400" b="1" dirty="0">
+                <a:solidFill>
+                  <a:schemeClr val="accent1"/>
+                </a:solidFill>
+                <a:latin typeface="+mn-ea"/>
+                <a:cs typeface="+mn-ea"/>
+              </a:endParaRPr>
+            </a:p>
+            <a:p>
+              <a:pPr algn="ctr">
+                <a:spcBef>
+                  <a:spcPct val="0"/>
+                </a:spcBef>
+                <a:spcAft>
+                  <a:spcPct val="0"/>
+                </a:spcAft>
+              </a:pPr>
+              <a:r>
+                <a:rPr lang="zh-CN" altLang="en-US" sz="2400" b="1" dirty="0">
+                  <a:solidFill>
+                    <a:schemeClr val="accent1"/>
+                  </a:solidFill>
+                  <a:latin typeface="+mn-ea"/>
+                  <a:cs typeface="+mn-ea"/>
+                  <a:sym typeface="+mn-ea"/>
+                </a:rPr>
+                <a:t>剥离地段价值</a:t>
+              </a:r>
+              <a:endParaRPr lang="zh-CN" altLang="en-US" sz="2400" b="1" dirty="0">
+                <a:solidFill>
+                  <a:schemeClr val="accent1"/>
+                </a:solidFill>
+                <a:latin typeface="+mn-ea"/>
+                <a:ea typeface="+mj-lt"/>
+                <a:cs typeface="+mn-ea"/>
+                <a:sym typeface="+mn-ea"/>
+              </a:endParaRPr>
+            </a:p>
+          </p:txBody>
+        </p:sp>
+        <p:sp>
+          <p:nvSpPr>
+            <p:cNvPr id="5" name="文本框 4"/>
+            <p:cNvSpPr txBox="1"/>
+            <p:nvPr>
+              <p:custDataLst>
+                <p:tags r:id="rId6"/>
+              </p:custDataLst>
+            </p:nvPr>
+          </p:nvSpPr>
+          <p:spPr>
+            <a:xfrm>
+              <a:off x="380" y="7241"/>
+              <a:ext cx="2930" cy="2443"/>
+            </a:xfrm>
+            <a:prstGeom prst="rect">
+              <a:avLst/>
+            </a:prstGeom>
+            <a:noFill/>
+          </p:spPr>
+          <p:txBody>
+            <a:bodyPr wrap="none" lIns="0" tIns="36195" rIns="0" bIns="0" rtlCol="0" anchor="ctr" anchorCtr="0">
+              <a:noAutofit/>
+            </a:bodyPr>
+            <a:p>
+              <a:pPr lvl="0" algn="l">
+                <a:buClrTx/>
+                <a:buSzTx/>
+                <a:buFontTx/>
+              </a:pPr>
+              <a:r>
+                <a:rPr lang="zh-CN" altLang="en-US" sz="2400" b="1" dirty="0">
+                  <a:solidFill>
+                    <a:schemeClr val="accent1"/>
+                  </a:solidFill>
+                  <a:latin typeface="+mn-ea"/>
+                  <a:cs typeface="+mn-ea"/>
+                  <a:sym typeface="+mn-ea"/>
+                </a:rPr>
+                <a:t>全部特征建模</a:t>
+              </a:r>
+              <a:endParaRPr lang="zh-CN" altLang="en-US" sz="2400" b="1" dirty="0">
+                <a:solidFill>
+                  <a:schemeClr val="accent1"/>
+                </a:solidFill>
+                <a:latin typeface="+mn-ea"/>
+                <a:cs typeface="+mn-ea"/>
+                <a:sym typeface="+mn-ea"/>
+              </a:endParaRPr>
+            </a:p>
+          </p:txBody>
+        </p:sp>
+        <p:sp>
+          <p:nvSpPr>
+            <p:cNvPr id="6" name="文本框 5"/>
+            <p:cNvSpPr txBox="1"/>
+            <p:nvPr/>
+          </p:nvSpPr>
+          <p:spPr>
+            <a:xfrm>
+              <a:off x="3483" y="1991"/>
+              <a:ext cx="14542" cy="3197"/>
+            </a:xfrm>
+            <a:prstGeom prst="rect">
+              <a:avLst/>
+            </a:prstGeom>
+            <a:noFill/>
+          </p:spPr>
+          <p:txBody>
+            <a:bodyPr wrap="square" rtlCol="0">
+              <a:spAutoFit/>
+            </a:bodyPr>
+            <a:p>
+              <a:r>
+                <a:rPr lang="zh-CN" altLang="en-US">
+                  <a:sym typeface="+mn-ea"/>
+                </a:rPr>
+                <a:t>输入特征：面积</a:t>
+              </a:r>
+              <a:r>
+                <a:rPr lang="en-US" altLang="zh-CN">
+                  <a:sym typeface="+mn-ea"/>
+                </a:rPr>
+                <a:t>, </a:t>
+              </a:r>
+              <a:r>
+                <a:rPr lang="zh-CN" altLang="en-US">
+                  <a:sym typeface="+mn-ea"/>
+                </a:rPr>
+                <a:t>经度</a:t>
+              </a:r>
+              <a:r>
+                <a:rPr lang="en-US" altLang="zh-CN">
+                  <a:sym typeface="+mn-ea"/>
+                </a:rPr>
+                <a:t>(lon), </a:t>
+              </a:r>
+              <a:r>
+                <a:rPr lang="zh-CN" altLang="en-US">
+                  <a:sym typeface="+mn-ea"/>
+                </a:rPr>
+                <a:t>纬度</a:t>
+              </a:r>
+              <a:r>
+                <a:rPr lang="en-US" altLang="zh-CN">
+                  <a:sym typeface="+mn-ea"/>
+                </a:rPr>
+                <a:t>(lat), </a:t>
+              </a:r>
+              <a:r>
+                <a:rPr lang="zh-CN" altLang="en-US">
+                  <a:sym typeface="+mn-ea"/>
+                </a:rPr>
+                <a:t>室</a:t>
+              </a:r>
+              <a:r>
+                <a:rPr lang="en-US" altLang="zh-CN">
+                  <a:sym typeface="+mn-ea"/>
+                </a:rPr>
+                <a:t>, </a:t>
+              </a:r>
+              <a:r>
+                <a:rPr lang="zh-CN" altLang="en-US">
+                  <a:sym typeface="+mn-ea"/>
+                </a:rPr>
+                <a:t>厅</a:t>
+              </a:r>
+              <a:r>
+                <a:rPr lang="en-US" altLang="zh-CN">
+                  <a:sym typeface="+mn-ea"/>
+                </a:rPr>
+                <a:t>, </a:t>
+              </a:r>
+              <a:r>
+                <a:rPr lang="zh-CN" altLang="en-US">
+                  <a:sym typeface="+mn-ea"/>
+                </a:rPr>
+                <a:t>卫</a:t>
+              </a:r>
+              <a:r>
+                <a:rPr lang="en-US" altLang="zh-CN">
+                  <a:sym typeface="+mn-ea"/>
+                </a:rPr>
+                <a:t>, </a:t>
+              </a:r>
+              <a:r>
+                <a:rPr lang="zh-CN" altLang="en-US">
+                  <a:sym typeface="+mn-ea"/>
+                </a:rPr>
+                <a:t>电梯</a:t>
+              </a:r>
+              <a:r>
+                <a:rPr lang="en-US" altLang="zh-CN">
+                  <a:sym typeface="+mn-ea"/>
+                </a:rPr>
+                <a:t>, </a:t>
+              </a:r>
+              <a:r>
+                <a:rPr lang="zh-CN" altLang="en-US">
+                  <a:sym typeface="+mn-ea"/>
+                </a:rPr>
+                <a:t>车位</a:t>
+              </a:r>
+              <a:r>
+                <a:rPr lang="en-US" altLang="zh-CN">
+                  <a:sym typeface="+mn-ea"/>
+                </a:rPr>
+                <a:t>...</a:t>
+              </a:r>
+              <a:endParaRPr lang="en-US" altLang="zh-CN"/>
+            </a:p>
+            <a:p>
+              <a:r>
+                <a:rPr lang="zh-CN" altLang="en-US">
+                  <a:sym typeface="+mn-ea"/>
+                </a:rPr>
+                <a:t>预测目标：</a:t>
+              </a:r>
+              <a:r>
+                <a:rPr lang="en-US" altLang="zh-CN">
+                  <a:sym typeface="+mn-ea"/>
+                </a:rPr>
+                <a:t>log(Price)</a:t>
+              </a:r>
+              <a:endParaRPr lang="en-US" altLang="zh-CN"/>
+            </a:p>
+            <a:p>
+              <a:r>
+                <a:rPr lang="zh-CN" altLang="en-US">
+                  <a:sym typeface="+mn-ea"/>
+                </a:rPr>
+                <a:t>阶段输出：</a:t>
+              </a:r>
+              <a:r>
+                <a:rPr lang="en-US" altLang="zh-CN">
+                  <a:sym typeface="+mn-ea"/>
+                </a:rPr>
+                <a:t>location_residual (</a:t>
+              </a:r>
+              <a:r>
+                <a:rPr lang="zh-CN" altLang="en-US">
+                  <a:sym typeface="+mn-ea"/>
+                </a:rPr>
+                <a:t>残差</a:t>
+              </a:r>
+              <a:r>
+                <a:rPr lang="en-US" altLang="zh-CN">
+                  <a:sym typeface="+mn-ea"/>
+                </a:rPr>
+                <a:t>)</a:t>
+              </a:r>
+              <a:endParaRPr lang="zh-CN" altLang="en-US"/>
+            </a:p>
+            <a:p>
+              <a:pPr lvl="1"/>
+              <a:r>
+                <a:rPr lang="zh-CN" altLang="en-US" b="1">
+                  <a:sym typeface="+mn-ea"/>
+                </a:rPr>
+                <a:t>残差</a:t>
+              </a:r>
+              <a:r>
+                <a:rPr lang="en-US" altLang="zh-CN" b="1">
+                  <a:sym typeface="+mn-ea"/>
+                </a:rPr>
+                <a:t> = </a:t>
+              </a:r>
+              <a:r>
+                <a:rPr lang="zh-CN" altLang="en-US" b="1">
+                  <a:sym typeface="+mn-ea"/>
+                </a:rPr>
+                <a:t>真实房价</a:t>
+              </a:r>
+              <a:r>
+                <a:rPr lang="en-US" altLang="zh-CN" b="1">
+                  <a:sym typeface="+mn-ea"/>
+                </a:rPr>
+                <a:t> - Stage1</a:t>
+              </a:r>
+              <a:r>
+                <a:rPr lang="zh-CN" altLang="en-US" b="1">
+                  <a:sym typeface="+mn-ea"/>
+                </a:rPr>
+                <a:t>模型预测的房价</a:t>
+              </a:r>
+              <a:endParaRPr lang="zh-CN" altLang="en-US"/>
+            </a:p>
+            <a:p>
+              <a:pPr lvl="1"/>
+              <a:r>
+                <a:rPr lang="zh-CN" altLang="en-US">
+                  <a:sym typeface="+mn-ea"/>
+                </a:rPr>
+                <a:t>如果残差</a:t>
+              </a:r>
+              <a:r>
+                <a:rPr lang="en-US" altLang="zh-CN">
+                  <a:sym typeface="+mn-ea"/>
+                </a:rPr>
+                <a:t>&gt;0</a:t>
+              </a:r>
+              <a:r>
+                <a:rPr lang="zh-CN" altLang="en-US">
+                  <a:sym typeface="+mn-ea"/>
+                </a:rPr>
+                <a:t>，说明房子比单纯按面积</a:t>
+              </a:r>
+              <a:r>
+                <a:rPr lang="en-US" altLang="zh-CN">
+                  <a:sym typeface="+mn-ea"/>
+                </a:rPr>
+                <a:t>/</a:t>
+              </a:r>
+              <a:r>
+                <a:rPr lang="zh-CN" altLang="en-US">
+                  <a:sym typeface="+mn-ea"/>
+                </a:rPr>
+                <a:t>户型算出来的价格要贵，地段好；如果</a:t>
+              </a:r>
+              <a:r>
+                <a:rPr lang="en-US" altLang="zh-CN">
+                  <a:sym typeface="+mn-ea"/>
+                </a:rPr>
+                <a:t>&lt;0</a:t>
+              </a:r>
+              <a:r>
+                <a:rPr lang="zh-CN" altLang="en-US">
+                  <a:sym typeface="+mn-ea"/>
+                </a:rPr>
+                <a:t>，说明地段差</a:t>
+              </a:r>
+              <a:endParaRPr lang="zh-CN" altLang="en-US"/>
+            </a:p>
+            <a:p>
+              <a:endParaRPr lang="zh-CN" altLang="en-US"/>
+            </a:p>
+          </p:txBody>
+        </p:sp>
+        <p:sp>
+          <p:nvSpPr>
+            <p:cNvPr id="7" name="文本框 6"/>
+            <p:cNvSpPr txBox="1"/>
+            <p:nvPr/>
+          </p:nvSpPr>
+          <p:spPr>
+            <a:xfrm>
+              <a:off x="3483" y="8124"/>
+              <a:ext cx="15168" cy="1452"/>
+            </a:xfrm>
+            <a:prstGeom prst="rect">
+              <a:avLst/>
+            </a:prstGeom>
+            <a:noFill/>
+          </p:spPr>
+          <p:txBody>
+            <a:bodyPr wrap="square" rtlCol="0">
+              <a:spAutoFit/>
+            </a:bodyPr>
+            <a:p>
+              <a:r>
+                <a:rPr lang="zh-CN" altLang="en-US"/>
+                <a:t>输入特征：房子的物理属性（面积、</a:t>
+              </a:r>
+              <a:r>
+                <a:rPr lang="en-US" altLang="zh-CN"/>
+                <a:t>lon...</a:t>
+              </a:r>
+              <a:r>
+                <a:rPr lang="zh-CN" altLang="en-US"/>
+                <a:t>）</a:t>
+              </a:r>
+              <a:r>
+                <a:rPr lang="en-US" altLang="zh-CN"/>
+                <a:t>+ </a:t>
+              </a:r>
+              <a:r>
+                <a:rPr lang="zh-CN" altLang="en-US"/>
+                <a:t>城市、区县、板块</a:t>
+              </a:r>
+              <a:r>
+                <a:rPr lang="en-US" altLang="zh-CN"/>
+                <a:t> + </a:t>
+              </a:r>
+              <a:r>
+                <a:rPr lang="zh-CN" altLang="en-US"/>
+                <a:t>地段溢价</a:t>
+              </a:r>
+              <a:r>
+                <a:rPr lang="en-US" altLang="zh-CN"/>
+                <a:t>(Location_Score)</a:t>
+              </a:r>
+              <a:endParaRPr lang="en-US" altLang="zh-CN"/>
+            </a:p>
+            <a:p>
+              <a:r>
+                <a:rPr lang="en-US" altLang="zh-CN"/>
+                <a:t> </a:t>
+              </a:r>
+              <a:endParaRPr lang="zh-CN" altLang="en-US"/>
+            </a:p>
+            <a:p>
+              <a:endParaRPr lang="zh-CN" altLang="en-US"/>
+            </a:p>
+          </p:txBody>
+        </p:sp>
+      </p:grpSp>
+      <p:cxnSp>
+        <p:nvCxnSpPr>
+          <p:cNvPr id="15" name="直接连接符 14"/>
+          <p:cNvCxnSpPr/>
+          <p:nvPr>
+            <p:custDataLst>
+              <p:tags r:id="rId7"/>
+            </p:custDataLst>
+          </p:nvPr>
         </p:nvCxnSpPr>
         <p:spPr>
-          <a:xfrm>
-            <a:off x="711201" y="3046730"/>
-            <a:ext cx="10800000" cy="0"/>
+          <a:xfrm flipV="1">
+            <a:off x="711201" y="4578985"/>
+            <a:ext cx="10751820" cy="19050"/>
           </a:xfrm>
           <a:prstGeom prst="line">
             <a:avLst/>
@@ -5824,18 +6683,18 @@
       </p:cxnSp>
       <p:cxnSp>
         <p:nvCxnSpPr>
-          <p:cNvPr id="15" name="直接连接符 14"/>
+          <p:cNvPr id="8" name="直接连接符 7"/>
           <p:cNvCxnSpPr/>
           <p:nvPr>
             <p:custDataLst>
-              <p:tags r:id="rId3"/>
+              <p:tags r:id="rId8"/>
             </p:custDataLst>
           </p:nvPr>
         </p:nvCxnSpPr>
         <p:spPr>
-          <a:xfrm>
-            <a:off x="711201" y="4598035"/>
-            <a:ext cx="10800000" cy="0"/>
+          <a:xfrm flipV="1">
+            <a:off x="838201" y="3062605"/>
+            <a:ext cx="10751820" cy="19050"/>
           </a:xfrm>
           <a:prstGeom prst="line">
             <a:avLst/>
@@ -5872,517 +6731,6 @@
           </a:fontRef>
         </p:style>
       </p:cxnSp>
-      <p:sp>
-        <p:nvSpPr>
-          <p:cNvPr id="17" name="文本框 16"/>
-          <p:cNvSpPr txBox="1"/>
-          <p:nvPr>
-            <p:custDataLst>
-              <p:tags r:id="rId4"/>
-            </p:custDataLst>
-          </p:nvPr>
-        </p:nvSpPr>
-        <p:spPr>
-          <a:xfrm>
-            <a:off x="191135" y="3046730"/>
-            <a:ext cx="1455420" cy="1551305"/>
-          </a:xfrm>
-          <a:prstGeom prst="rect">
-            <a:avLst/>
-          </a:prstGeom>
-          <a:noFill/>
-        </p:spPr>
-        <p:txBody>
-          <a:bodyPr wrap="none" lIns="0" tIns="36195" rIns="0" bIns="0" rtlCol="0" anchor="ctr" anchorCtr="0">
-            <a:noAutofit/>
-          </a:bodyPr>
-          <a:p>
-            <a:pPr lvl="0" algn="l">
-              <a:buClrTx/>
-              <a:buSzTx/>
-              <a:buFontTx/>
-            </a:pPr>
-            <a:r>
-              <a:rPr lang="en-US" altLang="zh-CN" sz="2400" b="1" dirty="0">
-                <a:solidFill>
-                  <a:schemeClr val="accent1"/>
-                </a:solidFill>
-                <a:latin typeface="+mn-ea"/>
-                <a:cs typeface="+mn-ea"/>
-                <a:sym typeface="+mn-ea"/>
-              </a:rPr>
-              <a:t>Location_Score</a:t>
-            </a:r>
-            <a:endParaRPr lang="en-US" altLang="zh-CN" sz="2400" b="1" dirty="0">
-              <a:solidFill>
-                <a:schemeClr val="accent1"/>
-              </a:solidFill>
-              <a:latin typeface="+mn-ea"/>
-              <a:cs typeface="+mn-ea"/>
-              <a:sym typeface="+mn-ea"/>
-            </a:endParaRPr>
-          </a:p>
-        </p:txBody>
-      </p:sp>
-      <p:sp>
-        <p:nvSpPr>
-          <p:cNvPr id="18" name="文本框 17"/>
-          <p:cNvSpPr txBox="1"/>
-          <p:nvPr>
-            <p:custDataLst>
-              <p:tags r:id="rId5"/>
-            </p:custDataLst>
-          </p:nvPr>
-        </p:nvSpPr>
-        <p:spPr>
-          <a:xfrm>
-            <a:off x="241300" y="4598035"/>
-            <a:ext cx="1860550" cy="1551305"/>
-          </a:xfrm>
-          <a:prstGeom prst="rect">
-            <a:avLst/>
-          </a:prstGeom>
-          <a:noFill/>
-        </p:spPr>
-        <p:txBody>
-          <a:bodyPr wrap="none" lIns="0" tIns="36195" rIns="0" bIns="0" rtlCol="0" anchor="ctr" anchorCtr="0">
-            <a:noAutofit/>
-          </a:bodyPr>
-          <a:p>
-            <a:pPr lvl="0" algn="l">
-              <a:buClrTx/>
-              <a:buSzTx/>
-              <a:buFontTx/>
-            </a:pPr>
-            <a:r>
-              <a:rPr lang="zh-CN" altLang="en-US" sz="2400" b="1" dirty="0">
-                <a:solidFill>
-                  <a:schemeClr val="accent1"/>
-                </a:solidFill>
-                <a:latin typeface="+mn-ea"/>
-                <a:cs typeface="+mn-ea"/>
-                <a:sym typeface="+mn-ea"/>
-              </a:rPr>
-              <a:t>全部特征建模</a:t>
-            </a:r>
-            <a:endParaRPr lang="zh-CN" altLang="en-US" sz="2400" b="1" dirty="0">
-              <a:solidFill>
-                <a:schemeClr val="accent1"/>
-              </a:solidFill>
-              <a:latin typeface="+mn-ea"/>
-              <a:cs typeface="+mn-ea"/>
-              <a:sym typeface="+mn-ea"/>
-            </a:endParaRPr>
-          </a:p>
-        </p:txBody>
-      </p:sp>
-      <p:sp>
-        <p:nvSpPr>
-          <p:cNvPr id="20" name="文本框 19"/>
-          <p:cNvSpPr txBox="1"/>
-          <p:nvPr/>
-        </p:nvSpPr>
-        <p:spPr>
-          <a:xfrm>
-            <a:off x="2211705" y="1264285"/>
-            <a:ext cx="9234170" cy="2030095"/>
-          </a:xfrm>
-          <a:prstGeom prst="rect">
-            <a:avLst/>
-          </a:prstGeom>
-          <a:noFill/>
-        </p:spPr>
-        <p:txBody>
-          <a:bodyPr wrap="square" rtlCol="0">
-            <a:spAutoFit/>
-          </a:bodyPr>
-          <a:p>
-            <a:r>
-              <a:rPr lang="zh-CN" altLang="en-US">
-                <a:sym typeface="+mn-ea"/>
-              </a:rPr>
-              <a:t>输入特征：面积</a:t>
-            </a:r>
-            <a:r>
-              <a:rPr lang="en-US" altLang="zh-CN">
-                <a:sym typeface="+mn-ea"/>
-              </a:rPr>
-              <a:t>, </a:t>
-            </a:r>
-            <a:r>
-              <a:rPr lang="zh-CN" altLang="en-US">
-                <a:sym typeface="+mn-ea"/>
-              </a:rPr>
-              <a:t>经度</a:t>
-            </a:r>
-            <a:r>
-              <a:rPr lang="en-US" altLang="zh-CN">
-                <a:sym typeface="+mn-ea"/>
-              </a:rPr>
-              <a:t>(lon), </a:t>
-            </a:r>
-            <a:r>
-              <a:rPr lang="zh-CN" altLang="en-US">
-                <a:sym typeface="+mn-ea"/>
-              </a:rPr>
-              <a:t>纬度</a:t>
-            </a:r>
-            <a:r>
-              <a:rPr lang="en-US" altLang="zh-CN">
-                <a:sym typeface="+mn-ea"/>
-              </a:rPr>
-              <a:t>(lat), </a:t>
-            </a:r>
-            <a:r>
-              <a:rPr lang="zh-CN" altLang="en-US">
-                <a:sym typeface="+mn-ea"/>
-              </a:rPr>
-              <a:t>室</a:t>
-            </a:r>
-            <a:r>
-              <a:rPr lang="en-US" altLang="zh-CN">
-                <a:sym typeface="+mn-ea"/>
-              </a:rPr>
-              <a:t>, </a:t>
-            </a:r>
-            <a:r>
-              <a:rPr lang="zh-CN" altLang="en-US">
-                <a:sym typeface="+mn-ea"/>
-              </a:rPr>
-              <a:t>厅</a:t>
-            </a:r>
-            <a:r>
-              <a:rPr lang="en-US" altLang="zh-CN">
-                <a:sym typeface="+mn-ea"/>
-              </a:rPr>
-              <a:t>, </a:t>
-            </a:r>
-            <a:r>
-              <a:rPr lang="zh-CN" altLang="en-US">
-                <a:sym typeface="+mn-ea"/>
-              </a:rPr>
-              <a:t>卫</a:t>
-            </a:r>
-            <a:r>
-              <a:rPr lang="en-US" altLang="zh-CN">
-                <a:sym typeface="+mn-ea"/>
-              </a:rPr>
-              <a:t>, </a:t>
-            </a:r>
-            <a:r>
-              <a:rPr lang="zh-CN" altLang="en-US">
-                <a:sym typeface="+mn-ea"/>
-              </a:rPr>
-              <a:t>电梯</a:t>
-            </a:r>
-            <a:r>
-              <a:rPr lang="en-US" altLang="zh-CN">
-                <a:sym typeface="+mn-ea"/>
-              </a:rPr>
-              <a:t>, </a:t>
-            </a:r>
-            <a:r>
-              <a:rPr lang="zh-CN" altLang="en-US">
-                <a:sym typeface="+mn-ea"/>
-              </a:rPr>
-              <a:t>车位</a:t>
-            </a:r>
-            <a:r>
-              <a:rPr lang="en-US" altLang="zh-CN">
-                <a:sym typeface="+mn-ea"/>
-              </a:rPr>
-              <a:t>...</a:t>
-            </a:r>
-            <a:endParaRPr lang="en-US" altLang="zh-CN"/>
-          </a:p>
-          <a:p>
-            <a:r>
-              <a:rPr lang="zh-CN" altLang="en-US">
-                <a:sym typeface="+mn-ea"/>
-              </a:rPr>
-              <a:t>预测目标：</a:t>
-            </a:r>
-            <a:r>
-              <a:rPr lang="en-US" altLang="zh-CN">
-                <a:sym typeface="+mn-ea"/>
-              </a:rPr>
-              <a:t>log(Price)</a:t>
-            </a:r>
-            <a:endParaRPr lang="en-US" altLang="zh-CN"/>
-          </a:p>
-          <a:p>
-            <a:r>
-              <a:rPr lang="zh-CN" altLang="en-US">
-                <a:sym typeface="+mn-ea"/>
-              </a:rPr>
-              <a:t>阶段输出：</a:t>
-            </a:r>
-            <a:r>
-              <a:rPr lang="en-US" altLang="zh-CN">
-                <a:sym typeface="+mn-ea"/>
-              </a:rPr>
-              <a:t>location_residual (</a:t>
-            </a:r>
-            <a:r>
-              <a:rPr lang="zh-CN" altLang="en-US">
-                <a:sym typeface="+mn-ea"/>
-              </a:rPr>
-              <a:t>残差</a:t>
-            </a:r>
-            <a:r>
-              <a:rPr lang="en-US" altLang="zh-CN">
-                <a:sym typeface="+mn-ea"/>
-              </a:rPr>
-              <a:t>)</a:t>
-            </a:r>
-            <a:endParaRPr lang="zh-CN" altLang="en-US"/>
-          </a:p>
-          <a:p>
-            <a:pPr lvl="1"/>
-            <a:r>
-              <a:rPr lang="zh-CN" altLang="en-US" b="1">
-                <a:sym typeface="+mn-ea"/>
-              </a:rPr>
-              <a:t>残差</a:t>
-            </a:r>
-            <a:r>
-              <a:rPr lang="en-US" altLang="zh-CN" b="1">
-                <a:sym typeface="+mn-ea"/>
-              </a:rPr>
-              <a:t> = </a:t>
-            </a:r>
-            <a:r>
-              <a:rPr lang="zh-CN" altLang="en-US" b="1">
-                <a:sym typeface="+mn-ea"/>
-              </a:rPr>
-              <a:t>真实房价</a:t>
-            </a:r>
-            <a:r>
-              <a:rPr lang="en-US" altLang="zh-CN" b="1">
-                <a:sym typeface="+mn-ea"/>
-              </a:rPr>
-              <a:t> - Stage1</a:t>
-            </a:r>
-            <a:r>
-              <a:rPr lang="zh-CN" altLang="en-US" b="1">
-                <a:sym typeface="+mn-ea"/>
-              </a:rPr>
-              <a:t>模型预测的房价</a:t>
-            </a:r>
-            <a:endParaRPr lang="zh-CN" altLang="en-US"/>
-          </a:p>
-          <a:p>
-            <a:pPr lvl="1"/>
-            <a:r>
-              <a:rPr lang="zh-CN" altLang="en-US">
-                <a:sym typeface="+mn-ea"/>
-              </a:rPr>
-              <a:t>如果残差</a:t>
-            </a:r>
-            <a:r>
-              <a:rPr lang="en-US" altLang="zh-CN">
-                <a:sym typeface="+mn-ea"/>
-              </a:rPr>
-              <a:t>&gt;0</a:t>
-            </a:r>
-            <a:r>
-              <a:rPr lang="zh-CN" altLang="en-US">
-                <a:sym typeface="+mn-ea"/>
-              </a:rPr>
-              <a:t>，说明房子比单纯按面积</a:t>
-            </a:r>
-            <a:r>
-              <a:rPr lang="en-US" altLang="zh-CN">
-                <a:sym typeface="+mn-ea"/>
-              </a:rPr>
-              <a:t>/</a:t>
-            </a:r>
-            <a:r>
-              <a:rPr lang="zh-CN" altLang="en-US">
-                <a:sym typeface="+mn-ea"/>
-              </a:rPr>
-              <a:t>户型算出来的价格要贵，地段好；如果</a:t>
-            </a:r>
-            <a:r>
-              <a:rPr lang="en-US" altLang="zh-CN">
-                <a:sym typeface="+mn-ea"/>
-              </a:rPr>
-              <a:t>&lt;0</a:t>
-            </a:r>
-            <a:r>
-              <a:rPr lang="zh-CN" altLang="en-US">
-                <a:sym typeface="+mn-ea"/>
-              </a:rPr>
-              <a:t>，说明地段差</a:t>
-            </a:r>
-            <a:endParaRPr lang="zh-CN" altLang="en-US"/>
-          </a:p>
-          <a:p>
-            <a:endParaRPr lang="zh-CN" altLang="en-US"/>
-          </a:p>
-        </p:txBody>
-      </p:sp>
-      <p:sp>
-        <p:nvSpPr>
-          <p:cNvPr id="25" name="文本框 24"/>
-          <p:cNvSpPr txBox="1"/>
-          <p:nvPr/>
-        </p:nvSpPr>
-        <p:spPr>
-          <a:xfrm>
-            <a:off x="2387600" y="3294380"/>
-            <a:ext cx="8882380" cy="1198880"/>
-          </a:xfrm>
-          <a:prstGeom prst="rect">
-            <a:avLst/>
-          </a:prstGeom>
-          <a:noFill/>
-        </p:spPr>
-        <p:txBody>
-          <a:bodyPr wrap="square" rtlCol="0">
-            <a:spAutoFit/>
-          </a:bodyPr>
-          <a:p>
-            <a:r>
-              <a:rPr lang="zh-CN" altLang="en-US"/>
-              <a:t>依次计算板块、区县、</a:t>
-            </a:r>
-            <a:r>
-              <a:rPr lang="zh-CN" altLang="en-US"/>
-              <a:t>城市级别的平均残差</a:t>
-            </a:r>
-            <a:endParaRPr lang="zh-CN" altLang="en-US"/>
-          </a:p>
-          <a:p>
-            <a:r>
-              <a:rPr lang="zh-CN" altLang="en-US"/>
-              <a:t>测试集里</a:t>
-            </a:r>
-            <a:r>
-              <a:rPr lang="zh-CN" altLang="en-US"/>
-              <a:t>的房子所在</a:t>
-            </a:r>
-            <a:r>
-              <a:rPr lang="en-US" altLang="zh-CN"/>
-              <a:t>“</a:t>
-            </a:r>
-            <a:r>
-              <a:rPr lang="zh-CN" altLang="en-US"/>
-              <a:t>板块</a:t>
-            </a:r>
-            <a:r>
-              <a:rPr lang="en-US" altLang="zh-CN"/>
-              <a:t>”</a:t>
-            </a:r>
-            <a:r>
-              <a:rPr lang="zh-CN" altLang="en-US"/>
-              <a:t>在训练集里出现过，就用该板块的平均残差作为得分。</a:t>
-            </a:r>
-            <a:endParaRPr lang="zh-CN" altLang="en-US"/>
-          </a:p>
-          <a:p>
-            <a:r>
-              <a:rPr lang="zh-CN" altLang="en-US"/>
-              <a:t>如果是新板块，就退而求其次用</a:t>
-            </a:r>
-            <a:r>
-              <a:rPr lang="en-US" altLang="zh-CN"/>
-              <a:t>“</a:t>
-            </a:r>
-            <a:r>
-              <a:rPr lang="zh-CN" altLang="en-US"/>
-              <a:t>区县</a:t>
-            </a:r>
-            <a:r>
-              <a:rPr lang="en-US" altLang="zh-CN"/>
-              <a:t>”</a:t>
-            </a:r>
-            <a:r>
-              <a:rPr lang="zh-CN" altLang="en-US"/>
-              <a:t>的均值，以此类推。</a:t>
-            </a:r>
-            <a:endParaRPr lang="zh-CN" altLang="en-US"/>
-          </a:p>
-          <a:p>
-            <a:r>
-              <a:rPr lang="en-US" altLang="zh-CN"/>
-              <a:t>Location_Score</a:t>
-            </a:r>
-            <a:r>
-              <a:rPr lang="zh-CN" altLang="en-US"/>
-              <a:t>，代表该地段的平均溢价</a:t>
-            </a:r>
-            <a:endParaRPr lang="zh-CN" altLang="en-US"/>
-          </a:p>
-        </p:txBody>
-      </p:sp>
-      <p:sp>
-        <p:nvSpPr>
-          <p:cNvPr id="28" name="文本框 27"/>
-          <p:cNvSpPr txBox="1"/>
-          <p:nvPr/>
-        </p:nvSpPr>
-        <p:spPr>
-          <a:xfrm>
-            <a:off x="2211705" y="5158740"/>
-            <a:ext cx="9631680" cy="922020"/>
-          </a:xfrm>
-          <a:prstGeom prst="rect">
-            <a:avLst/>
-          </a:prstGeom>
-          <a:noFill/>
-        </p:spPr>
-        <p:txBody>
-          <a:bodyPr wrap="square" rtlCol="0">
-            <a:spAutoFit/>
-          </a:bodyPr>
-          <a:p>
-            <a:r>
-              <a:rPr lang="zh-CN" altLang="en-US"/>
-              <a:t>输入特征：房子的物理属性（面积、</a:t>
-            </a:r>
-            <a:r>
-              <a:rPr lang="en-US" altLang="zh-CN"/>
-              <a:t>lon...</a:t>
-            </a:r>
-            <a:r>
-              <a:rPr lang="zh-CN" altLang="en-US"/>
-              <a:t>）</a:t>
-            </a:r>
-            <a:r>
-              <a:rPr lang="en-US" altLang="zh-CN"/>
-              <a:t>+ </a:t>
-            </a:r>
-            <a:r>
-              <a:rPr lang="zh-CN" altLang="en-US"/>
-              <a:t>城市、区县、板块</a:t>
-            </a:r>
-            <a:r>
-              <a:rPr lang="en-US" altLang="zh-CN"/>
-              <a:t> + </a:t>
-            </a:r>
-            <a:r>
-              <a:rPr lang="zh-CN" altLang="en-US"/>
-              <a:t>地段溢价</a:t>
-            </a:r>
-            <a:r>
-              <a:rPr lang="en-US" altLang="zh-CN"/>
-              <a:t>(Location_Score)</a:t>
-            </a:r>
-            <a:endParaRPr lang="en-US" altLang="zh-CN"/>
-          </a:p>
-          <a:p>
-            <a:r>
-              <a:rPr lang="en-US" altLang="zh-CN"/>
-              <a:t> </a:t>
-            </a:r>
-            <a:endParaRPr lang="zh-CN" altLang="en-US"/>
-          </a:p>
-          <a:p>
-            <a:endParaRPr lang="zh-CN" altLang="en-US"/>
-          </a:p>
-        </p:txBody>
-      </p:sp>
     </p:spTree>
   </p:cSld>
   <p:clrMapOvr>
@@ -6390,12 +6738,12 @@
   </p:clrMapOvr>
   <mc:AlternateContent xmlns:mc="http://schemas.openxmlformats.org/markup-compatibility/2006">
     <mc:Choice xmlns:p14="http://schemas.microsoft.com/office/powerpoint/2010/main" Requires="p14">
-      <p:transition spd="med" p14:dur="699">
+      <p:transition spd="med" p14:dur="699" advTm="5500">
         <p:fade/>
       </p:transition>
     </mc:Choice>
     <mc:Fallback>
-      <p:transition spd="med">
+      <p:transition spd="med" advTm="5500">
         <p:fade/>
       </p:transition>
     </mc:Fallback>
@@ -6406,454 +6754,715 @@
 <file path=ppt/slides/slide4.xml><?xml version="1.0" encoding="utf-8"?>
 <p:sld xmlns:a="http://schemas.openxmlformats.org/drawingml/2006/main" xmlns:r="http://schemas.openxmlformats.org/officeDocument/2006/relationships" xmlns:p="http://schemas.openxmlformats.org/presentationml/2006/main">
   <p:cSld>
-    <p:bg>
-      <p:bgPr>
-        <a:solidFill>
-          <a:schemeClr val="bg1"/>
-        </a:solidFill>
-        <a:effectLst/>
-      </p:bgPr>
-    </p:bg>
     <p:spTree>
       <p:nvGrpSpPr>
         <p:cNvPr id="1" name=""/>
         <p:cNvGrpSpPr/>
         <p:nvPr/>
       </p:nvGrpSpPr>
-      <p:grpSpPr>
-        <a:xfrm>
-          <a:off x="0" y="0"/>
-          <a:ext cx="0" cy="0"/>
-          <a:chOff x="0" y="0"/>
-          <a:chExt cx="0" cy="0"/>
-        </a:xfrm>
-      </p:grpSpPr>
-      <p:sp>
-        <p:nvSpPr>
-          <p:cNvPr id="41" name="文本框 40"/>
-          <p:cNvSpPr txBox="1"/>
+      <p:grpSpPr/>
+      <p:grpSp>
+        <p:nvGrpSpPr>
+          <p:cNvPr id="9" name="组合 8"/>
+          <p:cNvGrpSpPr/>
           <p:nvPr/>
-        </p:nvSpPr>
+        </p:nvGrpSpPr>
+        <p:grpSpPr>
+          <a:xfrm>
+            <a:off x="387350" y="311150"/>
+            <a:ext cx="11624945" cy="3150235"/>
+            <a:chOff x="610" y="490"/>
+            <a:chExt cx="18307" cy="4961"/>
+          </a:xfrm>
+        </p:grpSpPr>
+        <p:sp>
+          <p:nvSpPr>
+            <p:cNvPr id="4" name="文本框 3"/>
+            <p:cNvSpPr txBox="1"/>
+            <p:nvPr/>
+          </p:nvSpPr>
+          <p:spPr>
+            <a:xfrm>
+              <a:off x="659" y="1312"/>
+              <a:ext cx="18259" cy="1695"/>
+            </a:xfrm>
+            <a:prstGeom prst="rect">
+              <a:avLst/>
+            </a:prstGeom>
+            <a:noFill/>
+          </p:spPr>
+          <p:txBody>
+            <a:bodyPr wrap="square" rtlCol="0">
+              <a:spAutoFit/>
+            </a:bodyPr>
+            <a:p>
+              <a:r>
+                <a:rPr lang="en-US" altLang="zh-CN" sz="1600"/>
+                <a:t>1</a:t>
+              </a:r>
+              <a:r>
+                <a:rPr lang="zh-CN" altLang="en-US" sz="1600"/>
+                <a:t>、利用</a:t>
+              </a:r>
+              <a:r>
+                <a:rPr lang="en-US" altLang="zh-CN" sz="1600" b="1"/>
+                <a:t>Kmeans+</a:t>
+              </a:r>
+              <a:r>
+                <a:rPr lang="zh-CN" altLang="en-US" sz="1600" b="1"/>
+                <a:t>目标编码</a:t>
+              </a:r>
+              <a:r>
+                <a:rPr lang="zh-CN" altLang="en-US" sz="1600"/>
+                <a:t>：</a:t>
+              </a:r>
+              <a:r>
+                <a:rPr lang="en-US" altLang="zh-CN" sz="1600"/>
+                <a:t>kaggle76.8</a:t>
+              </a:r>
+              <a:endParaRPr lang="zh-CN" altLang="en-US" sz="1600"/>
+            </a:p>
+            <a:p>
+              <a:pPr indent="457200"/>
+              <a:r>
+                <a:rPr lang="zh-CN" altLang="en-US" sz="1600"/>
+                <a:t>输入原始地理信息（城市、区域、板块、经纬度），将地理编号转为蕴含价格信息的数值特征。</a:t>
+              </a:r>
+              <a:endParaRPr lang="zh-CN" altLang="en-US" sz="1600"/>
+            </a:p>
+            <a:p>
+              <a:pPr indent="457200"/>
+              <a:r>
+                <a:rPr lang="zh-CN" altLang="en-US" sz="1600" b="1"/>
+                <a:t>每个城市内部根据</a:t>
+              </a:r>
+              <a:r>
+                <a:rPr lang="en-US" altLang="zh-CN" sz="1600" b="1"/>
+                <a:t>lon,lat</a:t>
+              </a:r>
+              <a:r>
+                <a:rPr lang="zh-CN" altLang="en-US" sz="1600" b="1"/>
+                <a:t>进行</a:t>
+              </a:r>
+              <a:r>
+                <a:rPr lang="en-US" altLang="zh-CN" sz="1600" b="1"/>
+                <a:t>KMeans</a:t>
+              </a:r>
+              <a:r>
+                <a:rPr lang="zh-CN" altLang="en-US" sz="1600" b="1"/>
+                <a:t>聚类</a:t>
+              </a:r>
+              <a:r>
+                <a:rPr lang="zh-CN" altLang="en-US" sz="1600"/>
+                <a:t>；然后利用训练集的</a:t>
+              </a:r>
+              <a:r>
+                <a:rPr lang="en-US" altLang="zh-CN" sz="1600"/>
+                <a:t>log(</a:t>
+              </a:r>
+              <a:r>
+                <a:rPr lang="zh-CN" altLang="en-US" sz="1600"/>
+                <a:t>房价</a:t>
+              </a:r>
+              <a:r>
+                <a:rPr lang="en-US" altLang="zh-CN" sz="1600"/>
+                <a:t>)</a:t>
+              </a:r>
+              <a:r>
+                <a:rPr lang="zh-CN" altLang="en-US" sz="1600"/>
+                <a:t>，</a:t>
+              </a:r>
+              <a:r>
+                <a:rPr lang="en-US" altLang="zh-CN" sz="1600"/>
+                <a:t>K-Fold</a:t>
+              </a:r>
+              <a:r>
+                <a:rPr lang="zh-CN" altLang="en-US" sz="1600"/>
+                <a:t>交叉验证，从粗到细计算出四个层级的地理区域均价，包括：</a:t>
+              </a:r>
+              <a:r>
+                <a:rPr lang="en-US" altLang="zh-CN" sz="1600"/>
+                <a:t>City_TE</a:t>
+              </a:r>
+              <a:r>
+                <a:rPr lang="zh-CN" altLang="en-US" sz="1600"/>
+                <a:t>（城市均价）、</a:t>
+              </a:r>
+              <a:r>
+                <a:rPr lang="en-US" altLang="zh-CN" sz="1600"/>
+                <a:t>Region_TE</a:t>
+              </a:r>
+              <a:r>
+                <a:rPr lang="zh-CN" altLang="en-US" sz="1600"/>
+                <a:t>（区域均价）、</a:t>
+              </a:r>
+              <a:r>
+                <a:rPr lang="en-US" altLang="zh-CN" sz="1600"/>
+                <a:t>Block_TE</a:t>
+              </a:r>
+              <a:r>
+                <a:rPr lang="zh-CN" altLang="en-US" sz="1600"/>
+                <a:t>（板块均价）以及</a:t>
+              </a:r>
+              <a:r>
+                <a:rPr lang="en-US" altLang="zh-CN" sz="1600"/>
+                <a:t>Cluster_TE</a:t>
+              </a:r>
+              <a:r>
+                <a:rPr lang="zh-CN" altLang="en-US" sz="1600"/>
+                <a:t>（地理簇均价）</a:t>
+              </a:r>
+              <a:endParaRPr lang="zh-CN" altLang="en-US" sz="1600"/>
+            </a:p>
+          </p:txBody>
+        </p:sp>
+        <p:sp>
+          <p:nvSpPr>
+            <p:cNvPr id="5" name="文本框 4"/>
+            <p:cNvSpPr txBox="1"/>
+            <p:nvPr/>
+          </p:nvSpPr>
+          <p:spPr>
+            <a:xfrm>
+              <a:off x="610" y="2862"/>
+              <a:ext cx="18232" cy="2082"/>
+            </a:xfrm>
+            <a:prstGeom prst="rect">
+              <a:avLst/>
+            </a:prstGeom>
+            <a:noFill/>
+          </p:spPr>
+          <p:txBody>
+            <a:bodyPr wrap="square" rtlCol="0">
+              <a:spAutoFit/>
+            </a:bodyPr>
+            <a:p>
+              <a:r>
+                <a:rPr lang="en-US" altLang="zh-CN" sz="1600"/>
+                <a:t>2</a:t>
+              </a:r>
+              <a:r>
+                <a:rPr lang="zh-CN" altLang="en-US" sz="1600"/>
+                <a:t>、独热编码：</a:t>
+              </a:r>
+              <a:endParaRPr lang="zh-CN" altLang="en-US" sz="1600"/>
+            </a:p>
+            <a:p>
+              <a:pPr indent="457200"/>
+              <a:r>
+                <a:rPr lang="zh-CN" altLang="en-US" sz="1600"/>
+                <a:t>反复尝试，首先尝试将地理层次变量</a:t>
+              </a:r>
+              <a:r>
+                <a:rPr lang="en-US" altLang="zh-CN" sz="1600"/>
+                <a:t>0/1</a:t>
+              </a:r>
+              <a:r>
+                <a:rPr lang="zh-CN" altLang="en-US" sz="1600"/>
+                <a:t>编码，进行预测</a:t>
+              </a:r>
+              <a:r>
+                <a:rPr lang="en-US" altLang="zh-CN" sz="1600"/>
+                <a:t>——&gt;</a:t>
+              </a:r>
+              <a:r>
+                <a:rPr lang="zh-CN" altLang="en-US" sz="1600">
+                  <a:highlight>
+                    <a:srgbClr val="FFFF00"/>
+                  </a:highlight>
+                </a:rPr>
+                <a:t>添加更多特征</a:t>
+              </a:r>
+              <a:r>
+                <a:rPr lang="en-US" altLang="zh-CN" sz="1600">
+                  <a:highlight>
+                    <a:srgbClr val="FFFF00"/>
+                  </a:highlight>
+                </a:rPr>
+                <a:t>“</a:t>
+              </a:r>
+              <a:r>
+                <a:rPr lang="zh-CN" altLang="en-US" sz="1600">
+                  <a:highlight>
+                    <a:srgbClr val="FFFF00"/>
+                  </a:highlight>
+                </a:rPr>
+                <a:t>绿化率</a:t>
+              </a:r>
+              <a:r>
+                <a:rPr lang="en-US" altLang="zh-CN" sz="1600">
+                  <a:highlight>
+                    <a:srgbClr val="FFFF00"/>
+                  </a:highlight>
+                </a:rPr>
+                <a:t>”</a:t>
+              </a:r>
+              <a:r>
+                <a:rPr lang="zh-CN" altLang="en-US" sz="1600">
+                  <a:highlight>
+                    <a:srgbClr val="FFFF00"/>
+                  </a:highlight>
+                </a:rPr>
+                <a:t>、</a:t>
+              </a:r>
+              <a:r>
+                <a:rPr lang="en-US" altLang="zh-CN" sz="1600">
+                  <a:highlight>
+                    <a:srgbClr val="FFFF00"/>
+                  </a:highlight>
+                </a:rPr>
+                <a:t>“</a:t>
+              </a:r>
+              <a:r>
+                <a:rPr lang="zh-CN" altLang="en-US" sz="1600">
+                  <a:highlight>
+                    <a:srgbClr val="FFFF00"/>
+                  </a:highlight>
+                </a:rPr>
+                <a:t>容积率</a:t>
+              </a:r>
+              <a:r>
+                <a:rPr lang="en-US" altLang="zh-CN" sz="1600">
+                  <a:highlight>
+                    <a:srgbClr val="FFFF00"/>
+                  </a:highlight>
+                </a:rPr>
+                <a:t>”</a:t>
+              </a:r>
+              <a:r>
+                <a:rPr lang="zh-CN" altLang="en-US" sz="1600">
+                  <a:highlight>
+                    <a:srgbClr val="FFFF00"/>
+                  </a:highlight>
+                </a:rPr>
+                <a:t>，</a:t>
+              </a:r>
+              <a:r>
+                <a:rPr lang="en-US" altLang="zh-CN" sz="1600">
+                  <a:highlight>
+                    <a:srgbClr val="FFFF00"/>
+                  </a:highlight>
+                </a:rPr>
+                <a:t>“</a:t>
+              </a:r>
+              <a:r>
+                <a:rPr lang="zh-CN" altLang="en-US" sz="1600">
+                  <a:highlight>
+                    <a:srgbClr val="FFFF00"/>
+                  </a:highlight>
+                </a:rPr>
+                <a:t>停车费</a:t>
+              </a:r>
+              <a:r>
+                <a:rPr lang="en-US" altLang="zh-CN" sz="1600">
+                  <a:highlight>
+                    <a:srgbClr val="FFFF00"/>
+                  </a:highlight>
+                </a:rPr>
+                <a:t>”...</a:t>
+              </a:r>
+              <a:r>
+                <a:rPr lang="zh-CN" altLang="en-US" sz="1600">
+                  <a:highlight>
+                    <a:srgbClr val="FFFF00"/>
+                  </a:highlight>
+                </a:rPr>
+                <a:t>再次预测</a:t>
+              </a:r>
+              <a:r>
+                <a:rPr lang="zh-CN" altLang="en-US" sz="1600"/>
+                <a:t>，</a:t>
+              </a:r>
+              <a:r>
+                <a:rPr lang="en-US" altLang="zh-CN" sz="1600"/>
+                <a:t>optuna</a:t>
+              </a:r>
+              <a:r>
+                <a:rPr lang="zh-CN" altLang="en-US" sz="1600"/>
+                <a:t>调参</a:t>
+              </a:r>
+              <a:r>
+                <a:rPr lang="en-US" altLang="zh-CN" sz="1600"/>
+                <a:t>——&gt;</a:t>
+              </a:r>
+              <a:r>
+                <a:rPr lang="zh-CN" altLang="en-US" sz="1600"/>
+                <a:t>几乎将所有缺失值在一半以下的特征加入，并取消将区域、板块等编码</a:t>
+              </a:r>
+              <a:r>
+                <a:rPr lang="en-US" altLang="zh-CN" sz="1600"/>
+                <a:t>——&gt;</a:t>
+              </a:r>
+              <a:r>
+                <a:rPr lang="zh-CN" altLang="en-US" sz="1600"/>
+                <a:t>加入</a:t>
+              </a:r>
+              <a:r>
+                <a:rPr lang="en-US" altLang="zh-CN" sz="1600"/>
+                <a:t>Kmeans</a:t>
+              </a:r>
+              <a:r>
+                <a:rPr lang="zh-CN" altLang="en-US" sz="1600"/>
+                <a:t>目标编码，同样不对地理特征</a:t>
+              </a:r>
+              <a:r>
+                <a:rPr lang="en-US" altLang="zh-CN" sz="1600"/>
+                <a:t>0/1</a:t>
+              </a:r>
+              <a:r>
+                <a:rPr lang="zh-CN" altLang="en-US" sz="1600"/>
+                <a:t>编码</a:t>
+              </a:r>
+              <a:endParaRPr lang="zh-CN" altLang="en-US" sz="1600"/>
+            </a:p>
+            <a:p>
+              <a:pPr indent="457200"/>
+              <a:r>
+                <a:rPr lang="zh-CN" altLang="en-US" sz="1600"/>
+                <a:t>以上每次改变，均尝试</a:t>
+              </a:r>
+              <a:r>
+                <a:rPr lang="en-US" altLang="zh-CN" sz="1600"/>
+                <a:t>XGBoost/ANN/CatBoost</a:t>
+              </a:r>
+              <a:r>
+                <a:rPr lang="zh-CN" altLang="en-US" sz="1600"/>
+                <a:t>模型，但是效果并不显著。</a:t>
+              </a:r>
+              <a:r>
+                <a:rPr lang="zh-CN" altLang="en-US" sz="1600">
+                  <a:sym typeface="+mn-ea"/>
+                </a:rPr>
+                <a:t>如地理区位编码，则利用</a:t>
+              </a:r>
+              <a:r>
+                <a:rPr lang="en-US" altLang="zh-CN" sz="1600">
+                  <a:sym typeface="+mn-ea"/>
+                </a:rPr>
+                <a:t>lon,lat</a:t>
+              </a:r>
+              <a:r>
+                <a:rPr lang="zh-CN" altLang="en-US" sz="1600">
+                  <a:sym typeface="+mn-ea"/>
+                </a:rPr>
+                <a:t>来</a:t>
+              </a:r>
+              <a:r>
+                <a:rPr lang="en-US" altLang="zh-CN" sz="1600">
+                  <a:sym typeface="+mn-ea"/>
+                </a:rPr>
+                <a:t>KNN</a:t>
+              </a:r>
+              <a:endParaRPr lang="zh-CN" altLang="en-US" sz="1600"/>
+            </a:p>
+          </p:txBody>
+        </p:sp>
+        <p:sp>
+          <p:nvSpPr>
+            <p:cNvPr id="13" name="文本框 12"/>
+            <p:cNvSpPr txBox="1"/>
+            <p:nvPr/>
+          </p:nvSpPr>
+          <p:spPr>
+            <a:xfrm>
+              <a:off x="618" y="4921"/>
+              <a:ext cx="9567" cy="531"/>
+            </a:xfrm>
+            <a:prstGeom prst="rect">
+              <a:avLst/>
+            </a:prstGeom>
+            <a:noFill/>
+          </p:spPr>
+          <p:txBody>
+            <a:bodyPr wrap="square" rtlCol="0">
+              <a:spAutoFit/>
+            </a:bodyPr>
+            <a:p>
+              <a:r>
+                <a:rPr lang="en-US" altLang="zh-CN" sz="1600"/>
+                <a:t>3</a:t>
+              </a:r>
+              <a:r>
+                <a:rPr lang="zh-CN" altLang="en-US" sz="1600"/>
+                <a:t>、利用树模型，将</a:t>
+              </a:r>
+              <a:r>
+                <a:rPr lang="en-US" altLang="zh-CN" sz="1600"/>
+                <a:t>RF</a:t>
+              </a:r>
+              <a:r>
+                <a:rPr lang="zh-CN" altLang="en-US" sz="1600"/>
+                <a:t>结果和</a:t>
+              </a:r>
+              <a:r>
+                <a:rPr lang="en-US" altLang="zh-CN" sz="1600"/>
+                <a:t>OLS</a:t>
+              </a:r>
+              <a:r>
+                <a:rPr lang="zh-CN" altLang="en-US" sz="1600"/>
+                <a:t>叠加，进行预测</a:t>
+              </a:r>
+              <a:endParaRPr lang="zh-CN" altLang="en-US" sz="1600"/>
+            </a:p>
+          </p:txBody>
+        </p:sp>
+        <p:sp>
+          <p:nvSpPr>
+            <p:cNvPr id="2" name="文本框 1"/>
+            <p:cNvSpPr txBox="1"/>
+            <p:nvPr/>
+          </p:nvSpPr>
+          <p:spPr>
+            <a:xfrm>
+              <a:off x="6849" y="490"/>
+              <a:ext cx="5503" cy="822"/>
+            </a:xfrm>
+            <a:prstGeom prst="rect">
+              <a:avLst/>
+            </a:prstGeom>
+            <a:noFill/>
+          </p:spPr>
+          <p:txBody>
+            <a:bodyPr wrap="square" rtlCol="0">
+              <a:spAutoFit/>
+            </a:bodyPr>
+            <a:lstStyle/>
+            <a:p>
+              <a:pPr algn="ctr">
+                <a:buClrTx/>
+                <a:buSzTx/>
+                <a:buFontTx/>
+              </a:pPr>
+              <a:r>
+                <a:rPr lang="zh-CN" altLang="en-US" sz="2800" dirty="0">
+                  <a:latin typeface="Times New Roman" panose="02020603050405020304" charset="0"/>
+                  <a:ea typeface="宋体" panose="02010600030101010101" pitchFamily="2" charset="-122"/>
+                </a:rPr>
+                <a:t>个人创新点：</a:t>
+              </a:r>
+              <a:endParaRPr lang="zh-CN" altLang="en-US" sz="2800" dirty="0">
+                <a:latin typeface="Times New Roman" panose="02020603050405020304" charset="0"/>
+                <a:ea typeface="宋体" panose="02010600030101010101" pitchFamily="2" charset="-122"/>
+              </a:endParaRPr>
+            </a:p>
+          </p:txBody>
+        </p:sp>
+      </p:grpSp>
+      <p:grpSp>
+        <p:nvGrpSpPr>
+          <p:cNvPr id="18" name="组合 17"/>
+          <p:cNvGrpSpPr/>
+          <p:nvPr/>
+        </p:nvGrpSpPr>
+        <p:grpSpPr>
+          <a:xfrm>
+            <a:off x="393065" y="3541395"/>
+            <a:ext cx="11619230" cy="2999105"/>
+            <a:chOff x="619" y="5577"/>
+            <a:chExt cx="18298" cy="4723"/>
+          </a:xfrm>
+        </p:grpSpPr>
+        <p:sp>
+          <p:nvSpPr>
+            <p:cNvPr id="19" name="文本框 18"/>
+            <p:cNvSpPr txBox="1"/>
+            <p:nvPr/>
+          </p:nvSpPr>
+          <p:spPr>
+            <a:xfrm>
+              <a:off x="10331" y="7104"/>
+              <a:ext cx="8587" cy="3197"/>
+            </a:xfrm>
+            <a:prstGeom prst="rect">
+              <a:avLst/>
+            </a:prstGeom>
+            <a:noFill/>
+          </p:spPr>
+          <p:txBody>
+            <a:bodyPr wrap="square" rtlCol="0">
+              <a:spAutoFit/>
+            </a:bodyPr>
+            <a:p>
+              <a:pPr marL="285750" indent="-285750">
+                <a:buFont typeface="Arial" panose="020B0604020202020204" pitchFamily="34" charset="0"/>
+                <a:buChar char="•"/>
+              </a:pPr>
+              <a:r>
+                <a:rPr lang="en-US" altLang="zh-CN" b="1"/>
+                <a:t>CTGAN</a:t>
+              </a:r>
+              <a:r>
+                <a:rPr lang="zh-CN" altLang="en-US" b="1"/>
+                <a:t>模型作</a:t>
+              </a:r>
+              <a:r>
+                <a:rPr lang="en-US" altLang="zh-CN" b="1"/>
+                <a:t>“</a:t>
+              </a:r>
+              <a:r>
+                <a:rPr lang="zh-CN" altLang="en-US" b="1"/>
+                <a:t>生成器</a:t>
+              </a:r>
+              <a:r>
+                <a:rPr lang="en-US" altLang="zh-CN" b="1"/>
+                <a:t>”</a:t>
+              </a:r>
+              <a:r>
+                <a:rPr lang="zh-CN" altLang="en-US"/>
+                <a:t>，与</a:t>
+              </a:r>
+              <a:r>
+                <a:rPr lang="en-US" altLang="zh-CN"/>
+                <a:t>“</a:t>
+              </a:r>
+              <a:r>
+                <a:rPr lang="zh-CN" altLang="en-US" b="1"/>
+                <a:t>判别器</a:t>
+              </a:r>
+              <a:r>
+                <a:rPr lang="en-US" altLang="zh-CN" b="1"/>
+                <a:t>”</a:t>
+              </a:r>
+              <a:r>
+                <a:rPr lang="zh-CN" altLang="en-US" b="1"/>
+                <a:t>对抗性训练</a:t>
+              </a:r>
+              <a:r>
+                <a:rPr lang="zh-CN" altLang="en-US"/>
+                <a:t>：生成器试图生成假数据，判别器努力区分真实数据与生成数据。经多轮博弈，生成器逐渐掌握数据的分布和列间关联（</a:t>
+              </a:r>
+              <a:r>
+                <a:rPr lang="en-US" altLang="zh-CN"/>
+                <a:t>eg:“</a:t>
+              </a:r>
+              <a:r>
+                <a:rPr lang="zh-CN" altLang="en-US"/>
+                <a:t>面积</a:t>
+              </a:r>
+              <a:r>
+                <a:rPr lang="en-US" altLang="zh-CN"/>
+                <a:t>”</a:t>
+              </a:r>
+              <a:r>
+                <a:rPr lang="zh-CN" altLang="en-US"/>
+                <a:t>与</a:t>
+              </a:r>
+              <a:r>
+                <a:rPr lang="en-US" altLang="zh-CN"/>
+                <a:t>“</a:t>
+              </a:r>
+              <a:r>
+                <a:rPr lang="zh-CN" altLang="en-US"/>
+                <a:t>物业费</a:t>
+              </a:r>
+              <a:r>
+                <a:rPr lang="en-US" altLang="zh-CN"/>
+                <a:t>”</a:t>
+              </a:r>
+              <a:r>
+                <a:rPr lang="zh-CN" altLang="en-US"/>
+                <a:t>的正相关性）</a:t>
+              </a:r>
+              <a:endParaRPr lang="zh-CN" altLang="en-US"/>
+            </a:p>
+            <a:p>
+              <a:pPr marL="285750" indent="-285750">
+                <a:buFont typeface="Arial" panose="020B0604020202020204" pitchFamily="34" charset="0"/>
+                <a:buChar char="•"/>
+              </a:pPr>
+              <a:r>
+                <a:rPr lang="zh-CN" altLang="en-US"/>
+                <a:t>训练完成后，模型采样生成数据。数字还原为带单位的字符串，生成不重复的新</a:t>
+              </a:r>
+              <a:r>
+                <a:rPr lang="en-US" altLang="zh-CN"/>
+                <a:t>ID</a:t>
+              </a:r>
+              <a:r>
+                <a:rPr lang="zh-CN" altLang="en-US"/>
+                <a:t>。</a:t>
+              </a:r>
+              <a:endParaRPr lang="zh-CN" altLang="en-US"/>
+            </a:p>
+          </p:txBody>
+        </p:sp>
+        <p:sp>
+          <p:nvSpPr>
+            <p:cNvPr id="20" name="文本框 19"/>
+            <p:cNvSpPr txBox="1"/>
+            <p:nvPr/>
+          </p:nvSpPr>
+          <p:spPr>
+            <a:xfrm>
+              <a:off x="619" y="5577"/>
+              <a:ext cx="8779" cy="580"/>
+            </a:xfrm>
+            <a:prstGeom prst="rect">
+              <a:avLst/>
+            </a:prstGeom>
+            <a:noFill/>
+          </p:spPr>
+          <p:txBody>
+            <a:bodyPr wrap="square" rtlCol="0">
+              <a:spAutoFit/>
+            </a:bodyPr>
+            <a:p>
+              <a:r>
+                <a:rPr lang="en-US" altLang="zh-CN" b="1"/>
+                <a:t>4</a:t>
+              </a:r>
+              <a:r>
+                <a:rPr lang="zh-CN" altLang="en-US" b="1"/>
+                <a:t>、探索</a:t>
+              </a:r>
+              <a:r>
+                <a:rPr lang="zh-CN" altLang="en-US"/>
+                <a:t>：尝试利用</a:t>
+              </a:r>
+              <a:r>
+                <a:rPr lang="zh-CN" altLang="en-US" b="1"/>
+                <a:t>对抗神经网络</a:t>
+              </a:r>
+              <a:r>
+                <a:rPr lang="zh-CN" altLang="en-US"/>
+                <a:t>生成</a:t>
+              </a:r>
+              <a:r>
+                <a:rPr lang="zh-CN" altLang="en-US"/>
+                <a:t>更多训练数据</a:t>
+              </a:r>
+              <a:endParaRPr lang="zh-CN" altLang="en-US"/>
+            </a:p>
+          </p:txBody>
+        </p:sp>
+      </p:grpSp>
+      <p:pic>
+        <p:nvPicPr>
+          <p:cNvPr id="21" name="图片 20"/>
+          <p:cNvPicPr>
+            <a:picLocks noChangeAspect="1"/>
+          </p:cNvPicPr>
+          <p:nvPr/>
+        </p:nvPicPr>
+        <p:blipFill>
+          <a:blip r:embed="rId1"/>
+          <a:stretch>
+            <a:fillRect/>
+          </a:stretch>
+        </p:blipFill>
         <p:spPr>
           <a:xfrm>
-            <a:off x="4348680" y="311149"/>
-            <a:ext cx="3494640" cy="521970"/>
+            <a:off x="7209790" y="3141345"/>
+            <a:ext cx="2395220" cy="1368425"/>
           </a:xfrm>
           <a:prstGeom prst="rect">
             <a:avLst/>
           </a:prstGeom>
-          <a:noFill/>
         </p:spPr>
-        <p:txBody>
-          <a:bodyPr wrap="square" rtlCol="0">
-            <a:spAutoFit/>
-          </a:bodyPr>
-          <a:lstStyle/>
-          <a:p>
-            <a:pPr algn="ctr">
-              <a:buClrTx/>
-              <a:buSzTx/>
-              <a:buFontTx/>
-            </a:pPr>
-            <a:r>
-              <a:rPr lang="zh-CN" altLang="en-US" sz="2800" dirty="0">
-                <a:latin typeface="Times New Roman" panose="02020603050405020304" charset="0"/>
-                <a:ea typeface="宋体" panose="02010600030101010101" pitchFamily="2" charset="-122"/>
-              </a:rPr>
-              <a:t>个人创新点：</a:t>
-            </a:r>
-            <a:endParaRPr lang="zh-CN" altLang="en-US" sz="2800" dirty="0">
-              <a:latin typeface="Times New Roman" panose="02020603050405020304" charset="0"/>
-              <a:ea typeface="宋体" panose="02010600030101010101" pitchFamily="2" charset="-122"/>
-            </a:endParaRPr>
-          </a:p>
-        </p:txBody>
-      </p:sp>
-      <p:sp>
-        <p:nvSpPr>
-          <p:cNvPr id="4" name="文本框 3"/>
-          <p:cNvSpPr txBox="1"/>
-          <p:nvPr/>
-        </p:nvSpPr>
-        <p:spPr>
-          <a:xfrm>
-            <a:off x="418465" y="833120"/>
-            <a:ext cx="11594465" cy="1076325"/>
-          </a:xfrm>
-          <a:prstGeom prst="rect">
-            <a:avLst/>
-          </a:prstGeom>
-          <a:noFill/>
-        </p:spPr>
-        <p:txBody>
-          <a:bodyPr wrap="square" rtlCol="0">
-            <a:spAutoFit/>
-          </a:bodyPr>
-          <a:p>
-            <a:r>
-              <a:rPr lang="en-US" altLang="zh-CN" sz="1600"/>
-              <a:t>1</a:t>
-            </a:r>
-            <a:r>
-              <a:rPr lang="zh-CN" altLang="en-US" sz="1600"/>
-              <a:t>、利用</a:t>
-            </a:r>
-            <a:r>
-              <a:rPr lang="en-US" altLang="zh-CN" sz="1600" b="1"/>
-              <a:t>Kmeans+</a:t>
-            </a:r>
-            <a:r>
-              <a:rPr lang="zh-CN" altLang="en-US" sz="1600" b="1"/>
-              <a:t>目标编码</a:t>
-            </a:r>
-            <a:r>
-              <a:rPr lang="zh-CN" altLang="en-US" sz="1600"/>
-              <a:t>：</a:t>
-            </a:r>
-            <a:r>
-              <a:rPr lang="en-US" altLang="zh-CN" sz="1600"/>
-              <a:t>kaggle76.8</a:t>
-            </a:r>
-            <a:endParaRPr lang="zh-CN" altLang="en-US" sz="1600"/>
-          </a:p>
-          <a:p>
-            <a:pPr indent="457200"/>
-            <a:r>
-              <a:rPr lang="zh-CN" altLang="en-US" sz="1600"/>
-              <a:t>输入原始地理信息（城市、区域、板块、经纬度），将地理编号转为蕴含价格信息的数值特征。</a:t>
-            </a:r>
-            <a:endParaRPr lang="zh-CN" altLang="en-US" sz="1600"/>
-          </a:p>
-          <a:p>
-            <a:pPr indent="457200"/>
-            <a:r>
-              <a:rPr lang="zh-CN" altLang="en-US" sz="1600" b="1"/>
-              <a:t>每个城市内部根据</a:t>
-            </a:r>
-            <a:r>
-              <a:rPr lang="en-US" altLang="zh-CN" sz="1600" b="1"/>
-              <a:t>lon,lat</a:t>
-            </a:r>
-            <a:r>
-              <a:rPr lang="zh-CN" altLang="en-US" sz="1600" b="1"/>
-              <a:t>进行</a:t>
-            </a:r>
-            <a:r>
-              <a:rPr lang="en-US" altLang="zh-CN" sz="1600" b="1"/>
-              <a:t>KMeans</a:t>
-            </a:r>
-            <a:r>
-              <a:rPr lang="zh-CN" altLang="en-US" sz="1600" b="1"/>
-              <a:t>聚类</a:t>
-            </a:r>
-            <a:r>
-              <a:rPr lang="zh-CN" altLang="en-US" sz="1600"/>
-              <a:t>；然后利用训练集的</a:t>
-            </a:r>
-            <a:r>
-              <a:rPr lang="en-US" altLang="zh-CN" sz="1600"/>
-              <a:t>log(</a:t>
-            </a:r>
-            <a:r>
-              <a:rPr lang="zh-CN" altLang="en-US" sz="1600"/>
-              <a:t>房价</a:t>
-            </a:r>
-            <a:r>
-              <a:rPr lang="en-US" altLang="zh-CN" sz="1600"/>
-              <a:t>)</a:t>
-            </a:r>
-            <a:r>
-              <a:rPr lang="zh-CN" altLang="en-US" sz="1600"/>
-              <a:t>，</a:t>
-            </a:r>
-            <a:r>
-              <a:rPr lang="en-US" altLang="zh-CN" sz="1600"/>
-              <a:t>K-Fold</a:t>
-            </a:r>
-            <a:r>
-              <a:rPr lang="zh-CN" altLang="en-US" sz="1600"/>
-              <a:t>交叉验证，从粗到细计算出四个层级的地理区域均价，包括：</a:t>
-            </a:r>
-            <a:r>
-              <a:rPr lang="en-US" altLang="zh-CN" sz="1600"/>
-              <a:t>City_TE</a:t>
-            </a:r>
-            <a:r>
-              <a:rPr lang="zh-CN" altLang="en-US" sz="1600"/>
-              <a:t>（城市均价）、</a:t>
-            </a:r>
-            <a:r>
-              <a:rPr lang="en-US" altLang="zh-CN" sz="1600"/>
-              <a:t>Region_TE</a:t>
-            </a:r>
-            <a:r>
-              <a:rPr lang="zh-CN" altLang="en-US" sz="1600"/>
-              <a:t>（区域均价）、</a:t>
-            </a:r>
-            <a:r>
-              <a:rPr lang="en-US" altLang="zh-CN" sz="1600"/>
-              <a:t>Block_TE</a:t>
-            </a:r>
-            <a:r>
-              <a:rPr lang="zh-CN" altLang="en-US" sz="1600"/>
-              <a:t>（板块均价）以及</a:t>
-            </a:r>
-            <a:r>
-              <a:rPr lang="en-US" altLang="zh-CN" sz="1600"/>
-              <a:t>Cluster_TE</a:t>
-            </a:r>
-            <a:r>
-              <a:rPr lang="zh-CN" altLang="en-US" sz="1600"/>
-              <a:t>（地理簇均价）</a:t>
-            </a:r>
-            <a:endParaRPr lang="zh-CN" altLang="en-US" sz="1600"/>
-          </a:p>
-        </p:txBody>
-      </p:sp>
-      <p:sp>
-        <p:nvSpPr>
-          <p:cNvPr id="5" name="文本框 4"/>
-          <p:cNvSpPr txBox="1"/>
-          <p:nvPr/>
-        </p:nvSpPr>
-        <p:spPr>
-          <a:xfrm>
-            <a:off x="387350" y="1817370"/>
-            <a:ext cx="11577320" cy="1322070"/>
-          </a:xfrm>
-          <a:prstGeom prst="rect">
-            <a:avLst/>
-          </a:prstGeom>
-          <a:noFill/>
-        </p:spPr>
-        <p:txBody>
-          <a:bodyPr wrap="square" rtlCol="0">
-            <a:spAutoFit/>
-          </a:bodyPr>
-          <a:p>
-            <a:r>
-              <a:rPr lang="en-US" altLang="zh-CN" sz="1600"/>
-              <a:t>2</a:t>
-            </a:r>
-            <a:r>
-              <a:rPr lang="zh-CN" altLang="en-US" sz="1600"/>
-              <a:t>、独热编码：</a:t>
-            </a:r>
-            <a:endParaRPr lang="zh-CN" altLang="en-US" sz="1600"/>
-          </a:p>
-          <a:p>
-            <a:pPr indent="457200"/>
-            <a:r>
-              <a:rPr lang="zh-CN" altLang="en-US" sz="1600"/>
-              <a:t>反复尝试，首先尝试将地理层次变量</a:t>
-            </a:r>
-            <a:r>
-              <a:rPr lang="en-US" altLang="zh-CN" sz="1600"/>
-              <a:t>0/1</a:t>
-            </a:r>
-            <a:r>
-              <a:rPr lang="zh-CN" altLang="en-US" sz="1600"/>
-              <a:t>编码，进行预测</a:t>
-            </a:r>
-            <a:r>
-              <a:rPr lang="en-US" altLang="zh-CN" sz="1600"/>
-              <a:t>——&gt;</a:t>
-            </a:r>
-            <a:r>
-              <a:rPr lang="zh-CN" altLang="en-US" sz="1600">
-                <a:highlight>
-                  <a:srgbClr val="FFFF00"/>
-                </a:highlight>
-              </a:rPr>
-              <a:t>添加更多特征</a:t>
-            </a:r>
-            <a:r>
-              <a:rPr lang="en-US" altLang="zh-CN" sz="1600">
-                <a:highlight>
-                  <a:srgbClr val="FFFF00"/>
-                </a:highlight>
-              </a:rPr>
-              <a:t>“</a:t>
-            </a:r>
-            <a:r>
-              <a:rPr lang="zh-CN" altLang="en-US" sz="1600">
-                <a:highlight>
-                  <a:srgbClr val="FFFF00"/>
-                </a:highlight>
-              </a:rPr>
-              <a:t>绿化率</a:t>
-            </a:r>
-            <a:r>
-              <a:rPr lang="en-US" altLang="zh-CN" sz="1600">
-                <a:highlight>
-                  <a:srgbClr val="FFFF00"/>
-                </a:highlight>
-              </a:rPr>
-              <a:t>”</a:t>
-            </a:r>
-            <a:r>
-              <a:rPr lang="zh-CN" altLang="en-US" sz="1600">
-                <a:highlight>
-                  <a:srgbClr val="FFFF00"/>
-                </a:highlight>
-              </a:rPr>
-              <a:t>、</a:t>
-            </a:r>
-            <a:r>
-              <a:rPr lang="en-US" altLang="zh-CN" sz="1600">
-                <a:highlight>
-                  <a:srgbClr val="FFFF00"/>
-                </a:highlight>
-              </a:rPr>
-              <a:t>“</a:t>
-            </a:r>
-            <a:r>
-              <a:rPr lang="zh-CN" altLang="en-US" sz="1600">
-                <a:highlight>
-                  <a:srgbClr val="FFFF00"/>
-                </a:highlight>
-              </a:rPr>
-              <a:t>容积率</a:t>
-            </a:r>
-            <a:r>
-              <a:rPr lang="en-US" altLang="zh-CN" sz="1600">
-                <a:highlight>
-                  <a:srgbClr val="FFFF00"/>
-                </a:highlight>
-              </a:rPr>
-              <a:t>”</a:t>
-            </a:r>
-            <a:r>
-              <a:rPr lang="zh-CN" altLang="en-US" sz="1600">
-                <a:highlight>
-                  <a:srgbClr val="FFFF00"/>
-                </a:highlight>
-              </a:rPr>
-              <a:t>，</a:t>
-            </a:r>
-            <a:r>
-              <a:rPr lang="en-US" altLang="zh-CN" sz="1600">
-                <a:highlight>
-                  <a:srgbClr val="FFFF00"/>
-                </a:highlight>
-              </a:rPr>
-              <a:t>“</a:t>
-            </a:r>
-            <a:r>
-              <a:rPr lang="zh-CN" altLang="en-US" sz="1600">
-                <a:highlight>
-                  <a:srgbClr val="FFFF00"/>
-                </a:highlight>
-              </a:rPr>
-              <a:t>停车费</a:t>
-            </a:r>
-            <a:r>
-              <a:rPr lang="en-US" altLang="zh-CN" sz="1600">
-                <a:highlight>
-                  <a:srgbClr val="FFFF00"/>
-                </a:highlight>
-              </a:rPr>
-              <a:t>”...</a:t>
-            </a:r>
-            <a:r>
-              <a:rPr lang="zh-CN" altLang="en-US" sz="1600">
-                <a:highlight>
-                  <a:srgbClr val="FFFF00"/>
-                </a:highlight>
-              </a:rPr>
-              <a:t>再次预测</a:t>
-            </a:r>
-            <a:r>
-              <a:rPr lang="zh-CN" altLang="en-US" sz="1600"/>
-              <a:t>，</a:t>
-            </a:r>
-            <a:r>
-              <a:rPr lang="en-US" altLang="zh-CN" sz="1600"/>
-              <a:t>optuna</a:t>
-            </a:r>
-            <a:r>
-              <a:rPr lang="zh-CN" altLang="en-US" sz="1600"/>
-              <a:t>调参</a:t>
-            </a:r>
-            <a:r>
-              <a:rPr lang="en-US" altLang="zh-CN" sz="1600"/>
-              <a:t>——&gt;</a:t>
-            </a:r>
-            <a:r>
-              <a:rPr lang="zh-CN" altLang="en-US" sz="1600"/>
-              <a:t>几乎将所有缺失值在一半以下的特征加入，并取消将区域、板块等编码</a:t>
-            </a:r>
-            <a:r>
-              <a:rPr lang="en-US" altLang="zh-CN" sz="1600"/>
-              <a:t>——&gt;</a:t>
-            </a:r>
-            <a:r>
-              <a:rPr lang="zh-CN" altLang="en-US" sz="1600"/>
-              <a:t>加入</a:t>
-            </a:r>
-            <a:r>
-              <a:rPr lang="en-US" altLang="zh-CN" sz="1600"/>
-              <a:t>Kmeans</a:t>
-            </a:r>
-            <a:r>
-              <a:rPr lang="zh-CN" altLang="en-US" sz="1600"/>
-              <a:t>目标编码，同样不对地理特征</a:t>
-            </a:r>
-            <a:r>
-              <a:rPr lang="en-US" altLang="zh-CN" sz="1600"/>
-              <a:t>0/1</a:t>
-            </a:r>
-            <a:r>
-              <a:rPr lang="zh-CN" altLang="en-US" sz="1600"/>
-              <a:t>编码</a:t>
-            </a:r>
-            <a:endParaRPr lang="zh-CN" altLang="en-US" sz="1600"/>
-          </a:p>
-          <a:p>
-            <a:pPr indent="457200"/>
-            <a:r>
-              <a:rPr lang="zh-CN" altLang="en-US" sz="1600"/>
-              <a:t>以上每次改变，均尝试</a:t>
-            </a:r>
-            <a:r>
-              <a:rPr lang="en-US" altLang="zh-CN" sz="1600"/>
-              <a:t>XGBoost/ANN/CatBoost</a:t>
-            </a:r>
-            <a:r>
-              <a:rPr lang="zh-CN" altLang="en-US" sz="1600"/>
-              <a:t>模型，但是效果并不显著。</a:t>
-            </a:r>
-            <a:r>
-              <a:rPr lang="zh-CN" altLang="en-US" sz="1600">
-                <a:sym typeface="+mn-ea"/>
-              </a:rPr>
-              <a:t>如地理区位编码，则利用</a:t>
-            </a:r>
-            <a:r>
-              <a:rPr lang="en-US" altLang="zh-CN" sz="1600">
-                <a:sym typeface="+mn-ea"/>
-              </a:rPr>
-              <a:t>lon,lat</a:t>
-            </a:r>
-            <a:r>
-              <a:rPr lang="zh-CN" altLang="en-US" sz="1600">
-                <a:sym typeface="+mn-ea"/>
-              </a:rPr>
-              <a:t>来</a:t>
-            </a:r>
-            <a:r>
-              <a:rPr lang="en-US" altLang="zh-CN" sz="1600">
-                <a:sym typeface="+mn-ea"/>
-              </a:rPr>
-              <a:t>KNN</a:t>
-            </a:r>
-            <a:endParaRPr lang="zh-CN" altLang="en-US" sz="1600"/>
-          </a:p>
-        </p:txBody>
-      </p:sp>
+      </p:pic>
       <p:graphicFrame>
         <p:nvGraphicFramePr>
-          <p:cNvPr id="6" name="表格 5"/>
+          <p:cNvPr id="23" name="表格 22"/>
           <p:cNvGraphicFramePr/>
           <p:nvPr/>
         </p:nvGraphicFramePr>
@@ -9567,282 +10176,23 @@
           </a:graphicData>
         </a:graphic>
       </p:graphicFrame>
-      <p:sp>
-        <p:nvSpPr>
-          <p:cNvPr id="7" name="文本框 6"/>
-          <p:cNvSpPr txBox="1"/>
-          <p:nvPr/>
-        </p:nvSpPr>
-        <p:spPr>
-          <a:xfrm>
-            <a:off x="6560185" y="4511040"/>
-            <a:ext cx="5452745" cy="2030095"/>
-          </a:xfrm>
-          <a:prstGeom prst="rect">
-            <a:avLst/>
-          </a:prstGeom>
-          <a:noFill/>
-        </p:spPr>
-        <p:txBody>
-          <a:bodyPr wrap="square" rtlCol="0">
-            <a:spAutoFit/>
-          </a:bodyPr>
-          <a:p>
-            <a:pPr marL="285750" indent="-285750">
-              <a:buFont typeface="Arial" panose="020B0604020202020204" pitchFamily="34" charset="0"/>
-              <a:buChar char="•"/>
-            </a:pPr>
-            <a:r>
-              <a:rPr lang="en-US" altLang="zh-CN" b="1"/>
-              <a:t>CTGAN</a:t>
-            </a:r>
-            <a:r>
-              <a:rPr lang="zh-CN" altLang="en-US" b="1"/>
-              <a:t>模型作</a:t>
-            </a:r>
-            <a:r>
-              <a:rPr lang="en-US" altLang="zh-CN" b="1"/>
-              <a:t>“</a:t>
-            </a:r>
-            <a:r>
-              <a:rPr lang="zh-CN" altLang="en-US" b="1"/>
-              <a:t>生成器</a:t>
-            </a:r>
-            <a:r>
-              <a:rPr lang="en-US" altLang="zh-CN" b="1"/>
-              <a:t>”</a:t>
-            </a:r>
-            <a:r>
-              <a:rPr lang="zh-CN" altLang="en-US"/>
-              <a:t>，与</a:t>
-            </a:r>
-            <a:r>
-              <a:rPr lang="en-US" altLang="zh-CN"/>
-              <a:t>“</a:t>
-            </a:r>
-            <a:r>
-              <a:rPr lang="zh-CN" altLang="en-US" b="1"/>
-              <a:t>判别器</a:t>
-            </a:r>
-            <a:r>
-              <a:rPr lang="en-US" altLang="zh-CN" b="1"/>
-              <a:t>”</a:t>
-            </a:r>
-            <a:r>
-              <a:rPr lang="zh-CN" altLang="en-US" b="1"/>
-              <a:t>对抗性训练</a:t>
-            </a:r>
-            <a:r>
-              <a:rPr lang="zh-CN" altLang="en-US"/>
-              <a:t>：生成器试图生成假数据，判别器努力区分真实数据与生成数据。经多轮博弈，生成器逐渐掌握数据的分布和列间关联（</a:t>
-            </a:r>
-            <a:r>
-              <a:rPr lang="en-US" altLang="zh-CN"/>
-              <a:t>eg:“</a:t>
-            </a:r>
-            <a:r>
-              <a:rPr lang="zh-CN" altLang="en-US"/>
-              <a:t>面积</a:t>
-            </a:r>
-            <a:r>
-              <a:rPr lang="en-US" altLang="zh-CN"/>
-              <a:t>”</a:t>
-            </a:r>
-            <a:r>
-              <a:rPr lang="zh-CN" altLang="en-US"/>
-              <a:t>与</a:t>
-            </a:r>
-            <a:r>
-              <a:rPr lang="en-US" altLang="zh-CN"/>
-              <a:t>“</a:t>
-            </a:r>
-            <a:r>
-              <a:rPr lang="zh-CN" altLang="en-US"/>
-              <a:t>物业费</a:t>
-            </a:r>
-            <a:r>
-              <a:rPr lang="en-US" altLang="zh-CN"/>
-              <a:t>”</a:t>
-            </a:r>
-            <a:r>
-              <a:rPr lang="zh-CN" altLang="en-US"/>
-              <a:t>的正相关性）</a:t>
-            </a:r>
-            <a:endParaRPr lang="zh-CN" altLang="en-US"/>
-          </a:p>
-          <a:p>
-            <a:pPr marL="285750" indent="-285750">
-              <a:buFont typeface="Arial" panose="020B0604020202020204" pitchFamily="34" charset="0"/>
-              <a:buChar char="•"/>
-            </a:pPr>
-            <a:r>
-              <a:rPr lang="zh-CN" altLang="en-US"/>
-              <a:t>训练完成后，模型采样生成数据。数字还原为带单位的字符串，生成不重复的新</a:t>
-            </a:r>
-            <a:r>
-              <a:rPr lang="en-US" altLang="zh-CN"/>
-              <a:t>ID</a:t>
-            </a:r>
-            <a:r>
-              <a:rPr lang="zh-CN" altLang="en-US"/>
-              <a:t>。</a:t>
-            </a:r>
-            <a:endParaRPr lang="zh-CN" altLang="en-US"/>
-          </a:p>
-        </p:txBody>
-      </p:sp>
-      <p:sp>
-        <p:nvSpPr>
-          <p:cNvPr id="8" name="文本框 7"/>
-          <p:cNvSpPr txBox="1"/>
-          <p:nvPr/>
-        </p:nvSpPr>
-        <p:spPr>
-          <a:xfrm>
-            <a:off x="392430" y="3541395"/>
-            <a:ext cx="5574665" cy="368300"/>
-          </a:xfrm>
-          <a:prstGeom prst="rect">
-            <a:avLst/>
-          </a:prstGeom>
-          <a:noFill/>
-        </p:spPr>
-        <p:txBody>
-          <a:bodyPr wrap="square" rtlCol="0">
-            <a:spAutoFit/>
-          </a:bodyPr>
-          <a:p>
-            <a:r>
-              <a:rPr lang="en-US" altLang="zh-CN" b="1"/>
-              <a:t>4</a:t>
-            </a:r>
-            <a:r>
-              <a:rPr lang="zh-CN" altLang="en-US" b="1"/>
-              <a:t>、探索</a:t>
-            </a:r>
-            <a:r>
-              <a:rPr lang="zh-CN" altLang="en-US"/>
-              <a:t>：尝试利用</a:t>
-            </a:r>
-            <a:r>
-              <a:rPr lang="zh-CN" altLang="en-US" b="1"/>
-              <a:t>对抗神经网络</a:t>
-            </a:r>
-            <a:r>
-              <a:rPr lang="zh-CN" altLang="en-US"/>
-              <a:t>生成</a:t>
-            </a:r>
-            <a:r>
-              <a:rPr lang="zh-CN" altLang="en-US"/>
-              <a:t>更多训练数据</a:t>
-            </a:r>
-            <a:endParaRPr lang="zh-CN" altLang="en-US"/>
-          </a:p>
-        </p:txBody>
-      </p:sp>
-      <p:sp>
-        <p:nvSpPr>
-          <p:cNvPr id="13" name="文本框 12"/>
-          <p:cNvSpPr txBox="1"/>
-          <p:nvPr/>
-        </p:nvSpPr>
-        <p:spPr>
-          <a:xfrm>
-            <a:off x="392430" y="3124835"/>
-            <a:ext cx="6075045" cy="337185"/>
-          </a:xfrm>
-          <a:prstGeom prst="rect">
-            <a:avLst/>
-          </a:prstGeom>
-          <a:noFill/>
-        </p:spPr>
-        <p:txBody>
-          <a:bodyPr wrap="square" rtlCol="0">
-            <a:spAutoFit/>
-          </a:bodyPr>
-          <a:p>
-            <a:r>
-              <a:rPr lang="en-US" altLang="zh-CN" sz="1600"/>
-              <a:t>3</a:t>
-            </a:r>
-            <a:r>
-              <a:rPr lang="zh-CN" altLang="en-US" sz="1600"/>
-              <a:t>、利用树模型，将</a:t>
-            </a:r>
-            <a:r>
-              <a:rPr lang="en-US" altLang="zh-CN" sz="1600"/>
-              <a:t>RF</a:t>
-            </a:r>
-            <a:r>
-              <a:rPr lang="zh-CN" altLang="en-US" sz="1600"/>
-              <a:t>结果和</a:t>
-            </a:r>
-            <a:r>
-              <a:rPr lang="en-US" altLang="zh-CN" sz="1600"/>
-              <a:t>OLS</a:t>
-            </a:r>
-            <a:r>
-              <a:rPr lang="zh-CN" altLang="en-US" sz="1600"/>
-              <a:t>叠加，进行预测</a:t>
-            </a:r>
-            <a:endParaRPr lang="zh-CN" altLang="en-US" sz="1600"/>
-          </a:p>
-        </p:txBody>
-      </p:sp>
-      <p:pic>
-        <p:nvPicPr>
-          <p:cNvPr id="14" name="图片 13"/>
-          <p:cNvPicPr>
-            <a:picLocks noChangeAspect="1"/>
-          </p:cNvPicPr>
-          <p:nvPr/>
-        </p:nvPicPr>
-        <p:blipFill>
-          <a:blip r:embed="rId1"/>
-          <a:stretch>
-            <a:fillRect/>
-          </a:stretch>
-        </p:blipFill>
-        <p:spPr>
-          <a:xfrm>
-            <a:off x="7362825" y="3142615"/>
-            <a:ext cx="2395220" cy="1368425"/>
-          </a:xfrm>
-          <a:prstGeom prst="rect">
-            <a:avLst/>
-          </a:prstGeom>
-        </p:spPr>
-      </p:pic>
     </p:spTree>
-    <p:custDataLst>
-      <p:tags r:id="rId2"/>
-    </p:custDataLst>
   </p:cSld>
   <p:clrMapOvr>
     <a:masterClrMapping/>
   </p:clrMapOvr>
   <mc:AlternateContent xmlns:mc="http://schemas.openxmlformats.org/markup-compatibility/2006">
     <mc:Choice xmlns:p14="http://schemas.microsoft.com/office/powerpoint/2010/main" Requires="p14">
-      <p:transition spd="med" p14:dur="699">
+      <p:transition spd="med" p14:dur="699" advTm="5500">
         <p:fade/>
       </p:transition>
     </mc:Choice>
     <mc:Fallback>
-      <p:transition spd="med">
+      <p:transition spd="med" advTm="5500">
         <p:fade/>
       </p:transition>
     </mc:Fallback>
   </mc:AlternateContent>
-  <p:timing>
-    <p:tnLst>
-      <p:par>
-        <p:cTn id="1" dur="indefinite" restart="never" nodeType="tmRoot"/>
-      </p:par>
-    </p:tnLst>
-    <p:bldLst>
-      <p:bldP spid="41" grpId="0"/>
-    </p:bldLst>
-  </p:timing>
 </p:sld>
 </file>
 
@@ -10187,6 +10537,20 @@
 </p:tagLst>
 </file>
 
+<file path=ppt/tags/tag10.xml><?xml version="1.0" encoding="utf-8"?>
+<p:tagLst xmlns:p="http://schemas.openxmlformats.org/presentationml/2006/main">
+  <p:tag name="PA" val="v3.2.0"/>
+</p:tagLst>
+</file>
+
+<file path=ppt/tags/tag11.xml><?xml version="1.0" encoding="utf-8"?>
+<p:tagLst xmlns:p="http://schemas.openxmlformats.org/presentationml/2006/main">
+  <p:tag name="ISPRING_PRESENTATION_TITLE" val="彩色叶子手绘小清新ppt"/>
+  <p:tag name="RESOURCE_RECORD_KEY" val="{&quot;70&quot;:[3333435,3324636]}"/>
+  <p:tag name="resource_record_key" val="{&quot;70&quot;:[3333435,3324636,3333497]}"/>
+</p:tagLst>
+</file>
+
 <file path=ppt/tags/tag2.xml><?xml version="1.0" encoding="utf-8"?>
 <p:tagLst xmlns:p="http://schemas.openxmlformats.org/presentationml/2006/main">
   <p:tag name="KSO_WM_UNIT_HIGHLIGHT" val="0"/>
@@ -10210,7 +10574,7 @@
   <p:tag name="KSO_WM_UNIT_TEXT_FILL_TYPE" val="3"/>
   <p:tag name="KSO_WM_DIAGRAM_MAX_ITEMCNT" val="12"/>
   <p:tag name="KSO_WM_DIAGRAM_MIN_ITEMCNT" val="2"/>
-  <p:tag name="KSO_WM_DIAGRAM_VIRTUALLY_FRAME" val="{&quot;height&quot;:392.6499969482422,&quot;left&quot;:0,&quot;top&quot;:104.5,&quot;width&quot;:906.4749938964844}"/>
+  <p:tag name="KSO_WM_DIAGRAM_VIRTUALLY_FRAME" val="{&quot;height&quot;:472.6499969482422,&quot;left&quot;:0,&quot;top&quot;:24.5,&quot;width&quot;:932.55}"/>
   <p:tag name="KSO_WM_DIAGRAM_COLOR_MATCH_VALUE" val="{&quot;shape&quot;:{&quot;fill&quot;:{&quot;type&quot;:0},&quot;glow&quot;:{&quot;colorType&quot;:0},&quot;line&quot;:{&quot;type&quot;:0},&quot;shadow&quot;:{&quot;colorType&quot;:0},&quot;threeD&quot;:{&quot;curvedSurface&quot;:{&quot;brightness&quot;:0,&quot;colorType&quot;:2,&quot;rgb&quot;:&quot;#000000&quot;},&quot;depth&quot;:{&quot;colorType&quot;:0}}},&quot;text&quot;:{&quot;fill&quot;:{&quot;gradient&quot;:[{&quot;brightness&quot;:0,&quot;colorType&quot;:1,&quot;foreColorIndex&quot;:5,&quot;pos&quot;:0,&quot;transparency&quot;:0},{&quot;brightness&quot;:0,&quot;colorType&quot;:1,&quot;foreColorIndex&quot;:5,&quot;pos&quot;:1,&quot;transparency&quot;:0.30000001192092896}],&quot;type&quot;:3},&quot;glow&quot;:{&quot;colorType&quot;:0},&quot;line&quot;:{&quot;type&quot;:0},&quot;shadow&quot;:{&quot;colorType&quot;:0},&quot;threeD&quot;:{&quot;curvedSurface&quot;:{&quot;brightness&quot;:0,&quot;colorType&quot;:2,&quot;rgb&quot;:&quot;#000000&quot;},&quot;depth&quot;:{&quot;colorType&quot;:0}}}}"/>
   <p:tag name="KSO_WM_DIAGRAM_USE_COLOR_VALUE" val="{&quot;color_scheme&quot;:1,&quot;color_type&quot;:1,&quot;theme_color_indexes&quot;:[5,6,5,6,5,6]}"/>
 </p:tagLst>
@@ -10222,55 +10586,30 @@
   <p:tag name="KSO_WM_UNIT_COMPATIBLE" val="0"/>
   <p:tag name="KSO_WM_UNIT_DIAGRAM_ISNUMVISUAL" val="0"/>
   <p:tag name="KSO_WM_UNIT_DIAGRAM_ISREFERUNIT" val="0"/>
-  <p:tag name="KSO_WM_UNIT_ID" val="diagram20235153_2*l_h_i*1_2_2"/>
+  <p:tag name="KSO_WM_UNIT_ID" val="diagram20235153_2*l_h_i*1_3_1"/>
   <p:tag name="KSO_WM_TEMPLATE_CATEGORY" val="diagram"/>
   <p:tag name="KSO_WM_TEMPLATE_INDEX" val="20235153"/>
   <p:tag name="KSO_WM_UNIT_LAYERLEVEL" val="1_1_1"/>
   <p:tag name="KSO_WM_TAG_VERSION" val="3.0"/>
   <p:tag name="KSO_WM_BEAUTIFY_FLAG" val="#wm#"/>
   <p:tag name="KSO_WM_DIAGRAM_GROUP_CODE" val="l1-1"/>
+  <p:tag name="KSO_WM_UNIT_SUBTYPE" val="d"/>
   <p:tag name="KSO_WM_UNIT_TYPE" val="l_h_i"/>
-  <p:tag name="KSO_WM_UNIT_INDEX" val="1_2_2"/>
+  <p:tag name="KSO_WM_UNIT_INDEX" val="1_3_1"/>
   <p:tag name="KSO_WM_DIAGRAM_VERSION" val="3"/>
   <p:tag name="KSO_WM_DIAGRAM_COLOR_TRICK" val="1"/>
   <p:tag name="KSO_WM_DIAGRAM_COLOR_TEXT_CAN_REMOVE" val="n"/>
-  <p:tag name="KSO_WM_UNIT_LINE_FORE_SCHEMECOLOR_INDEX" val="5"/>
+  <p:tag name="KSO_WM_UNIT_TEXT_FILL_FORE_SCHEMECOLOR_INDEX" val="3"/>
+  <p:tag name="KSO_WM_UNIT_TEXT_FILL_TYPE" val="3"/>
   <p:tag name="KSO_WM_DIAGRAM_MAX_ITEMCNT" val="12"/>
   <p:tag name="KSO_WM_DIAGRAM_MIN_ITEMCNT" val="2"/>
-  <p:tag name="KSO_WM_DIAGRAM_VIRTUALLY_FRAME" val="{&quot;height&quot;:392.6499969482422,&quot;left&quot;:0,&quot;top&quot;:104.5,&quot;width&quot;:906.4749938964844}"/>
-  <p:tag name="KSO_WM_DIAGRAM_COLOR_MATCH_VALUE" val="{&quot;shape&quot;:{&quot;fill&quot;:{&quot;solid&quot;:{&quot;brightness&quot;:0,&quot;colorType&quot;:1,&quot;foreColorIndex&quot;:2,&quot;transparency&quot;:1},&quot;type&quot;:1},&quot;glow&quot;:{&quot;colorType&quot;:0},&quot;line&quot;:{&quot;solidLine&quot;:{&quot;brightness&quot;:0,&quot;colorType&quot;:1,&quot;foreColorIndex&quot;:5,&quot;transparency&quot;:0.5},&quot;type&quot;:1},&quot;shadow&quot;:{&quot;colorType&quot;:0},&quot;threeD&quot;:{&quot;curvedSurface&quot;:{&quot;brightness&quot;:0,&quot;colorType&quot;:2,&quot;rgb&quot;:&quot;#000000&quot;},&quot;depth&quot;:{&quot;colorType&quot;:0}}},&quot;text&quot;:{&quot;fill&quot;:{},&quot;glow&quot;:{},&quot;line&quot;:{},&quot;shadow&quot;:{},&quot;threeD&quot;:{}}}"/>
+  <p:tag name="KSO_WM_DIAGRAM_VIRTUALLY_FRAME" val="{&quot;height&quot;:472.6499969482422,&quot;left&quot;:0,&quot;top&quot;:24.5,&quot;width&quot;:932.55}"/>
+  <p:tag name="KSO_WM_DIAGRAM_COLOR_MATCH_VALUE" val="{&quot;shape&quot;:{&quot;fill&quot;:{&quot;type&quot;:0},&quot;glow&quot;:{&quot;colorType&quot;:0},&quot;line&quot;:{&quot;type&quot;:0},&quot;shadow&quot;:{&quot;colorType&quot;:0},&quot;threeD&quot;:{&quot;curvedSurface&quot;:{&quot;brightness&quot;:0,&quot;colorType&quot;:2,&quot;rgb&quot;:&quot;#000000&quot;},&quot;depth&quot;:{&quot;colorType&quot;:0}}},&quot;text&quot;:{&quot;fill&quot;:{&quot;gradient&quot;:[{&quot;brightness&quot;:0,&quot;colorType&quot;:1,&quot;foreColorIndex&quot;:5,&quot;pos&quot;:0,&quot;transparency&quot;:0},{&quot;brightness&quot;:0,&quot;colorType&quot;:1,&quot;foreColorIndex&quot;:5,&quot;pos&quot;:1,&quot;transparency&quot;:0.30000001192092896}],&quot;type&quot;:3},&quot;glow&quot;:{&quot;colorType&quot;:0},&quot;line&quot;:{&quot;type&quot;:0},&quot;shadow&quot;:{&quot;colorType&quot;:0},&quot;threeD&quot;:{&quot;curvedSurface&quot;:{&quot;brightness&quot;:0,&quot;colorType&quot;:2,&quot;rgb&quot;:&quot;#000000&quot;},&quot;depth&quot;:{&quot;colorType&quot;:0}}}}"/>
   <p:tag name="KSO_WM_DIAGRAM_USE_COLOR_VALUE" val="{&quot;color_scheme&quot;:1,&quot;color_type&quot;:1,&quot;theme_color_indexes&quot;:[5,6,5,6,5,6]}"/>
 </p:tagLst>
 </file>
 
 <file path=ppt/tags/tag4.xml><?xml version="1.0" encoding="utf-8"?>
-<p:tagLst xmlns:p="http://schemas.openxmlformats.org/presentationml/2006/main">
-  <p:tag name="KSO_WM_UNIT_HIGHLIGHT" val="0"/>
-  <p:tag name="KSO_WM_UNIT_COMPATIBLE" val="0"/>
-  <p:tag name="KSO_WM_UNIT_DIAGRAM_ISNUMVISUAL" val="0"/>
-  <p:tag name="KSO_WM_UNIT_DIAGRAM_ISREFERUNIT" val="0"/>
-  <p:tag name="KSO_WM_UNIT_ID" val="diagram20235153_2*l_h_i*1_3_2"/>
-  <p:tag name="KSO_WM_TEMPLATE_CATEGORY" val="diagram"/>
-  <p:tag name="KSO_WM_TEMPLATE_INDEX" val="20235153"/>
-  <p:tag name="KSO_WM_UNIT_LAYERLEVEL" val="1_1_1"/>
-  <p:tag name="KSO_WM_TAG_VERSION" val="3.0"/>
-  <p:tag name="KSO_WM_BEAUTIFY_FLAG" val="#wm#"/>
-  <p:tag name="KSO_WM_DIAGRAM_GROUP_CODE" val="l1-1"/>
-  <p:tag name="KSO_WM_UNIT_TYPE" val="l_h_i"/>
-  <p:tag name="KSO_WM_UNIT_INDEX" val="1_3_2"/>
-  <p:tag name="KSO_WM_DIAGRAM_VERSION" val="3"/>
-  <p:tag name="KSO_WM_DIAGRAM_COLOR_TRICK" val="1"/>
-  <p:tag name="KSO_WM_DIAGRAM_COLOR_TEXT_CAN_REMOVE" val="n"/>
-  <p:tag name="KSO_WM_UNIT_LINE_FORE_SCHEMECOLOR_INDEX" val="5"/>
-  <p:tag name="KSO_WM_DIAGRAM_MAX_ITEMCNT" val="12"/>
-  <p:tag name="KSO_WM_DIAGRAM_MIN_ITEMCNT" val="2"/>
-  <p:tag name="KSO_WM_DIAGRAM_VIRTUALLY_FRAME" val="{&quot;height&quot;:392.6499969482422,&quot;left&quot;:0,&quot;top&quot;:104.5,&quot;width&quot;:906.4749938964844}"/>
-  <p:tag name="KSO_WM_DIAGRAM_COLOR_MATCH_VALUE" val="{&quot;shape&quot;:{&quot;fill&quot;:{&quot;solid&quot;:{&quot;brightness&quot;:0,&quot;colorType&quot;:1,&quot;foreColorIndex&quot;:2,&quot;transparency&quot;:1},&quot;type&quot;:1},&quot;glow&quot;:{&quot;colorType&quot;:0},&quot;line&quot;:{&quot;solidLine&quot;:{&quot;brightness&quot;:0,&quot;colorType&quot;:1,&quot;foreColorIndex&quot;:5,&quot;transparency&quot;:0.5},&quot;type&quot;:1},&quot;shadow&quot;:{&quot;colorType&quot;:0},&quot;threeD&quot;:{&quot;curvedSurface&quot;:{&quot;brightness&quot;:0,&quot;colorType&quot;:2,&quot;rgb&quot;:&quot;#000000&quot;},&quot;depth&quot;:{&quot;colorType&quot;:0}}},&quot;text&quot;:{&quot;fill&quot;:{},&quot;glow&quot;:{},&quot;line&quot;:{},&quot;shadow&quot;:{},&quot;threeD&quot;:{}}}"/>
-  <p:tag name="KSO_WM_DIAGRAM_USE_COLOR_VALUE" val="{&quot;color_scheme&quot;:1,&quot;color_type&quot;:1,&quot;theme_color_indexes&quot;:[5,6,5,6,5,6]}"/>
-</p:tagLst>
-</file>
-
-<file path=ppt/tags/tag5.xml><?xml version="1.0" encoding="utf-8"?>
 <p:tagLst xmlns:p="http://schemas.openxmlformats.org/presentationml/2006/main">
   <p:tag name="KSO_WM_UNIT_HIGHLIGHT" val="0"/>
   <p:tag name="KSO_WM_UNIT_COMPATIBLE" val="0"/>
@@ -10293,13 +10632,48 @@
   <p:tag name="KSO_WM_UNIT_TEXT_FILL_TYPE" val="3"/>
   <p:tag name="KSO_WM_DIAGRAM_MAX_ITEMCNT" val="12"/>
   <p:tag name="KSO_WM_DIAGRAM_MIN_ITEMCNT" val="2"/>
-  <p:tag name="KSO_WM_DIAGRAM_VIRTUALLY_FRAME" val="{&quot;height&quot;:392.6499969482422,&quot;left&quot;:0,&quot;top&quot;:104.5,&quot;width&quot;:906.4749938964844}"/>
+  <p:tag name="KSO_WM_DIAGRAM_VIRTUALLY_FRAME" val="{&quot;height&quot;:472.6499969482422,&quot;left&quot;:0,&quot;top&quot;:24.5,&quot;width&quot;:932.55}"/>
   <p:tag name="KSO_WM_DIAGRAM_COLOR_MATCH_VALUE" val="{&quot;shape&quot;:{&quot;fill&quot;:{&quot;type&quot;:0},&quot;glow&quot;:{&quot;colorType&quot;:0},&quot;line&quot;:{&quot;type&quot;:0},&quot;shadow&quot;:{&quot;colorType&quot;:0},&quot;threeD&quot;:{&quot;curvedSurface&quot;:{&quot;brightness&quot;:0,&quot;colorType&quot;:2,&quot;rgb&quot;:&quot;#000000&quot;},&quot;depth&quot;:{&quot;colorType&quot;:0}}},&quot;text&quot;:{&quot;fill&quot;:{&quot;gradient&quot;:[{&quot;brightness&quot;:0,&quot;colorType&quot;:1,&quot;foreColorIndex&quot;:5,&quot;pos&quot;:0,&quot;transparency&quot;:0},{&quot;brightness&quot;:0,&quot;colorType&quot;:1,&quot;foreColorIndex&quot;:5,&quot;pos&quot;:1,&quot;transparency&quot;:0.30000001192092896}],&quot;type&quot;:3},&quot;glow&quot;:{&quot;colorType&quot;:0},&quot;line&quot;:{&quot;type&quot;:0},&quot;shadow&quot;:{&quot;colorType&quot;:0},&quot;threeD&quot;:{&quot;curvedSurface&quot;:{&quot;brightness&quot;:0,&quot;colorType&quot;:2,&quot;rgb&quot;:&quot;#000000&quot;},&quot;depth&quot;:{&quot;colorType&quot;:0}}}}"/>
   <p:tag name="KSO_WM_DIAGRAM_USE_COLOR_VALUE" val="{&quot;color_scheme&quot;:1,&quot;color_type&quot;:1,&quot;theme_color_indexes&quot;:[5,6,5,6,5,6]}"/>
 </p:tagLst>
 </file>
 
+<file path=ppt/tags/tag5.xml><?xml version="1.0" encoding="utf-8"?>
+<p:tagLst xmlns:p="http://schemas.openxmlformats.org/presentationml/2006/main">
+  <p:tag name="KSO_WM_DIAGRAM_VIRTUALLY_FRAME" val="{&quot;height&quot;:472.6499969482422,&quot;left&quot;:0,&quot;top&quot;:24.5,&quot;width&quot;:932.55}"/>
+</p:tagLst>
+</file>
+
 <file path=ppt/tags/tag6.xml><?xml version="1.0" encoding="utf-8"?>
+<p:tagLst xmlns:p="http://schemas.openxmlformats.org/presentationml/2006/main">
+  <p:tag name="KSO_WM_UNIT_HIGHLIGHT" val="0"/>
+  <p:tag name="KSO_WM_UNIT_COMPATIBLE" val="0"/>
+  <p:tag name="KSO_WM_UNIT_DIAGRAM_ISNUMVISUAL" val="0"/>
+  <p:tag name="KSO_WM_UNIT_DIAGRAM_ISREFERUNIT" val="0"/>
+  <p:tag name="KSO_WM_UNIT_ID" val="diagram20235153_2*l_h_i*1_1_1"/>
+  <p:tag name="KSO_WM_TEMPLATE_CATEGORY" val="diagram"/>
+  <p:tag name="KSO_WM_TEMPLATE_INDEX" val="20235153"/>
+  <p:tag name="KSO_WM_UNIT_LAYERLEVEL" val="1_1_1"/>
+  <p:tag name="KSO_WM_TAG_VERSION" val="3.0"/>
+  <p:tag name="KSO_WM_BEAUTIFY_FLAG" val="#wm#"/>
+  <p:tag name="KSO_WM_DIAGRAM_GROUP_CODE" val="l1-1"/>
+  <p:tag name="KSO_WM_UNIT_SUBTYPE" val="d"/>
+  <p:tag name="KSO_WM_UNIT_TYPE" val="l_h_i"/>
+  <p:tag name="KSO_WM_UNIT_INDEX" val="1_1_1"/>
+  <p:tag name="KSO_WM_DIAGRAM_VERSION" val="3"/>
+  <p:tag name="KSO_WM_DIAGRAM_COLOR_TRICK" val="1"/>
+  <p:tag name="KSO_WM_DIAGRAM_COLOR_TEXT_CAN_REMOVE" val="n"/>
+  <p:tag name="KSO_WM_UNIT_TEXT_FILL_FORE_SCHEMECOLOR_INDEX" val="3"/>
+  <p:tag name="KSO_WM_UNIT_TEXT_FILL_TYPE" val="3"/>
+  <p:tag name="KSO_WM_DIAGRAM_MAX_ITEMCNT" val="12"/>
+  <p:tag name="KSO_WM_DIAGRAM_MIN_ITEMCNT" val="2"/>
+  <p:tag name="KSO_WM_DIAGRAM_VIRTUALLY_FRAME" val="{&quot;height&quot;:472.6499969482422,&quot;left&quot;:0,&quot;top&quot;:24.5,&quot;width&quot;:932.55}"/>
+  <p:tag name="KSO_WM_DIAGRAM_COLOR_MATCH_VALUE" val="{&quot;shape&quot;:{&quot;fill&quot;:{&quot;type&quot;:0},&quot;glow&quot;:{&quot;colorType&quot;:0},&quot;line&quot;:{&quot;type&quot;:0},&quot;shadow&quot;:{&quot;colorType&quot;:0},&quot;threeD&quot;:{&quot;curvedSurface&quot;:{&quot;brightness&quot;:0,&quot;colorType&quot;:2,&quot;rgb&quot;:&quot;#000000&quot;},&quot;depth&quot;:{&quot;colorType&quot;:0}}},&quot;text&quot;:{&quot;fill&quot;:{&quot;gradient&quot;:[{&quot;brightness&quot;:0,&quot;colorType&quot;:1,&quot;foreColorIndex&quot;:5,&quot;pos&quot;:0,&quot;transparency&quot;:0},{&quot;brightness&quot;:0,&quot;colorType&quot;:1,&quot;foreColorIndex&quot;:5,&quot;pos&quot;:1,&quot;transparency&quot;:0.30000001192092896}],&quot;type&quot;:3},&quot;glow&quot;:{&quot;colorType&quot;:0},&quot;line&quot;:{&quot;type&quot;:0},&quot;shadow&quot;:{&quot;colorType&quot;:0},&quot;threeD&quot;:{&quot;curvedSurface&quot;:{&quot;brightness&quot;:0,&quot;colorType&quot;:2,&quot;rgb&quot;:&quot;#000000&quot;},&quot;depth&quot;:{&quot;colorType&quot;:0}}}}"/>
+  <p:tag name="KSO_WM_DIAGRAM_USE_COLOR_VALUE" val="{&quot;color_scheme&quot;:1,&quot;color_type&quot;:1,&quot;theme_color_indexes&quot;:[5,6,5,6,5,6]}"/>
+</p:tagLst>
+</file>
+
+<file path=ppt/tags/tag7.xml><?xml version="1.0" encoding="utf-8"?>
 <p:tagLst xmlns:p="http://schemas.openxmlformats.org/presentationml/2006/main">
   <p:tag name="KSO_WM_UNIT_HIGHLIGHT" val="0"/>
   <p:tag name="KSO_WM_UNIT_COMPATIBLE" val="0"/>
@@ -10322,35 +10696,61 @@
   <p:tag name="KSO_WM_UNIT_TEXT_FILL_TYPE" val="3"/>
   <p:tag name="KSO_WM_DIAGRAM_MAX_ITEMCNT" val="12"/>
   <p:tag name="KSO_WM_DIAGRAM_MIN_ITEMCNT" val="2"/>
-  <p:tag name="KSO_WM_DIAGRAM_VIRTUALLY_FRAME" val="{&quot;height&quot;:392.6499969482422,&quot;left&quot;:0,&quot;top&quot;:104.5,&quot;width&quot;:906.4749938964844}"/>
+  <p:tag name="KSO_WM_DIAGRAM_VIRTUALLY_FRAME" val="{&quot;height&quot;:472.6499969482422,&quot;left&quot;:0,&quot;top&quot;:24.5,&quot;width&quot;:932.55}"/>
   <p:tag name="KSO_WM_DIAGRAM_COLOR_MATCH_VALUE" val="{&quot;shape&quot;:{&quot;fill&quot;:{&quot;type&quot;:0},&quot;glow&quot;:{&quot;colorType&quot;:0},&quot;line&quot;:{&quot;type&quot;:0},&quot;shadow&quot;:{&quot;colorType&quot;:0},&quot;threeD&quot;:{&quot;curvedSurface&quot;:{&quot;brightness&quot;:0,&quot;colorType&quot;:2,&quot;rgb&quot;:&quot;#000000&quot;},&quot;depth&quot;:{&quot;colorType&quot;:0}}},&quot;text&quot;:{&quot;fill&quot;:{&quot;gradient&quot;:[{&quot;brightness&quot;:0,&quot;colorType&quot;:1,&quot;foreColorIndex&quot;:5,&quot;pos&quot;:0,&quot;transparency&quot;:0},{&quot;brightness&quot;:0,&quot;colorType&quot;:1,&quot;foreColorIndex&quot;:5,&quot;pos&quot;:1,&quot;transparency&quot;:0.30000001192092896}],&quot;type&quot;:3},&quot;glow&quot;:{&quot;colorType&quot;:0},&quot;line&quot;:{&quot;type&quot;:0},&quot;shadow&quot;:{&quot;colorType&quot;:0},&quot;threeD&quot;:{&quot;curvedSurface&quot;:{&quot;brightness&quot;:0,&quot;colorType&quot;:2,&quot;rgb&quot;:&quot;#000000&quot;},&quot;depth&quot;:{&quot;colorType&quot;:0}}}}"/>
   <p:tag name="KSO_WM_DIAGRAM_USE_COLOR_VALUE" val="{&quot;color_scheme&quot;:1,&quot;color_type&quot;:1,&quot;theme_color_indexes&quot;:[5,6,5,6,5,6]}"/>
 </p:tagLst>
 </file>
 
-<file path=ppt/tags/tag7.xml><?xml version="1.0" encoding="utf-8"?>
-<p:tagLst xmlns:p="http://schemas.openxmlformats.org/presentationml/2006/main">
-  <p:tag name="MH_TYPE" val="#NeiR#"/>
-  <p:tag name="MH_NUMBER" val="4"/>
-  <p:tag name="MH_CATEGORY" val="#ShuJTB#"/>
-  <p:tag name="MH_LAYOUT" val="SubTitleTextDesc"/>
-  <p:tag name="MH" val="20170612183528"/>
-  <p:tag name="MH_LIBRARY" val="GRAPHIC"/>
-  <p:tag name="RESOURCE_RECORD_KEY" val="{&quot;70&quot;:[3324636]}"/>
-</p:tagLst>
-</file>
-
 <file path=ppt/tags/tag8.xml><?xml version="1.0" encoding="utf-8"?>
 <p:tagLst xmlns:p="http://schemas.openxmlformats.org/presentationml/2006/main">
-  <p:tag name="PA" val="v3.2.0"/>
+  <p:tag name="KSO_WM_UNIT_HIGHLIGHT" val="0"/>
+  <p:tag name="KSO_WM_UNIT_COMPATIBLE" val="0"/>
+  <p:tag name="KSO_WM_UNIT_DIAGRAM_ISNUMVISUAL" val="0"/>
+  <p:tag name="KSO_WM_UNIT_DIAGRAM_ISREFERUNIT" val="0"/>
+  <p:tag name="KSO_WM_UNIT_ID" val="diagram20235153_2*l_h_i*1_3_2"/>
+  <p:tag name="KSO_WM_TEMPLATE_CATEGORY" val="diagram"/>
+  <p:tag name="KSO_WM_TEMPLATE_INDEX" val="20235153"/>
+  <p:tag name="KSO_WM_UNIT_LAYERLEVEL" val="1_1_1"/>
+  <p:tag name="KSO_WM_TAG_VERSION" val="3.0"/>
+  <p:tag name="KSO_WM_DIAGRAM_GROUP_CODE" val="l1-1"/>
+  <p:tag name="KSO_WM_UNIT_TYPE" val="l_h_i"/>
+  <p:tag name="KSO_WM_UNIT_INDEX" val="1_3_2"/>
+  <p:tag name="KSO_WM_DIAGRAM_VERSION" val="3"/>
+  <p:tag name="KSO_WM_DIAGRAM_COLOR_TRICK" val="1"/>
+  <p:tag name="KSO_WM_DIAGRAM_COLOR_TEXT_CAN_REMOVE" val="n"/>
+  <p:tag name="KSO_WM_UNIT_LINE_FORE_SCHEMECOLOR_INDEX" val="5"/>
+  <p:tag name="KSO_WM_DIAGRAM_MAX_ITEMCNT" val="12"/>
+  <p:tag name="KSO_WM_DIAGRAM_MIN_ITEMCNT" val="2"/>
+  <p:tag name="KSO_WM_DIAGRAM_VIRTUALLY_FRAME" val="{&quot;height&quot;:472.6499969482422,&quot;left&quot;:0,&quot;top&quot;:24.5,&quot;width&quot;:932.55}"/>
+  <p:tag name="KSO_WM_DIAGRAM_COLOR_MATCH_VALUE" val="{&quot;shape&quot;:{&quot;fill&quot;:{&quot;solid&quot;:{&quot;brightness&quot;:0,&quot;colorType&quot;:1,&quot;foreColorIndex&quot;:2,&quot;transparency&quot;:1},&quot;type&quot;:1},&quot;glow&quot;:{&quot;colorType&quot;:0},&quot;line&quot;:{&quot;solidLine&quot;:{&quot;brightness&quot;:0,&quot;colorType&quot;:1,&quot;foreColorIndex&quot;:5,&quot;transparency&quot;:0.5},&quot;type&quot;:1},&quot;shadow&quot;:{&quot;colorType&quot;:0},&quot;threeD&quot;:{&quot;curvedSurface&quot;:{&quot;brightness&quot;:0,&quot;colorType&quot;:2,&quot;rgb&quot;:&quot;#000000&quot;},&quot;depth&quot;:{&quot;colorType&quot;:0}}},&quot;text&quot;:{&quot;fill&quot;:{},&quot;glow&quot;:{},&quot;line&quot;:{},&quot;shadow&quot;:{},&quot;threeD&quot;:{}}}"/>
+  <p:tag name="KSO_WM_DIAGRAM_USE_COLOR_VALUE" val="{&quot;color_scheme&quot;:1,&quot;color_type&quot;:1,&quot;theme_color_indexes&quot;:[5,6,5,6,5,6]}"/>
 </p:tagLst>
 </file>
 
 <file path=ppt/tags/tag9.xml><?xml version="1.0" encoding="utf-8"?>
 <p:tagLst xmlns:p="http://schemas.openxmlformats.org/presentationml/2006/main">
-  <p:tag name="ISPRING_PRESENTATION_TITLE" val="彩色叶子手绘小清新ppt"/>
-  <p:tag name="RESOURCE_RECORD_KEY" val="{&quot;70&quot;:[3333435,3324636]}"/>
-  <p:tag name="resource_record_key" val="{&quot;70&quot;:[3333435,3324636,3333497]}"/>
+  <p:tag name="KSO_WM_UNIT_HIGHLIGHT" val="0"/>
+  <p:tag name="KSO_WM_UNIT_COMPATIBLE" val="0"/>
+  <p:tag name="KSO_WM_UNIT_DIAGRAM_ISNUMVISUAL" val="0"/>
+  <p:tag name="KSO_WM_UNIT_DIAGRAM_ISREFERUNIT" val="0"/>
+  <p:tag name="KSO_WM_UNIT_ID" val="diagram20235153_2*l_h_i*1_3_2"/>
+  <p:tag name="KSO_WM_TEMPLATE_CATEGORY" val="diagram"/>
+  <p:tag name="KSO_WM_TEMPLATE_INDEX" val="20235153"/>
+  <p:tag name="KSO_WM_UNIT_LAYERLEVEL" val="1_1_1"/>
+  <p:tag name="KSO_WM_TAG_VERSION" val="3.0"/>
+  <p:tag name="KSO_WM_DIAGRAM_GROUP_CODE" val="l1-1"/>
+  <p:tag name="KSO_WM_UNIT_TYPE" val="l_h_i"/>
+  <p:tag name="KSO_WM_UNIT_INDEX" val="1_3_2"/>
+  <p:tag name="KSO_WM_DIAGRAM_VERSION" val="3"/>
+  <p:tag name="KSO_WM_DIAGRAM_COLOR_TRICK" val="1"/>
+  <p:tag name="KSO_WM_DIAGRAM_COLOR_TEXT_CAN_REMOVE" val="n"/>
+  <p:tag name="KSO_WM_UNIT_LINE_FORE_SCHEMECOLOR_INDEX" val="5"/>
+  <p:tag name="KSO_WM_DIAGRAM_MAX_ITEMCNT" val="12"/>
+  <p:tag name="KSO_WM_DIAGRAM_MIN_ITEMCNT" val="2"/>
+  <p:tag name="KSO_WM_DIAGRAM_VIRTUALLY_FRAME" val="{&quot;height&quot;:472.6499969482422,&quot;left&quot;:0,&quot;top&quot;:24.5,&quot;width&quot;:932.55}"/>
+  <p:tag name="KSO_WM_DIAGRAM_COLOR_MATCH_VALUE" val="{&quot;shape&quot;:{&quot;fill&quot;:{&quot;solid&quot;:{&quot;brightness&quot;:0,&quot;colorType&quot;:1,&quot;foreColorIndex&quot;:2,&quot;transparency&quot;:1},&quot;type&quot;:1},&quot;glow&quot;:{&quot;colorType&quot;:0},&quot;line&quot;:{&quot;solidLine&quot;:{&quot;brightness&quot;:0,&quot;colorType&quot;:1,&quot;foreColorIndex&quot;:5,&quot;transparency&quot;:0.5},&quot;type&quot;:1},&quot;shadow&quot;:{&quot;colorType&quot;:0},&quot;threeD&quot;:{&quot;curvedSurface&quot;:{&quot;brightness&quot;:0,&quot;colorType&quot;:2,&quot;rgb&quot;:&quot;#000000&quot;},&quot;depth&quot;:{&quot;colorType&quot;:0}}},&quot;text&quot;:{&quot;fill&quot;:{},&quot;glow&quot;:{},&quot;line&quot;:{},&quot;shadow&quot;:{},&quot;threeD&quot;:{}}}"/>
+  <p:tag name="KSO_WM_DIAGRAM_USE_COLOR_VALUE" val="{&quot;color_scheme&quot;:1,&quot;color_type&quot;:1,&quot;theme_color_indexes&quot;:[5,6,5,6,5,6]}"/>
 </p:tagLst>
 </file>
 

--- a/Homework/finance/2023200073/pythonFINAL .pptx
+++ b/Homework/finance/2023200073/pythonFINAL .pptx
@@ -122,12 +122,12 @@
             <a:srgbClr val="A4A3A4"/>
           </p15:clr>
         </p15:guide>
-        <p15:guide id="2" pos="3839" userDrawn="1">
+        <p15:guide id="2" pos="3834" userDrawn="1">
           <p15:clr>
             <a:srgbClr val="A4A3A4"/>
           </p15:clr>
         </p15:guide>
-        <p15:guide id="3" orient="horz" pos="2074" userDrawn="1">
+        <p15:guide id="3" orient="horz" pos="2034" userDrawn="1">
           <p15:clr>
             <a:srgbClr val="A4A3A4"/>
           </p15:clr>
@@ -5486,28 +5486,6 @@
                 <a:spcPct val="0"/>
               </a:spcAft>
             </a:pPr>
-            <a:r>
-              <a:rPr lang="en-US" altLang="zh-CN" sz="2400" b="1" dirty="0">
-                <a:solidFill>
-                  <a:schemeClr val="accent1"/>
-                </a:solidFill>
-                <a:latin typeface="+mn-ea"/>
-                <a:cs typeface="+mn-ea"/>
-                <a:sym typeface="+mn-ea"/>
-              </a:rPr>
-              <a:t>Stage 1</a:t>
-            </a:r>
-            <a:r>
-              <a:rPr lang="zh-CN" altLang="en-US" sz="2400" b="1" dirty="0">
-                <a:solidFill>
-                  <a:schemeClr val="accent1"/>
-                </a:solidFill>
-                <a:latin typeface="+mn-ea"/>
-                <a:cs typeface="+mn-ea"/>
-                <a:sym typeface="+mn-ea"/>
-              </a:rPr>
-              <a:t>：</a:t>
-            </a:r>
             <a:endParaRPr lang="zh-CN" altLang="en-US" sz="2400" b="1" dirty="0">
               <a:solidFill>
                 <a:schemeClr val="accent1"/>
@@ -6203,56 +6181,6 @@
                   <a:spcPct val="0"/>
                 </a:spcAft>
               </a:pPr>
-              <a:r>
-                <a:rPr lang="en-US" altLang="zh-CN" sz="2400" b="1" dirty="0">
-                  <a:solidFill>
-                    <a:schemeClr val="accent1"/>
-                  </a:solidFill>
-                  <a:latin typeface="+mn-ea"/>
-                  <a:cs typeface="+mn-ea"/>
-                  <a:sym typeface="+mn-ea"/>
-                </a:rPr>
-                <a:t>Stage 1</a:t>
-              </a:r>
-              <a:r>
-                <a:rPr lang="zh-CN" altLang="en-US" sz="2400" b="1" dirty="0">
-                  <a:solidFill>
-                    <a:schemeClr val="accent1"/>
-                  </a:solidFill>
-                  <a:latin typeface="+mn-ea"/>
-                  <a:cs typeface="+mn-ea"/>
-                  <a:sym typeface="+mn-ea"/>
-                </a:rPr>
-                <a:t>：</a:t>
-              </a:r>
-              <a:endParaRPr lang="zh-CN" altLang="en-US" sz="2400" b="1" dirty="0">
-                <a:solidFill>
-                  <a:schemeClr val="accent1"/>
-                </a:solidFill>
-                <a:latin typeface="+mn-ea"/>
-                <a:cs typeface="+mn-ea"/>
-              </a:endParaRPr>
-            </a:p>
-            <a:p>
-              <a:pPr algn="ctr">
-                <a:spcBef>
-                  <a:spcPct val="0"/>
-                </a:spcBef>
-                <a:spcAft>
-                  <a:spcPct val="0"/>
-                </a:spcAft>
-              </a:pPr>
-              <a:r>
-                <a:rPr lang="zh-CN" altLang="en-US" sz="2400" b="1" dirty="0">
-                  <a:solidFill>
-                    <a:schemeClr val="accent1"/>
-                  </a:solidFill>
-                  <a:latin typeface="+mn-ea"/>
-                  <a:cs typeface="+mn-ea"/>
-                  <a:sym typeface="+mn-ea"/>
-                </a:rPr>
-                <a:t>剥离地段价值</a:t>
-              </a:r>
               <a:endParaRPr lang="zh-CN" altLang="en-US" sz="2400" b="1" dirty="0">
                 <a:solidFill>
                   <a:schemeClr val="accent1"/>
@@ -6769,10 +6697,10 @@
         </p:nvGrpSpPr>
         <p:grpSpPr>
           <a:xfrm>
-            <a:off x="387350" y="311150"/>
-            <a:ext cx="11624945" cy="3150235"/>
+            <a:off x="344170" y="55245"/>
+            <a:ext cx="11625580" cy="3233420"/>
             <a:chOff x="610" y="490"/>
-            <a:chExt cx="18307" cy="4961"/>
+            <a:chExt cx="18308" cy="5092"/>
           </a:xfrm>
         </p:grpSpPr>
         <p:sp>
@@ -6783,7 +6711,7 @@
           </p:nvSpPr>
           <p:spPr>
             <a:xfrm>
-              <a:off x="659" y="1312"/>
+              <a:off x="659" y="1167"/>
               <a:ext cx="18259" cy="1695"/>
             </a:xfrm>
             <a:prstGeom prst="rect">
@@ -6881,38 +6809,38 @@
                 <a:t>交叉验证，从粗到细计算出四个层级的地理区域均价，包括：</a:t>
               </a:r>
               <a:r>
-                <a:rPr lang="en-US" altLang="zh-CN" sz="1600"/>
+                <a:rPr lang="en-US" altLang="zh-CN" sz="1600" b="1"/>
                 <a:t>City_TE</a:t>
               </a:r>
               <a:r>
-                <a:rPr lang="zh-CN" altLang="en-US" sz="1600"/>
+                <a:rPr lang="zh-CN" altLang="en-US" sz="1600" b="1"/>
                 <a:t>（城市均价）、</a:t>
               </a:r>
               <a:r>
-                <a:rPr lang="en-US" altLang="zh-CN" sz="1600"/>
+                <a:rPr lang="en-US" altLang="zh-CN" sz="1600" b="1"/>
                 <a:t>Region_TE</a:t>
               </a:r>
               <a:r>
-                <a:rPr lang="zh-CN" altLang="en-US" sz="1600"/>
+                <a:rPr lang="zh-CN" altLang="en-US" sz="1600" b="1"/>
                 <a:t>（区域均价）、</a:t>
               </a:r>
               <a:r>
-                <a:rPr lang="en-US" altLang="zh-CN" sz="1600"/>
+                <a:rPr lang="en-US" altLang="zh-CN" sz="1600" b="1"/>
                 <a:t>Block_TE</a:t>
               </a:r>
               <a:r>
-                <a:rPr lang="zh-CN" altLang="en-US" sz="1600"/>
+                <a:rPr lang="zh-CN" altLang="en-US" sz="1600" b="1"/>
                 <a:t>（板块均价）以及</a:t>
               </a:r>
               <a:r>
-                <a:rPr lang="en-US" altLang="zh-CN" sz="1600"/>
+                <a:rPr lang="en-US" altLang="zh-CN" sz="1600" b="1"/>
                 <a:t>Cluster_TE</a:t>
               </a:r>
               <a:r>
-                <a:rPr lang="zh-CN" altLang="en-US" sz="1600"/>
+                <a:rPr lang="zh-CN" altLang="en-US" sz="1600" b="1"/>
                 <a:t>（地理簇均价）</a:t>
               </a:r>
-              <a:endParaRPr lang="zh-CN" altLang="en-US" sz="1600"/>
+              <a:endParaRPr lang="zh-CN" altLang="en-US" sz="1600" b="1"/>
             </a:p>
           </p:txBody>
         </p:sp>
@@ -6924,7 +6852,7 @@
           </p:nvSpPr>
           <p:spPr>
             <a:xfrm>
-              <a:off x="610" y="2862"/>
+              <a:off x="610" y="2729"/>
               <a:ext cx="18232" cy="2082"/>
             </a:xfrm>
             <a:prstGeom prst="rect">
@@ -6951,123 +6879,59 @@
               <a:pPr indent="457200"/>
               <a:r>
                 <a:rPr lang="zh-CN" altLang="en-US" sz="1600"/>
-                <a:t>反复尝试，首先尝试将地理层次变量</a:t>
-              </a:r>
-              <a:r>
-                <a:rPr lang="en-US" altLang="zh-CN" sz="1600"/>
+                <a:t>反复尝试，首先尝试</a:t>
+              </a:r>
+              <a:r>
+                <a:rPr lang="zh-CN" altLang="en-US" sz="1600" b="1"/>
+                <a:t>将地理层次变量</a:t>
+              </a:r>
+              <a:r>
+                <a:rPr lang="en-US" altLang="zh-CN" sz="1600" b="1"/>
                 <a:t>0/1</a:t>
               </a:r>
               <a:r>
+                <a:rPr lang="zh-CN" altLang="en-US" sz="1600" b="1"/>
+                <a:t>编码</a:t>
+              </a:r>
+              <a:r>
                 <a:rPr lang="zh-CN" altLang="en-US" sz="1600"/>
-                <a:t>编码，进行预测</a:t>
+                <a:t>，进行预测</a:t>
               </a:r>
               <a:r>
                 <a:rPr lang="en-US" altLang="zh-CN" sz="1600"/>
                 <a:t>——&gt;</a:t>
               </a:r>
               <a:r>
-                <a:rPr lang="zh-CN" altLang="en-US" sz="1600">
-                  <a:highlight>
-                    <a:srgbClr val="FFFF00"/>
-                  </a:highlight>
-                </a:rPr>
+                <a:rPr lang="zh-CN" altLang="en-US" sz="1600" b="1"/>
                 <a:t>添加更多特征</a:t>
               </a:r>
               <a:r>
-                <a:rPr lang="en-US" altLang="zh-CN" sz="1600">
-                  <a:highlight>
-                    <a:srgbClr val="FFFF00"/>
-                  </a:highlight>
-                </a:rPr>
+                <a:rPr lang="en-US" altLang="zh-CN" sz="1600"/>
                 <a:t>“</a:t>
               </a:r>
               <a:r>
-                <a:rPr lang="zh-CN" altLang="en-US" sz="1600">
-                  <a:highlight>
-                    <a:srgbClr val="FFFF00"/>
-                  </a:highlight>
-                </a:rPr>
+                <a:rPr lang="zh-CN" altLang="en-US" sz="1600"/>
                 <a:t>绿化率</a:t>
               </a:r>
               <a:r>
-                <a:rPr lang="en-US" altLang="zh-CN" sz="1600">
-                  <a:highlight>
-                    <a:srgbClr val="FFFF00"/>
-                  </a:highlight>
-                </a:rPr>
+                <a:rPr lang="en-US" altLang="zh-CN" sz="1600"/>
                 <a:t>”</a:t>
               </a:r>
               <a:r>
-                <a:rPr lang="zh-CN" altLang="en-US" sz="1600">
-                  <a:highlight>
-                    <a:srgbClr val="FFFF00"/>
-                  </a:highlight>
-                </a:rPr>
+                <a:rPr lang="zh-CN" altLang="en-US" sz="1600"/>
                 <a:t>、</a:t>
               </a:r>
               <a:r>
-                <a:rPr lang="en-US" altLang="zh-CN" sz="1600">
-                  <a:highlight>
-                    <a:srgbClr val="FFFF00"/>
-                  </a:highlight>
-                </a:rPr>
+                <a:rPr lang="en-US" altLang="zh-CN" sz="1600"/>
                 <a:t>“</a:t>
               </a:r>
               <a:r>
-                <a:rPr lang="zh-CN" altLang="en-US" sz="1600">
-                  <a:highlight>
-                    <a:srgbClr val="FFFF00"/>
-                  </a:highlight>
-                </a:rPr>
+                <a:rPr lang="zh-CN" altLang="en-US" sz="1600"/>
                 <a:t>容积率</a:t>
               </a:r>
               <a:r>
-                <a:rPr lang="en-US" altLang="zh-CN" sz="1600">
-                  <a:highlight>
-                    <a:srgbClr val="FFFF00"/>
-                  </a:highlight>
-                </a:rPr>
+                <a:rPr lang="en-US" altLang="zh-CN" sz="1600"/>
                 <a:t>”</a:t>
-              </a:r>
-              <a:r>
-                <a:rPr lang="zh-CN" altLang="en-US" sz="1600">
-                  <a:highlight>
-                    <a:srgbClr val="FFFF00"/>
-                  </a:highlight>
-                </a:rPr>
-                <a:t>，</a:t>
-              </a:r>
-              <a:r>
-                <a:rPr lang="en-US" altLang="zh-CN" sz="1600">
-                  <a:highlight>
-                    <a:srgbClr val="FFFF00"/>
-                  </a:highlight>
-                </a:rPr>
-                <a:t>“</a:t>
-              </a:r>
-              <a:r>
-                <a:rPr lang="zh-CN" altLang="en-US" sz="1600">
-                  <a:highlight>
-                    <a:srgbClr val="FFFF00"/>
-                  </a:highlight>
-                </a:rPr>
-                <a:t>停车费</a:t>
-              </a:r>
-              <a:r>
-                <a:rPr lang="en-US" altLang="zh-CN" sz="1600">
-                  <a:highlight>
-                    <a:srgbClr val="FFFF00"/>
-                  </a:highlight>
-                </a:rPr>
-                <a:t>”...</a:t>
-              </a:r>
-              <a:r>
-                <a:rPr lang="zh-CN" altLang="en-US" sz="1600">
-                  <a:highlight>
-                    <a:srgbClr val="FFFF00"/>
-                  </a:highlight>
-                </a:rPr>
-                <a:t>再次预测</a:t>
               </a:r>
               <a:r>
                 <a:rPr lang="zh-CN" altLang="en-US" sz="1600"/>
@@ -7075,6 +6939,22 @@
               </a:r>
               <a:r>
                 <a:rPr lang="en-US" altLang="zh-CN" sz="1600"/>
+                <a:t>“</a:t>
+              </a:r>
+              <a:r>
+                <a:rPr lang="zh-CN" altLang="en-US" sz="1600"/>
+                <a:t>停车费</a:t>
+              </a:r>
+              <a:r>
+                <a:rPr lang="en-US" altLang="zh-CN" sz="1600"/>
+                <a:t>”...</a:t>
+              </a:r>
+              <a:r>
+                <a:rPr lang="zh-CN" altLang="en-US" sz="1600"/>
+                <a:t>再次预测，</a:t>
+              </a:r>
+              <a:r>
+                <a:rPr lang="en-US" altLang="zh-CN" sz="1600"/>
                 <a:t>optuna</a:t>
               </a:r>
               <a:r>
@@ -7094,16 +6974,20 @@
                 <a:t>——&gt;</a:t>
               </a:r>
               <a:r>
+                <a:rPr lang="zh-CN" altLang="en-US" sz="1600" b="1" u="sng"/>
+                <a:t>加入</a:t>
+              </a:r>
+              <a:r>
+                <a:rPr lang="en-US" altLang="zh-CN" sz="1600" b="1" u="sng"/>
+                <a:t>Kmeans</a:t>
+              </a:r>
+              <a:r>
+                <a:rPr lang="zh-CN" altLang="en-US" sz="1600" b="1" u="sng"/>
+                <a:t>目标编码</a:t>
+              </a:r>
+              <a:r>
                 <a:rPr lang="zh-CN" altLang="en-US" sz="1600"/>
-                <a:t>加入</a:t>
-              </a:r>
-              <a:r>
-                <a:rPr lang="en-US" altLang="zh-CN" sz="1600"/>
-                <a:t>Kmeans</a:t>
-              </a:r>
-              <a:r>
-                <a:rPr lang="zh-CN" altLang="en-US" sz="1600"/>
-                <a:t>目标编码，同样不对地理特征</a:t>
+                <a:t>，同样不对地理特征</a:t>
               </a:r>
               <a:r>
                 <a:rPr lang="en-US" altLang="zh-CN" sz="1600"/>
@@ -7133,27 +7017,33 @@
                 <a:rPr lang="zh-CN" altLang="en-US" sz="1600">
                   <a:sym typeface="+mn-ea"/>
                 </a:rPr>
-                <a:t>如地理区位编码，则利用</a:t>
-              </a:r>
-              <a:r>
-                <a:rPr lang="en-US" altLang="zh-CN" sz="1600">
+                <a:t>地理区位编码，则</a:t>
+              </a:r>
+              <a:r>
+                <a:rPr lang="zh-CN" altLang="en-US" sz="1600" b="1">
+                  <a:sym typeface="+mn-ea"/>
+                </a:rPr>
+                <a:t>利用</a:t>
+              </a:r>
+              <a:r>
+                <a:rPr lang="en-US" altLang="zh-CN" sz="1600" b="1" u="sng">
                   <a:sym typeface="+mn-ea"/>
                 </a:rPr>
                 <a:t>lon,lat</a:t>
               </a:r>
               <a:r>
-                <a:rPr lang="zh-CN" altLang="en-US" sz="1600">
+                <a:rPr lang="zh-CN" altLang="en-US" sz="1600" b="1" u="sng">
                   <a:sym typeface="+mn-ea"/>
                 </a:rPr>
                 <a:t>来</a:t>
               </a:r>
               <a:r>
-                <a:rPr lang="en-US" altLang="zh-CN" sz="1600">
+                <a:rPr lang="en-US" altLang="zh-CN" sz="1600" b="1" u="sng">
                   <a:sym typeface="+mn-ea"/>
                 </a:rPr>
                 <a:t>KNN</a:t>
               </a:r>
-              <a:endParaRPr lang="zh-CN" altLang="en-US" sz="1600"/>
+              <a:endParaRPr lang="zh-CN" altLang="en-US" sz="1600" b="1" u="sng"/>
             </a:p>
           </p:txBody>
         </p:sp>
@@ -7165,8 +7055,8 @@
           </p:nvSpPr>
           <p:spPr>
             <a:xfrm>
-              <a:off x="618" y="4921"/>
-              <a:ext cx="9567" cy="531"/>
+              <a:off x="610" y="4663"/>
+              <a:ext cx="10084" cy="919"/>
             </a:xfrm>
             <a:prstGeom prst="rect">
               <a:avLst/>
@@ -7201,6 +7091,39 @@
               <a:r>
                 <a:rPr lang="zh-CN" altLang="en-US" sz="1600"/>
                 <a:t>叠加，进行预测</a:t>
+              </a:r>
+              <a:endParaRPr lang="zh-CN" altLang="en-US" sz="1600"/>
+            </a:p>
+            <a:p>
+              <a:r>
+                <a:rPr lang="en-US" altLang="zh-CN" sz="1600"/>
+                <a:t>4</a:t>
+              </a:r>
+              <a:r>
+                <a:rPr lang="zh-CN" altLang="en-US" sz="1600"/>
+                <a:t>、调用已</a:t>
+              </a:r>
+              <a:r>
+                <a:rPr lang="zh-CN" altLang="en-US" sz="1600">
+                  <a:sym typeface="+mn-ea"/>
+                </a:rPr>
+                <a:t>在大众点评中文评论上微调过的</a:t>
+              </a:r>
+              <a:r>
+                <a:rPr lang="zh-CN" altLang="en-US" sz="1600"/>
+                <a:t>的</a:t>
+              </a:r>
+              <a:r>
+                <a:rPr lang="en-US" altLang="zh-CN" sz="1600"/>
+                <a:t>BERT</a:t>
+              </a:r>
+              <a:r>
+                <a:rPr lang="zh-CN" altLang="en-US" sz="1600"/>
+                <a:t>，处理客户</a:t>
+              </a:r>
+              <a:r>
+                <a:rPr lang="zh-CN" altLang="en-US" sz="1600"/>
+                <a:t>反馈</a:t>
               </a:r>
               <a:endParaRPr lang="zh-CN" altLang="en-US" sz="1600"/>
             </a:p>
@@ -7256,10 +7179,10 @@
         </p:nvGrpSpPr>
         <p:grpSpPr>
           <a:xfrm>
-            <a:off x="393065" y="3541395"/>
-            <a:ext cx="11619230" cy="2999105"/>
-            <a:chOff x="619" y="5577"/>
-            <a:chExt cx="18298" cy="4723"/>
+            <a:off x="344170" y="3288665"/>
+            <a:ext cx="11659235" cy="3615055"/>
+            <a:chOff x="455" y="5910"/>
+            <a:chExt cx="18361" cy="5693"/>
           </a:xfrm>
         </p:grpSpPr>
         <p:sp>
@@ -7270,8 +7193,8 @@
           </p:nvSpPr>
           <p:spPr>
             <a:xfrm>
-              <a:off x="10331" y="7104"/>
-              <a:ext cx="8587" cy="3197"/>
+              <a:off x="9784" y="9715"/>
+              <a:ext cx="9032" cy="1888"/>
             </a:xfrm>
             <a:prstGeom prst="rect">
               <a:avLst/>
@@ -7329,60 +7252,13 @@
               </a:r>
               <a:r>
                 <a:rPr lang="zh-CN" altLang="en-US"/>
-                <a:t>：生成器试图生成假数据，判别器努力区分真实数据与生成数据。经多轮博弈，生成器逐渐掌握数据的分布和列间关联（</a:t>
-              </a:r>
-              <a:r>
-                <a:rPr lang="en-US" altLang="zh-CN"/>
-                <a:t>eg:“</a:t>
-              </a:r>
-              <a:r>
-                <a:rPr lang="zh-CN" altLang="en-US"/>
-                <a:t>面积</a:t>
-              </a:r>
-              <a:r>
-                <a:rPr lang="en-US" altLang="zh-CN"/>
-                <a:t>”</a:t>
-              </a:r>
-              <a:r>
-                <a:rPr lang="zh-CN" altLang="en-US"/>
-                <a:t>与</a:t>
-              </a:r>
-              <a:r>
-                <a:rPr lang="en-US" altLang="zh-CN"/>
-                <a:t>“</a:t>
-              </a:r>
-              <a:r>
-                <a:rPr lang="zh-CN" altLang="en-US"/>
-                <a:t>物业费</a:t>
-              </a:r>
-              <a:r>
-                <a:rPr lang="en-US" altLang="zh-CN"/>
-                <a:t>”</a:t>
-              </a:r>
-              <a:r>
-                <a:rPr lang="zh-CN" altLang="en-US"/>
-                <a:t>的正相关性）</a:t>
-              </a:r>
-              <a:endParaRPr lang="zh-CN" altLang="en-US"/>
-            </a:p>
-            <a:p>
-              <a:pPr marL="285750" indent="-285750">
-                <a:buFont typeface="Arial" panose="020B0604020202020204" pitchFamily="34" charset="0"/>
-                <a:buChar char="•"/>
-              </a:pPr>
-              <a:r>
-                <a:rPr lang="zh-CN" altLang="en-US"/>
-                <a:t>训练完成后，模型采样生成数据。数字还原为带单位的字符串，生成不重复的新</a:t>
-              </a:r>
-              <a:r>
-                <a:rPr lang="en-US" altLang="zh-CN"/>
-                <a:t>ID</a:t>
-              </a:r>
-              <a:r>
-                <a:rPr lang="zh-CN" altLang="en-US"/>
-                <a:t>。</a:t>
-              </a:r>
-              <a:endParaRPr lang="zh-CN" altLang="en-US"/>
+                <a:t>：生成器试图生成假数据，判别器努力区分真实数据与生成数据。经多轮博弈，生成器逐渐掌握</a:t>
+              </a:r>
+              <a:r>
+                <a:rPr lang="zh-CN" altLang="en-US" b="1"/>
+                <a:t>数据的分布和列间关联</a:t>
+              </a:r>
+              <a:endParaRPr lang="zh-CN" altLang="en-US" b="1"/>
             </a:p>
           </p:txBody>
         </p:sp>
@@ -7394,7 +7270,7 @@
           </p:nvSpPr>
           <p:spPr>
             <a:xfrm>
-              <a:off x="619" y="5577"/>
+              <a:off x="455" y="5910"/>
               <a:ext cx="8779" cy="580"/>
             </a:xfrm>
             <a:prstGeom prst="rect">
@@ -7409,7 +7285,7 @@
             <a:p>
               <a:r>
                 <a:rPr lang="en-US" altLang="zh-CN" b="1"/>
-                <a:t>4</a:t>
+                <a:t>5</a:t>
               </a:r>
               <a:r>
                 <a:rPr lang="zh-CN" altLang="en-US" b="1"/>
@@ -7452,8 +7328,8 @@
         </p:blipFill>
         <p:spPr>
           <a:xfrm>
-            <a:off x="7209790" y="3141345"/>
-            <a:ext cx="2395220" cy="1368425"/>
+            <a:off x="6383655" y="2705100"/>
+            <a:ext cx="2257425" cy="1447800"/>
           </a:xfrm>
           <a:prstGeom prst="rect">
             <a:avLst/>
@@ -7467,7 +7343,7 @@
           <p:nvPr/>
         </p:nvGraphicFramePr>
         <p:xfrm>
-          <a:off x="418465" y="3989070"/>
+          <a:off x="81915" y="4311650"/>
           <a:ext cx="5988050" cy="2552065"/>
         </p:xfrm>
         <a:graphic>
@@ -9258,7 +9134,7 @@
                       <a:pPr fontAlgn="t"/>
                       <a:r>
                         <a:rPr lang="en-US" altLang="zh-CN" sz="1100"/>
-                        <a:t>75.4</a:t>
+                        <a:t>75.9</a:t>
                       </a:r>
                       <a:endParaRPr lang="en-US" altLang="zh-CN" sz="1100"/>
                     </a:p>
@@ -9548,7 +9424,7 @@
                       <a:pPr fontAlgn="t"/>
                       <a:r>
                         <a:rPr lang="en-US" altLang="zh-CN" sz="1100"/>
-                        <a:t>75.4</a:t>
+                        <a:t>75.9</a:t>
                       </a:r>
                       <a:endParaRPr lang="en-US" altLang="zh-CN" sz="1100"/>
                     </a:p>
@@ -9838,7 +9714,7 @@
                       <a:pPr fontAlgn="t"/>
                       <a:r>
                         <a:rPr lang="en-US" altLang="zh-CN" sz="1100"/>
-                        <a:t>75.0</a:t>
+                        <a:t>75.8</a:t>
                       </a:r>
                       <a:endParaRPr lang="en-US" altLang="zh-CN" sz="1100"/>
                     </a:p>
@@ -10130,7 +10006,7 @@
                       <a:pPr fontAlgn="t"/>
                       <a:r>
                         <a:rPr lang="en-US" altLang="zh-CN" sz="1100"/>
-                        <a:t>75.0</a:t>
+                        <a:t>75.8</a:t>
                       </a:r>
                       <a:endParaRPr lang="en-US" altLang="zh-CN" sz="1100"/>
                     </a:p>
@@ -10176,6 +10052,87 @@
           </a:graphicData>
         </a:graphic>
       </p:graphicFrame>
+      <p:pic>
+        <p:nvPicPr>
+          <p:cNvPr id="3" name="图片 2"/>
+          <p:cNvPicPr>
+            <a:picLocks noChangeAspect="1"/>
+          </p:cNvPicPr>
+          <p:nvPr/>
+        </p:nvPicPr>
+        <p:blipFill>
+          <a:blip r:embed="rId2"/>
+          <a:stretch>
+            <a:fillRect/>
+          </a:stretch>
+        </p:blipFill>
+        <p:spPr>
+          <a:xfrm>
+            <a:off x="6543675" y="4625975"/>
+            <a:ext cx="5031740" cy="1163320"/>
+          </a:xfrm>
+          <a:prstGeom prst="rect">
+            <a:avLst/>
+          </a:prstGeom>
+        </p:spPr>
+      </p:pic>
+      <p:pic>
+        <p:nvPicPr>
+          <p:cNvPr id="6" name="图片 5"/>
+          <p:cNvPicPr>
+            <a:picLocks noChangeAspect="1"/>
+          </p:cNvPicPr>
+          <p:nvPr/>
+        </p:nvPicPr>
+        <p:blipFill>
+          <a:blip r:embed="rId3"/>
+          <a:stretch>
+            <a:fillRect/>
+          </a:stretch>
+        </p:blipFill>
+        <p:spPr>
+          <a:xfrm>
+            <a:off x="6019165" y="4206875"/>
+            <a:ext cx="6172835" cy="419100"/>
+          </a:xfrm>
+          <a:prstGeom prst="rect">
+            <a:avLst/>
+          </a:prstGeom>
+        </p:spPr>
+      </p:pic>
+      <p:sp>
+        <p:nvSpPr>
+          <p:cNvPr id="7" name="文本框 6"/>
+          <p:cNvSpPr txBox="1"/>
+          <p:nvPr/>
+        </p:nvSpPr>
+        <p:spPr>
+          <a:xfrm>
+            <a:off x="8486140" y="3860800"/>
+            <a:ext cx="2325370" cy="368300"/>
+          </a:xfrm>
+          <a:prstGeom prst="rect">
+            <a:avLst/>
+          </a:prstGeom>
+          <a:noFill/>
+        </p:spPr>
+        <p:txBody>
+          <a:bodyPr wrap="square" rtlCol="0">
+            <a:spAutoFit/>
+          </a:bodyPr>
+          <a:p>
+            <a:r>
+              <a:rPr lang="en-US" altLang="zh-CN"/>
+              <a:t>GAN</a:t>
+            </a:r>
+            <a:r>
+              <a:rPr lang="zh-CN" altLang="en-US"/>
+              <a:t>目标函数：</a:t>
+            </a:r>
+            <a:endParaRPr lang="zh-CN" altLang="en-US"/>
+          </a:p>
+        </p:txBody>
+      </p:sp>
     </p:spTree>
   </p:cSld>
   <p:clrMapOvr>
